--- a/public/fun/pack/pptx/review/보장점검양식_24_부모님점검_절집풍경.pptx
+++ b/public/fun/pack/pptx/review/보장점검양식_24_부모님점검_절집풍경.pptx
@@ -3347,7 +3347,7 @@
             <a:r>
               <a:rPr sz="3600" b="1" i="0">
                 <a:solidFill>
-                  <a:srgbClr val="274649"/>
+                  <a:srgbClr val="11595F"/>
                 </a:solidFill>
               </a:rPr>
               <a:t>우리 보험 점검 시간</a:t>
@@ -3385,7 +3385,7 @@
             <a:r>
               <a:rPr sz="1700" b="0" i="1">
                 <a:solidFill>
-                  <a:srgbClr val="274649"/>
+                  <a:srgbClr val="11595F"/>
                 </a:solidFill>
               </a:rPr>
               <a:t>더운 날 건강 챙기는 김에 같이 봅니다</a:t>
@@ -3460,7 +3460,7 @@
     <p:bg>
       <p:bgPr>
         <a:solidFill>
-          <a:srgbClr val="F2F7F8"/>
+          <a:srgbClr val="EEFBFC"/>
         </a:solidFill>
         <a:effectLst/>
       </p:bgPr>
@@ -3489,7 +3489,7 @@
           <a:noFill/>
           <a:ln w="28575">
             <a:solidFill>
-              <a:srgbClr val="4B868B"/>
+              <a:srgbClr val="26B8C5"/>
             </a:solidFill>
           </a:ln>
         </p:spPr>
@@ -3518,7 +3518,7 @@
           <a:noFill/>
           <a:ln w="9525">
             <a:solidFill>
-              <a:srgbClr val="D6E9EB"/>
+              <a:srgbClr val="D1F7FA"/>
             </a:solidFill>
           </a:ln>
         </p:spPr>
@@ -3560,7 +3560,7 @@
             <a:r>
               <a:rPr sz="3000" b="1" i="0">
                 <a:solidFill>
-                  <a:srgbClr val="274649"/>
+                  <a:srgbClr val="11595F"/>
                 </a:solidFill>
               </a:rPr>
               <a:t>점검 대상 현황</a:t>
@@ -3611,30 +3611,30 @@
                   <a:tcPr anchor="ctr" marL="73152" marR="73152">
                     <a:lnL w="9525" cap="flat" cmpd="sng" algn="ctr">
                       <a:solidFill>
-                        <a:srgbClr val="4B868B"/>
+                        <a:srgbClr val="26B8C5"/>
                       </a:solidFill>
                       <a:prstDash val="solid"/>
                     </a:lnL>
                     <a:lnR w="9525" cap="flat" cmpd="sng" algn="ctr">
                       <a:solidFill>
-                        <a:srgbClr val="4B868B"/>
+                        <a:srgbClr val="26B8C5"/>
                       </a:solidFill>
                       <a:prstDash val="solid"/>
                     </a:lnR>
                     <a:lnT w="9525" cap="flat" cmpd="sng" algn="ctr">
                       <a:solidFill>
-                        <a:srgbClr val="4B868B"/>
+                        <a:srgbClr val="26B8C5"/>
                       </a:solidFill>
                       <a:prstDash val="solid"/>
                     </a:lnT>
                     <a:lnB w="9525" cap="flat" cmpd="sng" algn="ctr">
                       <a:solidFill>
-                        <a:srgbClr val="4B868B"/>
+                        <a:srgbClr val="26B8C5"/>
                       </a:solidFill>
                       <a:prstDash val="solid"/>
                     </a:lnB>
                     <a:solidFill>
-                      <a:srgbClr val="4B868B"/>
+                      <a:srgbClr val="26B8C5"/>
                     </a:solidFill>
                   </a:tcPr>
                 </a:tc>
@@ -3657,30 +3657,30 @@
                   <a:tcPr anchor="ctr" marL="73152" marR="73152">
                     <a:lnL w="9525" cap="flat" cmpd="sng" algn="ctr">
                       <a:solidFill>
-                        <a:srgbClr val="4B868B"/>
+                        <a:srgbClr val="26B8C5"/>
                       </a:solidFill>
                       <a:prstDash val="solid"/>
                     </a:lnL>
                     <a:lnR w="9525" cap="flat" cmpd="sng" algn="ctr">
                       <a:solidFill>
-                        <a:srgbClr val="4B868B"/>
+                        <a:srgbClr val="26B8C5"/>
                       </a:solidFill>
                       <a:prstDash val="solid"/>
                     </a:lnR>
                     <a:lnT w="9525" cap="flat" cmpd="sng" algn="ctr">
                       <a:solidFill>
-                        <a:srgbClr val="4B868B"/>
+                        <a:srgbClr val="26B8C5"/>
                       </a:solidFill>
                       <a:prstDash val="solid"/>
                     </a:lnT>
                     <a:lnB w="9525" cap="flat" cmpd="sng" algn="ctr">
                       <a:solidFill>
-                        <a:srgbClr val="4B868B"/>
+                        <a:srgbClr val="26B8C5"/>
                       </a:solidFill>
                       <a:prstDash val="solid"/>
                     </a:lnB>
                     <a:solidFill>
-                      <a:srgbClr val="4B868B"/>
+                      <a:srgbClr val="26B8C5"/>
                     </a:solidFill>
                   </a:tcPr>
                 </a:tc>
@@ -3703,30 +3703,30 @@
                   <a:tcPr anchor="ctr" marL="73152" marR="73152">
                     <a:lnL w="9525" cap="flat" cmpd="sng" algn="ctr">
                       <a:solidFill>
-                        <a:srgbClr val="4B868B"/>
+                        <a:srgbClr val="26B8C5"/>
                       </a:solidFill>
                       <a:prstDash val="solid"/>
                     </a:lnL>
                     <a:lnR w="9525" cap="flat" cmpd="sng" algn="ctr">
                       <a:solidFill>
-                        <a:srgbClr val="4B868B"/>
+                        <a:srgbClr val="26B8C5"/>
                       </a:solidFill>
                       <a:prstDash val="solid"/>
                     </a:lnR>
                     <a:lnT w="9525" cap="flat" cmpd="sng" algn="ctr">
                       <a:solidFill>
-                        <a:srgbClr val="4B868B"/>
+                        <a:srgbClr val="26B8C5"/>
                       </a:solidFill>
                       <a:prstDash val="solid"/>
                     </a:lnT>
                     <a:lnB w="9525" cap="flat" cmpd="sng" algn="ctr">
                       <a:solidFill>
-                        <a:srgbClr val="4B868B"/>
+                        <a:srgbClr val="26B8C5"/>
                       </a:solidFill>
                       <a:prstDash val="solid"/>
                     </a:lnB>
                     <a:solidFill>
-                      <a:srgbClr val="4B868B"/>
+                      <a:srgbClr val="26B8C5"/>
                     </a:solidFill>
                   </a:tcPr>
                 </a:tc>
@@ -3741,7 +3741,7 @@
                       <a:r>
                         <a:rPr sz="1600" b="1">
                           <a:solidFill>
-                            <a:srgbClr val="274649"/>
+                            <a:srgbClr val="11595F"/>
                           </a:solidFill>
                         </a:rPr>
                         <a:t>성함</a:t>
@@ -3751,30 +3751,30 @@
                   <a:tcPr anchor="ctr" marL="73152" marR="73152">
                     <a:lnL w="9525" cap="flat" cmpd="sng" algn="ctr">
                       <a:solidFill>
-                        <a:srgbClr val="D6E9EB"/>
+                        <a:srgbClr val="D1F7FA"/>
                       </a:solidFill>
                       <a:prstDash val="solid"/>
                     </a:lnL>
                     <a:lnR w="9525" cap="flat" cmpd="sng" algn="ctr">
                       <a:solidFill>
-                        <a:srgbClr val="D6E9EB"/>
+                        <a:srgbClr val="D1F7FA"/>
                       </a:solidFill>
                       <a:prstDash val="solid"/>
                     </a:lnR>
                     <a:lnT w="9525" cap="flat" cmpd="sng" algn="ctr">
                       <a:solidFill>
-                        <a:srgbClr val="D6E9EB"/>
+                        <a:srgbClr val="D1F7FA"/>
                       </a:solidFill>
                       <a:prstDash val="solid"/>
                     </a:lnT>
                     <a:lnB w="9525" cap="flat" cmpd="sng" algn="ctr">
                       <a:solidFill>
-                        <a:srgbClr val="D6E9EB"/>
+                        <a:srgbClr val="D1F7FA"/>
                       </a:solidFill>
                       <a:prstDash val="solid"/>
                     </a:lnB>
                     <a:solidFill>
-                      <a:srgbClr val="D6E9EB"/>
+                      <a:srgbClr val="D1F7FA"/>
                     </a:solidFill>
                   </a:tcPr>
                 </a:tc>
@@ -3797,25 +3797,25 @@
                   <a:tcPr anchor="ctr" marL="73152" marR="73152">
                     <a:lnL w="9525" cap="flat" cmpd="sng" algn="ctr">
                       <a:solidFill>
-                        <a:srgbClr val="D6E9EB"/>
+                        <a:srgbClr val="D1F7FA"/>
                       </a:solidFill>
                       <a:prstDash val="solid"/>
                     </a:lnL>
                     <a:lnR w="9525" cap="flat" cmpd="sng" algn="ctr">
                       <a:solidFill>
-                        <a:srgbClr val="D6E9EB"/>
+                        <a:srgbClr val="D1F7FA"/>
                       </a:solidFill>
                       <a:prstDash val="solid"/>
                     </a:lnR>
                     <a:lnT w="9525" cap="flat" cmpd="sng" algn="ctr">
                       <a:solidFill>
-                        <a:srgbClr val="D6E9EB"/>
+                        <a:srgbClr val="D1F7FA"/>
                       </a:solidFill>
                       <a:prstDash val="solid"/>
                     </a:lnT>
                     <a:lnB w="9525" cap="flat" cmpd="sng" algn="ctr">
                       <a:solidFill>
-                        <a:srgbClr val="D6E9EB"/>
+                        <a:srgbClr val="D1F7FA"/>
                       </a:solidFill>
                       <a:prstDash val="solid"/>
                     </a:lnB>
@@ -3843,25 +3843,25 @@
                   <a:tcPr anchor="ctr" marL="73152" marR="73152">
                     <a:lnL w="9525" cap="flat" cmpd="sng" algn="ctr">
                       <a:solidFill>
-                        <a:srgbClr val="D6E9EB"/>
+                        <a:srgbClr val="D1F7FA"/>
                       </a:solidFill>
                       <a:prstDash val="solid"/>
                     </a:lnL>
                     <a:lnR w="9525" cap="flat" cmpd="sng" algn="ctr">
                       <a:solidFill>
-                        <a:srgbClr val="D6E9EB"/>
+                        <a:srgbClr val="D1F7FA"/>
                       </a:solidFill>
                       <a:prstDash val="solid"/>
                     </a:lnR>
                     <a:lnT w="9525" cap="flat" cmpd="sng" algn="ctr">
                       <a:solidFill>
-                        <a:srgbClr val="D6E9EB"/>
+                        <a:srgbClr val="D1F7FA"/>
                       </a:solidFill>
                       <a:prstDash val="solid"/>
                     </a:lnT>
                     <a:lnB w="9525" cap="flat" cmpd="sng" algn="ctr">
                       <a:solidFill>
-                        <a:srgbClr val="D6E9EB"/>
+                        <a:srgbClr val="D1F7FA"/>
                       </a:solidFill>
                       <a:prstDash val="solid"/>
                     </a:lnB>
@@ -3881,7 +3881,7 @@
                       <a:r>
                         <a:rPr sz="1600" b="1">
                           <a:solidFill>
-                            <a:srgbClr val="274649"/>
+                            <a:srgbClr val="11595F"/>
                           </a:solidFill>
                         </a:rPr>
                         <a:t>연세</a:t>
@@ -3891,30 +3891,30 @@
                   <a:tcPr anchor="ctr" marL="73152" marR="73152">
                     <a:lnL w="9525" cap="flat" cmpd="sng" algn="ctr">
                       <a:solidFill>
-                        <a:srgbClr val="D6E9EB"/>
+                        <a:srgbClr val="D1F7FA"/>
                       </a:solidFill>
                       <a:prstDash val="solid"/>
                     </a:lnL>
                     <a:lnR w="9525" cap="flat" cmpd="sng" algn="ctr">
                       <a:solidFill>
-                        <a:srgbClr val="D6E9EB"/>
+                        <a:srgbClr val="D1F7FA"/>
                       </a:solidFill>
                       <a:prstDash val="solid"/>
                     </a:lnR>
                     <a:lnT w="9525" cap="flat" cmpd="sng" algn="ctr">
                       <a:solidFill>
-                        <a:srgbClr val="D6E9EB"/>
+                        <a:srgbClr val="D1F7FA"/>
                       </a:solidFill>
                       <a:prstDash val="solid"/>
                     </a:lnT>
                     <a:lnB w="9525" cap="flat" cmpd="sng" algn="ctr">
                       <a:solidFill>
-                        <a:srgbClr val="D6E9EB"/>
+                        <a:srgbClr val="D1F7FA"/>
                       </a:solidFill>
                       <a:prstDash val="solid"/>
                     </a:lnB>
                     <a:solidFill>
-                      <a:srgbClr val="D6E9EB"/>
+                      <a:srgbClr val="D1F7FA"/>
                     </a:solidFill>
                   </a:tcPr>
                 </a:tc>
@@ -3937,30 +3937,30 @@
                   <a:tcPr anchor="ctr" marL="73152" marR="73152">
                     <a:lnL w="9525" cap="flat" cmpd="sng" algn="ctr">
                       <a:solidFill>
-                        <a:srgbClr val="D6E9EB"/>
+                        <a:srgbClr val="D1F7FA"/>
                       </a:solidFill>
                       <a:prstDash val="solid"/>
                     </a:lnL>
                     <a:lnR w="9525" cap="flat" cmpd="sng" algn="ctr">
                       <a:solidFill>
-                        <a:srgbClr val="D6E9EB"/>
+                        <a:srgbClr val="D1F7FA"/>
                       </a:solidFill>
                       <a:prstDash val="solid"/>
                     </a:lnR>
                     <a:lnT w="9525" cap="flat" cmpd="sng" algn="ctr">
                       <a:solidFill>
-                        <a:srgbClr val="D6E9EB"/>
+                        <a:srgbClr val="D1F7FA"/>
                       </a:solidFill>
                       <a:prstDash val="solid"/>
                     </a:lnT>
                     <a:lnB w="9525" cap="flat" cmpd="sng" algn="ctr">
                       <a:solidFill>
-                        <a:srgbClr val="D6E9EB"/>
+                        <a:srgbClr val="D1F7FA"/>
                       </a:solidFill>
                       <a:prstDash val="solid"/>
                     </a:lnB>
                     <a:solidFill>
-                      <a:srgbClr val="F2F7F8"/>
+                      <a:srgbClr val="EEFBFC"/>
                     </a:solidFill>
                   </a:tcPr>
                 </a:tc>
@@ -3983,30 +3983,30 @@
                   <a:tcPr anchor="ctr" marL="73152" marR="73152">
                     <a:lnL w="9525" cap="flat" cmpd="sng" algn="ctr">
                       <a:solidFill>
-                        <a:srgbClr val="D6E9EB"/>
+                        <a:srgbClr val="D1F7FA"/>
                       </a:solidFill>
                       <a:prstDash val="solid"/>
                     </a:lnL>
                     <a:lnR w="9525" cap="flat" cmpd="sng" algn="ctr">
                       <a:solidFill>
-                        <a:srgbClr val="D6E9EB"/>
+                        <a:srgbClr val="D1F7FA"/>
                       </a:solidFill>
                       <a:prstDash val="solid"/>
                     </a:lnR>
                     <a:lnT w="9525" cap="flat" cmpd="sng" algn="ctr">
                       <a:solidFill>
-                        <a:srgbClr val="D6E9EB"/>
+                        <a:srgbClr val="D1F7FA"/>
                       </a:solidFill>
                       <a:prstDash val="solid"/>
                     </a:lnT>
                     <a:lnB w="9525" cap="flat" cmpd="sng" algn="ctr">
                       <a:solidFill>
-                        <a:srgbClr val="D6E9EB"/>
+                        <a:srgbClr val="D1F7FA"/>
                       </a:solidFill>
                       <a:prstDash val="solid"/>
                     </a:lnB>
                     <a:solidFill>
-                      <a:srgbClr val="F2F7F8"/>
+                      <a:srgbClr val="EEFBFC"/>
                     </a:solidFill>
                   </a:tcPr>
                 </a:tc>
@@ -4021,7 +4021,7 @@
                       <a:r>
                         <a:rPr sz="1600" b="1">
                           <a:solidFill>
-                            <a:srgbClr val="274649"/>
+                            <a:srgbClr val="11595F"/>
                           </a:solidFill>
                         </a:rPr>
                         <a:t>건강 상태 메모</a:t>
@@ -4031,30 +4031,30 @@
                   <a:tcPr anchor="ctr" marL="73152" marR="73152">
                     <a:lnL w="9525" cap="flat" cmpd="sng" algn="ctr">
                       <a:solidFill>
-                        <a:srgbClr val="D6E9EB"/>
+                        <a:srgbClr val="D1F7FA"/>
                       </a:solidFill>
                       <a:prstDash val="solid"/>
                     </a:lnL>
                     <a:lnR w="9525" cap="flat" cmpd="sng" algn="ctr">
                       <a:solidFill>
-                        <a:srgbClr val="D6E9EB"/>
+                        <a:srgbClr val="D1F7FA"/>
                       </a:solidFill>
                       <a:prstDash val="solid"/>
                     </a:lnR>
                     <a:lnT w="9525" cap="flat" cmpd="sng" algn="ctr">
                       <a:solidFill>
-                        <a:srgbClr val="D6E9EB"/>
+                        <a:srgbClr val="D1F7FA"/>
                       </a:solidFill>
                       <a:prstDash val="solid"/>
                     </a:lnT>
                     <a:lnB w="9525" cap="flat" cmpd="sng" algn="ctr">
                       <a:solidFill>
-                        <a:srgbClr val="D6E9EB"/>
+                        <a:srgbClr val="D1F7FA"/>
                       </a:solidFill>
                       <a:prstDash val="solid"/>
                     </a:lnB>
                     <a:solidFill>
-                      <a:srgbClr val="D6E9EB"/>
+                      <a:srgbClr val="D1F7FA"/>
                     </a:solidFill>
                   </a:tcPr>
                 </a:tc>
@@ -4077,25 +4077,25 @@
                   <a:tcPr anchor="ctr" marL="73152" marR="73152">
                     <a:lnL w="9525" cap="flat" cmpd="sng" algn="ctr">
                       <a:solidFill>
-                        <a:srgbClr val="D6E9EB"/>
+                        <a:srgbClr val="D1F7FA"/>
                       </a:solidFill>
                       <a:prstDash val="solid"/>
                     </a:lnL>
                     <a:lnR w="9525" cap="flat" cmpd="sng" algn="ctr">
                       <a:solidFill>
-                        <a:srgbClr val="D6E9EB"/>
+                        <a:srgbClr val="D1F7FA"/>
                       </a:solidFill>
                       <a:prstDash val="solid"/>
                     </a:lnR>
                     <a:lnT w="9525" cap="flat" cmpd="sng" algn="ctr">
                       <a:solidFill>
-                        <a:srgbClr val="D6E9EB"/>
+                        <a:srgbClr val="D1F7FA"/>
                       </a:solidFill>
                       <a:prstDash val="solid"/>
                     </a:lnT>
                     <a:lnB w="9525" cap="flat" cmpd="sng" algn="ctr">
                       <a:solidFill>
-                        <a:srgbClr val="D6E9EB"/>
+                        <a:srgbClr val="D1F7FA"/>
                       </a:solidFill>
                       <a:prstDash val="solid"/>
                     </a:lnB>
@@ -4123,25 +4123,25 @@
                   <a:tcPr anchor="ctr" marL="73152" marR="73152">
                     <a:lnL w="9525" cap="flat" cmpd="sng" algn="ctr">
                       <a:solidFill>
-                        <a:srgbClr val="D6E9EB"/>
+                        <a:srgbClr val="D1F7FA"/>
                       </a:solidFill>
                       <a:prstDash val="solid"/>
                     </a:lnL>
                     <a:lnR w="9525" cap="flat" cmpd="sng" algn="ctr">
                       <a:solidFill>
-                        <a:srgbClr val="D6E9EB"/>
+                        <a:srgbClr val="D1F7FA"/>
                       </a:solidFill>
                       <a:prstDash val="solid"/>
                     </a:lnR>
                     <a:lnT w="9525" cap="flat" cmpd="sng" algn="ctr">
                       <a:solidFill>
-                        <a:srgbClr val="D6E9EB"/>
+                        <a:srgbClr val="D1F7FA"/>
                       </a:solidFill>
                       <a:prstDash val="solid"/>
                     </a:lnT>
                     <a:lnB w="9525" cap="flat" cmpd="sng" algn="ctr">
                       <a:solidFill>
-                        <a:srgbClr val="D6E9EB"/>
+                        <a:srgbClr val="D1F7FA"/>
                       </a:solidFill>
                       <a:prstDash val="solid"/>
                     </a:lnB>
@@ -4161,7 +4161,7 @@
                       <a:r>
                         <a:rPr sz="1600" b="1">
                           <a:solidFill>
-                            <a:srgbClr val="274649"/>
+                            <a:srgbClr val="11595F"/>
                           </a:solidFill>
                         </a:rPr>
                         <a:t>함께 확인할 것</a:t>
@@ -4171,30 +4171,30 @@
                   <a:tcPr anchor="ctr" marL="73152" marR="73152">
                     <a:lnL w="9525" cap="flat" cmpd="sng" algn="ctr">
                       <a:solidFill>
-                        <a:srgbClr val="D6E9EB"/>
+                        <a:srgbClr val="D1F7FA"/>
                       </a:solidFill>
                       <a:prstDash val="solid"/>
                     </a:lnL>
                     <a:lnR w="9525" cap="flat" cmpd="sng" algn="ctr">
                       <a:solidFill>
-                        <a:srgbClr val="D6E9EB"/>
+                        <a:srgbClr val="D1F7FA"/>
                       </a:solidFill>
                       <a:prstDash val="solid"/>
                     </a:lnR>
                     <a:lnT w="9525" cap="flat" cmpd="sng" algn="ctr">
                       <a:solidFill>
-                        <a:srgbClr val="D6E9EB"/>
+                        <a:srgbClr val="D1F7FA"/>
                       </a:solidFill>
                       <a:prstDash val="solid"/>
                     </a:lnT>
                     <a:lnB w="9525" cap="flat" cmpd="sng" algn="ctr">
                       <a:solidFill>
-                        <a:srgbClr val="D6E9EB"/>
+                        <a:srgbClr val="D1F7FA"/>
                       </a:solidFill>
                       <a:prstDash val="solid"/>
                     </a:lnB>
                     <a:solidFill>
-                      <a:srgbClr val="D6E9EB"/>
+                      <a:srgbClr val="D1F7FA"/>
                     </a:solidFill>
                   </a:tcPr>
                 </a:tc>
@@ -4217,30 +4217,30 @@
                   <a:tcPr anchor="ctr" marL="73152" marR="73152">
                     <a:lnL w="9525" cap="flat" cmpd="sng" algn="ctr">
                       <a:solidFill>
-                        <a:srgbClr val="D6E9EB"/>
+                        <a:srgbClr val="D1F7FA"/>
                       </a:solidFill>
                       <a:prstDash val="solid"/>
                     </a:lnL>
                     <a:lnR w="9525" cap="flat" cmpd="sng" algn="ctr">
                       <a:solidFill>
-                        <a:srgbClr val="D6E9EB"/>
+                        <a:srgbClr val="D1F7FA"/>
                       </a:solidFill>
                       <a:prstDash val="solid"/>
                     </a:lnR>
                     <a:lnT w="9525" cap="flat" cmpd="sng" algn="ctr">
                       <a:solidFill>
-                        <a:srgbClr val="D6E9EB"/>
+                        <a:srgbClr val="D1F7FA"/>
                       </a:solidFill>
                       <a:prstDash val="solid"/>
                     </a:lnT>
                     <a:lnB w="9525" cap="flat" cmpd="sng" algn="ctr">
                       <a:solidFill>
-                        <a:srgbClr val="D6E9EB"/>
+                        <a:srgbClr val="D1F7FA"/>
                       </a:solidFill>
                       <a:prstDash val="solid"/>
                     </a:lnB>
                     <a:solidFill>
-                      <a:srgbClr val="F2F7F8"/>
+                      <a:srgbClr val="EEFBFC"/>
                     </a:solidFill>
                   </a:tcPr>
                 </a:tc>
@@ -4263,30 +4263,30 @@
                   <a:tcPr anchor="ctr" marL="73152" marR="73152">
                     <a:lnL w="9525" cap="flat" cmpd="sng" algn="ctr">
                       <a:solidFill>
-                        <a:srgbClr val="D6E9EB"/>
+                        <a:srgbClr val="D1F7FA"/>
                       </a:solidFill>
                       <a:prstDash val="solid"/>
                     </a:lnL>
                     <a:lnR w="9525" cap="flat" cmpd="sng" algn="ctr">
                       <a:solidFill>
-                        <a:srgbClr val="D6E9EB"/>
+                        <a:srgbClr val="D1F7FA"/>
                       </a:solidFill>
                       <a:prstDash val="solid"/>
                     </a:lnR>
                     <a:lnT w="9525" cap="flat" cmpd="sng" algn="ctr">
                       <a:solidFill>
-                        <a:srgbClr val="D6E9EB"/>
+                        <a:srgbClr val="D1F7FA"/>
                       </a:solidFill>
                       <a:prstDash val="solid"/>
                     </a:lnT>
                     <a:lnB w="9525" cap="flat" cmpd="sng" algn="ctr">
                       <a:solidFill>
-                        <a:srgbClr val="D6E9EB"/>
+                        <a:srgbClr val="D1F7FA"/>
                       </a:solidFill>
                       <a:prstDash val="solid"/>
                     </a:lnB>
                     <a:solidFill>
-                      <a:srgbClr val="F2F7F8"/>
+                      <a:srgbClr val="EEFBFC"/>
                     </a:solidFill>
                   </a:tcPr>
                 </a:tc>
@@ -4309,7 +4309,7 @@
     <p:bg>
       <p:bgPr>
         <a:solidFill>
-          <a:srgbClr val="F2F7F8"/>
+          <a:srgbClr val="EEFBFC"/>
         </a:solidFill>
         <a:effectLst/>
       </p:bgPr>
@@ -4338,7 +4338,7 @@
           <a:noFill/>
           <a:ln w="28575">
             <a:solidFill>
-              <a:srgbClr val="4B868B"/>
+              <a:srgbClr val="26B8C5"/>
             </a:solidFill>
           </a:ln>
         </p:spPr>
@@ -4367,7 +4367,7 @@
           <a:noFill/>
           <a:ln w="9525">
             <a:solidFill>
-              <a:srgbClr val="D6E9EB"/>
+              <a:srgbClr val="D1F7FA"/>
             </a:solidFill>
           </a:ln>
         </p:spPr>
@@ -4409,7 +4409,7 @@
             <a:r>
               <a:rPr sz="3000" b="1" i="0">
                 <a:solidFill>
-                  <a:srgbClr val="274649"/>
+                  <a:srgbClr val="11595F"/>
                 </a:solidFill>
               </a:rPr>
               <a:t>가입한 보험 목록</a:t>
@@ -4462,30 +4462,30 @@
                   <a:tcPr anchor="ctr" marL="73152" marR="73152">
                     <a:lnL w="9525" cap="flat" cmpd="sng" algn="ctr">
                       <a:solidFill>
-                        <a:srgbClr val="4B868B"/>
+                        <a:srgbClr val="26B8C5"/>
                       </a:solidFill>
                       <a:prstDash val="solid"/>
                     </a:lnL>
                     <a:lnR w="9525" cap="flat" cmpd="sng" algn="ctr">
                       <a:solidFill>
-                        <a:srgbClr val="4B868B"/>
+                        <a:srgbClr val="26B8C5"/>
                       </a:solidFill>
                       <a:prstDash val="solid"/>
                     </a:lnR>
                     <a:lnT w="9525" cap="flat" cmpd="sng" algn="ctr">
                       <a:solidFill>
-                        <a:srgbClr val="4B868B"/>
+                        <a:srgbClr val="26B8C5"/>
                       </a:solidFill>
                       <a:prstDash val="solid"/>
                     </a:lnT>
                     <a:lnB w="9525" cap="flat" cmpd="sng" algn="ctr">
                       <a:solidFill>
-                        <a:srgbClr val="4B868B"/>
+                        <a:srgbClr val="26B8C5"/>
                       </a:solidFill>
                       <a:prstDash val="solid"/>
                     </a:lnB>
                     <a:solidFill>
-                      <a:srgbClr val="4B868B"/>
+                      <a:srgbClr val="26B8C5"/>
                     </a:solidFill>
                   </a:tcPr>
                 </a:tc>
@@ -4508,30 +4508,30 @@
                   <a:tcPr anchor="ctr" marL="73152" marR="73152">
                     <a:lnL w="9525" cap="flat" cmpd="sng" algn="ctr">
                       <a:solidFill>
-                        <a:srgbClr val="4B868B"/>
+                        <a:srgbClr val="26B8C5"/>
                       </a:solidFill>
                       <a:prstDash val="solid"/>
                     </a:lnL>
                     <a:lnR w="9525" cap="flat" cmpd="sng" algn="ctr">
                       <a:solidFill>
-                        <a:srgbClr val="4B868B"/>
+                        <a:srgbClr val="26B8C5"/>
                       </a:solidFill>
                       <a:prstDash val="solid"/>
                     </a:lnR>
                     <a:lnT w="9525" cap="flat" cmpd="sng" algn="ctr">
                       <a:solidFill>
-                        <a:srgbClr val="4B868B"/>
+                        <a:srgbClr val="26B8C5"/>
                       </a:solidFill>
                       <a:prstDash val="solid"/>
                     </a:lnT>
                     <a:lnB w="9525" cap="flat" cmpd="sng" algn="ctr">
                       <a:solidFill>
-                        <a:srgbClr val="4B868B"/>
+                        <a:srgbClr val="26B8C5"/>
                       </a:solidFill>
                       <a:prstDash val="solid"/>
                     </a:lnB>
                     <a:solidFill>
-                      <a:srgbClr val="4B868B"/>
+                      <a:srgbClr val="26B8C5"/>
                     </a:solidFill>
                   </a:tcPr>
                 </a:tc>
@@ -4554,30 +4554,30 @@
                   <a:tcPr anchor="ctr" marL="73152" marR="73152">
                     <a:lnL w="9525" cap="flat" cmpd="sng" algn="ctr">
                       <a:solidFill>
-                        <a:srgbClr val="4B868B"/>
+                        <a:srgbClr val="26B8C5"/>
                       </a:solidFill>
                       <a:prstDash val="solid"/>
                     </a:lnL>
                     <a:lnR w="9525" cap="flat" cmpd="sng" algn="ctr">
                       <a:solidFill>
-                        <a:srgbClr val="4B868B"/>
+                        <a:srgbClr val="26B8C5"/>
                       </a:solidFill>
                       <a:prstDash val="solid"/>
                     </a:lnR>
                     <a:lnT w="9525" cap="flat" cmpd="sng" algn="ctr">
                       <a:solidFill>
-                        <a:srgbClr val="4B868B"/>
+                        <a:srgbClr val="26B8C5"/>
                       </a:solidFill>
                       <a:prstDash val="solid"/>
                     </a:lnT>
                     <a:lnB w="9525" cap="flat" cmpd="sng" algn="ctr">
                       <a:solidFill>
-                        <a:srgbClr val="4B868B"/>
+                        <a:srgbClr val="26B8C5"/>
                       </a:solidFill>
                       <a:prstDash val="solid"/>
                     </a:lnB>
                     <a:solidFill>
-                      <a:srgbClr val="4B868B"/>
+                      <a:srgbClr val="26B8C5"/>
                     </a:solidFill>
                   </a:tcPr>
                 </a:tc>
@@ -4600,30 +4600,30 @@
                   <a:tcPr anchor="ctr" marL="73152" marR="73152">
                     <a:lnL w="9525" cap="flat" cmpd="sng" algn="ctr">
                       <a:solidFill>
-                        <a:srgbClr val="4B868B"/>
+                        <a:srgbClr val="26B8C5"/>
                       </a:solidFill>
                       <a:prstDash val="solid"/>
                     </a:lnL>
                     <a:lnR w="9525" cap="flat" cmpd="sng" algn="ctr">
                       <a:solidFill>
-                        <a:srgbClr val="4B868B"/>
+                        <a:srgbClr val="26B8C5"/>
                       </a:solidFill>
                       <a:prstDash val="solid"/>
                     </a:lnR>
                     <a:lnT w="9525" cap="flat" cmpd="sng" algn="ctr">
                       <a:solidFill>
-                        <a:srgbClr val="4B868B"/>
+                        <a:srgbClr val="26B8C5"/>
                       </a:solidFill>
                       <a:prstDash val="solid"/>
                     </a:lnT>
                     <a:lnB w="9525" cap="flat" cmpd="sng" algn="ctr">
                       <a:solidFill>
-                        <a:srgbClr val="4B868B"/>
+                        <a:srgbClr val="26B8C5"/>
                       </a:solidFill>
                       <a:prstDash val="solid"/>
                     </a:lnB>
                     <a:solidFill>
-                      <a:srgbClr val="4B868B"/>
+                      <a:srgbClr val="26B8C5"/>
                     </a:solidFill>
                   </a:tcPr>
                 </a:tc>
@@ -4646,30 +4646,30 @@
                   <a:tcPr anchor="ctr" marL="73152" marR="73152">
                     <a:lnL w="9525" cap="flat" cmpd="sng" algn="ctr">
                       <a:solidFill>
-                        <a:srgbClr val="4B868B"/>
+                        <a:srgbClr val="26B8C5"/>
                       </a:solidFill>
                       <a:prstDash val="solid"/>
                     </a:lnL>
                     <a:lnR w="9525" cap="flat" cmpd="sng" algn="ctr">
                       <a:solidFill>
-                        <a:srgbClr val="4B868B"/>
+                        <a:srgbClr val="26B8C5"/>
                       </a:solidFill>
                       <a:prstDash val="solid"/>
                     </a:lnR>
                     <a:lnT w="9525" cap="flat" cmpd="sng" algn="ctr">
                       <a:solidFill>
-                        <a:srgbClr val="4B868B"/>
+                        <a:srgbClr val="26B8C5"/>
                       </a:solidFill>
                       <a:prstDash val="solid"/>
                     </a:lnT>
                     <a:lnB w="9525" cap="flat" cmpd="sng" algn="ctr">
                       <a:solidFill>
-                        <a:srgbClr val="4B868B"/>
+                        <a:srgbClr val="26B8C5"/>
                       </a:solidFill>
                       <a:prstDash val="solid"/>
                     </a:lnB>
                     <a:solidFill>
-                      <a:srgbClr val="4B868B"/>
+                      <a:srgbClr val="26B8C5"/>
                     </a:solidFill>
                   </a:tcPr>
                 </a:tc>
@@ -4694,25 +4694,25 @@
                   <a:tcPr anchor="ctr" marL="73152" marR="73152">
                     <a:lnL w="9525" cap="flat" cmpd="sng" algn="ctr">
                       <a:solidFill>
-                        <a:srgbClr val="D6E9EB"/>
+                        <a:srgbClr val="D1F7FA"/>
                       </a:solidFill>
                       <a:prstDash val="solid"/>
                     </a:lnL>
                     <a:lnR w="9525" cap="flat" cmpd="sng" algn="ctr">
                       <a:solidFill>
-                        <a:srgbClr val="D6E9EB"/>
+                        <a:srgbClr val="D1F7FA"/>
                       </a:solidFill>
                       <a:prstDash val="solid"/>
                     </a:lnR>
                     <a:lnT w="9525" cap="flat" cmpd="sng" algn="ctr">
                       <a:solidFill>
-                        <a:srgbClr val="D6E9EB"/>
+                        <a:srgbClr val="D1F7FA"/>
                       </a:solidFill>
                       <a:prstDash val="solid"/>
                     </a:lnT>
                     <a:lnB w="9525" cap="flat" cmpd="sng" algn="ctr">
                       <a:solidFill>
-                        <a:srgbClr val="D6E9EB"/>
+                        <a:srgbClr val="D1F7FA"/>
                       </a:solidFill>
                       <a:prstDash val="solid"/>
                     </a:lnB>
@@ -4740,25 +4740,25 @@
                   <a:tcPr anchor="ctr" marL="73152" marR="73152">
                     <a:lnL w="9525" cap="flat" cmpd="sng" algn="ctr">
                       <a:solidFill>
-                        <a:srgbClr val="D6E9EB"/>
+                        <a:srgbClr val="D1F7FA"/>
                       </a:solidFill>
                       <a:prstDash val="solid"/>
                     </a:lnL>
                     <a:lnR w="9525" cap="flat" cmpd="sng" algn="ctr">
                       <a:solidFill>
-                        <a:srgbClr val="D6E9EB"/>
+                        <a:srgbClr val="D1F7FA"/>
                       </a:solidFill>
                       <a:prstDash val="solid"/>
                     </a:lnR>
                     <a:lnT w="9525" cap="flat" cmpd="sng" algn="ctr">
                       <a:solidFill>
-                        <a:srgbClr val="D6E9EB"/>
+                        <a:srgbClr val="D1F7FA"/>
                       </a:solidFill>
                       <a:prstDash val="solid"/>
                     </a:lnT>
                     <a:lnB w="9525" cap="flat" cmpd="sng" algn="ctr">
                       <a:solidFill>
-                        <a:srgbClr val="D6E9EB"/>
+                        <a:srgbClr val="D1F7FA"/>
                       </a:solidFill>
                       <a:prstDash val="solid"/>
                     </a:lnB>
@@ -4786,25 +4786,25 @@
                   <a:tcPr anchor="ctr" marL="73152" marR="73152">
                     <a:lnL w="9525" cap="flat" cmpd="sng" algn="ctr">
                       <a:solidFill>
-                        <a:srgbClr val="D6E9EB"/>
+                        <a:srgbClr val="D1F7FA"/>
                       </a:solidFill>
                       <a:prstDash val="solid"/>
                     </a:lnL>
                     <a:lnR w="9525" cap="flat" cmpd="sng" algn="ctr">
                       <a:solidFill>
-                        <a:srgbClr val="D6E9EB"/>
+                        <a:srgbClr val="D1F7FA"/>
                       </a:solidFill>
                       <a:prstDash val="solid"/>
                     </a:lnR>
                     <a:lnT w="9525" cap="flat" cmpd="sng" algn="ctr">
                       <a:solidFill>
-                        <a:srgbClr val="D6E9EB"/>
+                        <a:srgbClr val="D1F7FA"/>
                       </a:solidFill>
                       <a:prstDash val="solid"/>
                     </a:lnT>
                     <a:lnB w="9525" cap="flat" cmpd="sng" algn="ctr">
                       <a:solidFill>
-                        <a:srgbClr val="D6E9EB"/>
+                        <a:srgbClr val="D1F7FA"/>
                       </a:solidFill>
                       <a:prstDash val="solid"/>
                     </a:lnB>
@@ -4832,25 +4832,25 @@
                   <a:tcPr anchor="ctr" marL="73152" marR="73152">
                     <a:lnL w="9525" cap="flat" cmpd="sng" algn="ctr">
                       <a:solidFill>
-                        <a:srgbClr val="D6E9EB"/>
+                        <a:srgbClr val="D1F7FA"/>
                       </a:solidFill>
                       <a:prstDash val="solid"/>
                     </a:lnL>
                     <a:lnR w="9525" cap="flat" cmpd="sng" algn="ctr">
                       <a:solidFill>
-                        <a:srgbClr val="D6E9EB"/>
+                        <a:srgbClr val="D1F7FA"/>
                       </a:solidFill>
                       <a:prstDash val="solid"/>
                     </a:lnR>
                     <a:lnT w="9525" cap="flat" cmpd="sng" algn="ctr">
                       <a:solidFill>
-                        <a:srgbClr val="D6E9EB"/>
+                        <a:srgbClr val="D1F7FA"/>
                       </a:solidFill>
                       <a:prstDash val="solid"/>
                     </a:lnT>
                     <a:lnB w="9525" cap="flat" cmpd="sng" algn="ctr">
                       <a:solidFill>
-                        <a:srgbClr val="D6E9EB"/>
+                        <a:srgbClr val="D1F7FA"/>
                       </a:solidFill>
                       <a:prstDash val="solid"/>
                     </a:lnB>
@@ -4878,25 +4878,25 @@
                   <a:tcPr anchor="ctr" marL="73152" marR="73152">
                     <a:lnL w="9525" cap="flat" cmpd="sng" algn="ctr">
                       <a:solidFill>
-                        <a:srgbClr val="D6E9EB"/>
+                        <a:srgbClr val="D1F7FA"/>
                       </a:solidFill>
                       <a:prstDash val="solid"/>
                     </a:lnL>
                     <a:lnR w="9525" cap="flat" cmpd="sng" algn="ctr">
                       <a:solidFill>
-                        <a:srgbClr val="D6E9EB"/>
+                        <a:srgbClr val="D1F7FA"/>
                       </a:solidFill>
                       <a:prstDash val="solid"/>
                     </a:lnR>
                     <a:lnT w="9525" cap="flat" cmpd="sng" algn="ctr">
                       <a:solidFill>
-                        <a:srgbClr val="D6E9EB"/>
+                        <a:srgbClr val="D1F7FA"/>
                       </a:solidFill>
                       <a:prstDash val="solid"/>
                     </a:lnT>
                     <a:lnB w="9525" cap="flat" cmpd="sng" algn="ctr">
                       <a:solidFill>
-                        <a:srgbClr val="D6E9EB"/>
+                        <a:srgbClr val="D1F7FA"/>
                       </a:solidFill>
                       <a:prstDash val="solid"/>
                     </a:lnB>
@@ -4926,30 +4926,30 @@
                   <a:tcPr anchor="ctr" marL="73152" marR="73152">
                     <a:lnL w="9525" cap="flat" cmpd="sng" algn="ctr">
                       <a:solidFill>
-                        <a:srgbClr val="D6E9EB"/>
+                        <a:srgbClr val="D1F7FA"/>
                       </a:solidFill>
                       <a:prstDash val="solid"/>
                     </a:lnL>
                     <a:lnR w="9525" cap="flat" cmpd="sng" algn="ctr">
                       <a:solidFill>
-                        <a:srgbClr val="D6E9EB"/>
+                        <a:srgbClr val="D1F7FA"/>
                       </a:solidFill>
                       <a:prstDash val="solid"/>
                     </a:lnR>
                     <a:lnT w="9525" cap="flat" cmpd="sng" algn="ctr">
                       <a:solidFill>
-                        <a:srgbClr val="D6E9EB"/>
+                        <a:srgbClr val="D1F7FA"/>
                       </a:solidFill>
                       <a:prstDash val="solid"/>
                     </a:lnT>
                     <a:lnB w="9525" cap="flat" cmpd="sng" algn="ctr">
                       <a:solidFill>
-                        <a:srgbClr val="D6E9EB"/>
+                        <a:srgbClr val="D1F7FA"/>
                       </a:solidFill>
                       <a:prstDash val="solid"/>
                     </a:lnB>
                     <a:solidFill>
-                      <a:srgbClr val="F2F7F8"/>
+                      <a:srgbClr val="EEFBFC"/>
                     </a:solidFill>
                   </a:tcPr>
                 </a:tc>
@@ -4972,30 +4972,30 @@
                   <a:tcPr anchor="ctr" marL="73152" marR="73152">
                     <a:lnL w="9525" cap="flat" cmpd="sng" algn="ctr">
                       <a:solidFill>
-                        <a:srgbClr val="D6E9EB"/>
+                        <a:srgbClr val="D1F7FA"/>
                       </a:solidFill>
                       <a:prstDash val="solid"/>
                     </a:lnL>
                     <a:lnR w="9525" cap="flat" cmpd="sng" algn="ctr">
                       <a:solidFill>
-                        <a:srgbClr val="D6E9EB"/>
+                        <a:srgbClr val="D1F7FA"/>
                       </a:solidFill>
                       <a:prstDash val="solid"/>
                     </a:lnR>
                     <a:lnT w="9525" cap="flat" cmpd="sng" algn="ctr">
                       <a:solidFill>
-                        <a:srgbClr val="D6E9EB"/>
+                        <a:srgbClr val="D1F7FA"/>
                       </a:solidFill>
                       <a:prstDash val="solid"/>
                     </a:lnT>
                     <a:lnB w="9525" cap="flat" cmpd="sng" algn="ctr">
                       <a:solidFill>
-                        <a:srgbClr val="D6E9EB"/>
+                        <a:srgbClr val="D1F7FA"/>
                       </a:solidFill>
                       <a:prstDash val="solid"/>
                     </a:lnB>
                     <a:solidFill>
-                      <a:srgbClr val="F2F7F8"/>
+                      <a:srgbClr val="EEFBFC"/>
                     </a:solidFill>
                   </a:tcPr>
                 </a:tc>
@@ -5018,30 +5018,30 @@
                   <a:tcPr anchor="ctr" marL="73152" marR="73152">
                     <a:lnL w="9525" cap="flat" cmpd="sng" algn="ctr">
                       <a:solidFill>
-                        <a:srgbClr val="D6E9EB"/>
+                        <a:srgbClr val="D1F7FA"/>
                       </a:solidFill>
                       <a:prstDash val="solid"/>
                     </a:lnL>
                     <a:lnR w="9525" cap="flat" cmpd="sng" algn="ctr">
                       <a:solidFill>
-                        <a:srgbClr val="D6E9EB"/>
+                        <a:srgbClr val="D1F7FA"/>
                       </a:solidFill>
                       <a:prstDash val="solid"/>
                     </a:lnR>
                     <a:lnT w="9525" cap="flat" cmpd="sng" algn="ctr">
                       <a:solidFill>
-                        <a:srgbClr val="D6E9EB"/>
+                        <a:srgbClr val="D1F7FA"/>
                       </a:solidFill>
                       <a:prstDash val="solid"/>
                     </a:lnT>
                     <a:lnB w="9525" cap="flat" cmpd="sng" algn="ctr">
                       <a:solidFill>
-                        <a:srgbClr val="D6E9EB"/>
+                        <a:srgbClr val="D1F7FA"/>
                       </a:solidFill>
                       <a:prstDash val="solid"/>
                     </a:lnB>
                     <a:solidFill>
-                      <a:srgbClr val="F2F7F8"/>
+                      <a:srgbClr val="EEFBFC"/>
                     </a:solidFill>
                   </a:tcPr>
                 </a:tc>
@@ -5064,30 +5064,30 @@
                   <a:tcPr anchor="ctr" marL="73152" marR="73152">
                     <a:lnL w="9525" cap="flat" cmpd="sng" algn="ctr">
                       <a:solidFill>
-                        <a:srgbClr val="D6E9EB"/>
+                        <a:srgbClr val="D1F7FA"/>
                       </a:solidFill>
                       <a:prstDash val="solid"/>
                     </a:lnL>
                     <a:lnR w="9525" cap="flat" cmpd="sng" algn="ctr">
                       <a:solidFill>
-                        <a:srgbClr val="D6E9EB"/>
+                        <a:srgbClr val="D1F7FA"/>
                       </a:solidFill>
                       <a:prstDash val="solid"/>
                     </a:lnR>
                     <a:lnT w="9525" cap="flat" cmpd="sng" algn="ctr">
                       <a:solidFill>
-                        <a:srgbClr val="D6E9EB"/>
+                        <a:srgbClr val="D1F7FA"/>
                       </a:solidFill>
                       <a:prstDash val="solid"/>
                     </a:lnT>
                     <a:lnB w="9525" cap="flat" cmpd="sng" algn="ctr">
                       <a:solidFill>
-                        <a:srgbClr val="D6E9EB"/>
+                        <a:srgbClr val="D1F7FA"/>
                       </a:solidFill>
                       <a:prstDash val="solid"/>
                     </a:lnB>
                     <a:solidFill>
-                      <a:srgbClr val="F2F7F8"/>
+                      <a:srgbClr val="EEFBFC"/>
                     </a:solidFill>
                   </a:tcPr>
                 </a:tc>
@@ -5110,30 +5110,30 @@
                   <a:tcPr anchor="ctr" marL="73152" marR="73152">
                     <a:lnL w="9525" cap="flat" cmpd="sng" algn="ctr">
                       <a:solidFill>
-                        <a:srgbClr val="D6E9EB"/>
+                        <a:srgbClr val="D1F7FA"/>
                       </a:solidFill>
                       <a:prstDash val="solid"/>
                     </a:lnL>
                     <a:lnR w="9525" cap="flat" cmpd="sng" algn="ctr">
                       <a:solidFill>
-                        <a:srgbClr val="D6E9EB"/>
+                        <a:srgbClr val="D1F7FA"/>
                       </a:solidFill>
                       <a:prstDash val="solid"/>
                     </a:lnR>
                     <a:lnT w="9525" cap="flat" cmpd="sng" algn="ctr">
                       <a:solidFill>
-                        <a:srgbClr val="D6E9EB"/>
+                        <a:srgbClr val="D1F7FA"/>
                       </a:solidFill>
                       <a:prstDash val="solid"/>
                     </a:lnT>
                     <a:lnB w="9525" cap="flat" cmpd="sng" algn="ctr">
                       <a:solidFill>
-                        <a:srgbClr val="D6E9EB"/>
+                        <a:srgbClr val="D1F7FA"/>
                       </a:solidFill>
                       <a:prstDash val="solid"/>
                     </a:lnB>
                     <a:solidFill>
-                      <a:srgbClr val="F2F7F8"/>
+                      <a:srgbClr val="EEFBFC"/>
                     </a:solidFill>
                   </a:tcPr>
                 </a:tc>
@@ -5158,25 +5158,25 @@
                   <a:tcPr anchor="ctr" marL="73152" marR="73152">
                     <a:lnL w="9525" cap="flat" cmpd="sng" algn="ctr">
                       <a:solidFill>
-                        <a:srgbClr val="D6E9EB"/>
+                        <a:srgbClr val="D1F7FA"/>
                       </a:solidFill>
                       <a:prstDash val="solid"/>
                     </a:lnL>
                     <a:lnR w="9525" cap="flat" cmpd="sng" algn="ctr">
                       <a:solidFill>
-                        <a:srgbClr val="D6E9EB"/>
+                        <a:srgbClr val="D1F7FA"/>
                       </a:solidFill>
                       <a:prstDash val="solid"/>
                     </a:lnR>
                     <a:lnT w="9525" cap="flat" cmpd="sng" algn="ctr">
                       <a:solidFill>
-                        <a:srgbClr val="D6E9EB"/>
+                        <a:srgbClr val="D1F7FA"/>
                       </a:solidFill>
                       <a:prstDash val="solid"/>
                     </a:lnT>
                     <a:lnB w="9525" cap="flat" cmpd="sng" algn="ctr">
                       <a:solidFill>
-                        <a:srgbClr val="D6E9EB"/>
+                        <a:srgbClr val="D1F7FA"/>
                       </a:solidFill>
                       <a:prstDash val="solid"/>
                     </a:lnB>
@@ -5204,25 +5204,25 @@
                   <a:tcPr anchor="ctr" marL="73152" marR="73152">
                     <a:lnL w="9525" cap="flat" cmpd="sng" algn="ctr">
                       <a:solidFill>
-                        <a:srgbClr val="D6E9EB"/>
+                        <a:srgbClr val="D1F7FA"/>
                       </a:solidFill>
                       <a:prstDash val="solid"/>
                     </a:lnL>
                     <a:lnR w="9525" cap="flat" cmpd="sng" algn="ctr">
                       <a:solidFill>
-                        <a:srgbClr val="D6E9EB"/>
+                        <a:srgbClr val="D1F7FA"/>
                       </a:solidFill>
                       <a:prstDash val="solid"/>
                     </a:lnR>
                     <a:lnT w="9525" cap="flat" cmpd="sng" algn="ctr">
                       <a:solidFill>
-                        <a:srgbClr val="D6E9EB"/>
+                        <a:srgbClr val="D1F7FA"/>
                       </a:solidFill>
                       <a:prstDash val="solid"/>
                     </a:lnT>
                     <a:lnB w="9525" cap="flat" cmpd="sng" algn="ctr">
                       <a:solidFill>
-                        <a:srgbClr val="D6E9EB"/>
+                        <a:srgbClr val="D1F7FA"/>
                       </a:solidFill>
                       <a:prstDash val="solid"/>
                     </a:lnB>
@@ -5250,25 +5250,25 @@
                   <a:tcPr anchor="ctr" marL="73152" marR="73152">
                     <a:lnL w="9525" cap="flat" cmpd="sng" algn="ctr">
                       <a:solidFill>
-                        <a:srgbClr val="D6E9EB"/>
+                        <a:srgbClr val="D1F7FA"/>
                       </a:solidFill>
                       <a:prstDash val="solid"/>
                     </a:lnL>
                     <a:lnR w="9525" cap="flat" cmpd="sng" algn="ctr">
                       <a:solidFill>
-                        <a:srgbClr val="D6E9EB"/>
+                        <a:srgbClr val="D1F7FA"/>
                       </a:solidFill>
                       <a:prstDash val="solid"/>
                     </a:lnR>
                     <a:lnT w="9525" cap="flat" cmpd="sng" algn="ctr">
                       <a:solidFill>
-                        <a:srgbClr val="D6E9EB"/>
+                        <a:srgbClr val="D1F7FA"/>
                       </a:solidFill>
                       <a:prstDash val="solid"/>
                     </a:lnT>
                     <a:lnB w="9525" cap="flat" cmpd="sng" algn="ctr">
                       <a:solidFill>
-                        <a:srgbClr val="D6E9EB"/>
+                        <a:srgbClr val="D1F7FA"/>
                       </a:solidFill>
                       <a:prstDash val="solid"/>
                     </a:lnB>
@@ -5296,25 +5296,25 @@
                   <a:tcPr anchor="ctr" marL="73152" marR="73152">
                     <a:lnL w="9525" cap="flat" cmpd="sng" algn="ctr">
                       <a:solidFill>
-                        <a:srgbClr val="D6E9EB"/>
+                        <a:srgbClr val="D1F7FA"/>
                       </a:solidFill>
                       <a:prstDash val="solid"/>
                     </a:lnL>
                     <a:lnR w="9525" cap="flat" cmpd="sng" algn="ctr">
                       <a:solidFill>
-                        <a:srgbClr val="D6E9EB"/>
+                        <a:srgbClr val="D1F7FA"/>
                       </a:solidFill>
                       <a:prstDash val="solid"/>
                     </a:lnR>
                     <a:lnT w="9525" cap="flat" cmpd="sng" algn="ctr">
                       <a:solidFill>
-                        <a:srgbClr val="D6E9EB"/>
+                        <a:srgbClr val="D1F7FA"/>
                       </a:solidFill>
                       <a:prstDash val="solid"/>
                     </a:lnT>
                     <a:lnB w="9525" cap="flat" cmpd="sng" algn="ctr">
                       <a:solidFill>
-                        <a:srgbClr val="D6E9EB"/>
+                        <a:srgbClr val="D1F7FA"/>
                       </a:solidFill>
                       <a:prstDash val="solid"/>
                     </a:lnB>
@@ -5342,25 +5342,25 @@
                   <a:tcPr anchor="ctr" marL="73152" marR="73152">
                     <a:lnL w="9525" cap="flat" cmpd="sng" algn="ctr">
                       <a:solidFill>
-                        <a:srgbClr val="D6E9EB"/>
+                        <a:srgbClr val="D1F7FA"/>
                       </a:solidFill>
                       <a:prstDash val="solid"/>
                     </a:lnL>
                     <a:lnR w="9525" cap="flat" cmpd="sng" algn="ctr">
                       <a:solidFill>
-                        <a:srgbClr val="D6E9EB"/>
+                        <a:srgbClr val="D1F7FA"/>
                       </a:solidFill>
                       <a:prstDash val="solid"/>
                     </a:lnR>
                     <a:lnT w="9525" cap="flat" cmpd="sng" algn="ctr">
                       <a:solidFill>
-                        <a:srgbClr val="D6E9EB"/>
+                        <a:srgbClr val="D1F7FA"/>
                       </a:solidFill>
                       <a:prstDash val="solid"/>
                     </a:lnT>
                     <a:lnB w="9525" cap="flat" cmpd="sng" algn="ctr">
                       <a:solidFill>
-                        <a:srgbClr val="D6E9EB"/>
+                        <a:srgbClr val="D1F7FA"/>
                       </a:solidFill>
                       <a:prstDash val="solid"/>
                     </a:lnB>
@@ -5390,30 +5390,30 @@
                   <a:tcPr anchor="ctr" marL="73152" marR="73152">
                     <a:lnL w="9525" cap="flat" cmpd="sng" algn="ctr">
                       <a:solidFill>
-                        <a:srgbClr val="D6E9EB"/>
+                        <a:srgbClr val="D1F7FA"/>
                       </a:solidFill>
                       <a:prstDash val="solid"/>
                     </a:lnL>
                     <a:lnR w="9525" cap="flat" cmpd="sng" algn="ctr">
                       <a:solidFill>
-                        <a:srgbClr val="D6E9EB"/>
+                        <a:srgbClr val="D1F7FA"/>
                       </a:solidFill>
                       <a:prstDash val="solid"/>
                     </a:lnR>
                     <a:lnT w="9525" cap="flat" cmpd="sng" algn="ctr">
                       <a:solidFill>
-                        <a:srgbClr val="D6E9EB"/>
+                        <a:srgbClr val="D1F7FA"/>
                       </a:solidFill>
                       <a:prstDash val="solid"/>
                     </a:lnT>
                     <a:lnB w="9525" cap="flat" cmpd="sng" algn="ctr">
                       <a:solidFill>
-                        <a:srgbClr val="D6E9EB"/>
+                        <a:srgbClr val="D1F7FA"/>
                       </a:solidFill>
                       <a:prstDash val="solid"/>
                     </a:lnB>
                     <a:solidFill>
-                      <a:srgbClr val="F2F7F8"/>
+                      <a:srgbClr val="EEFBFC"/>
                     </a:solidFill>
                   </a:tcPr>
                 </a:tc>
@@ -5436,30 +5436,30 @@
                   <a:tcPr anchor="ctr" marL="73152" marR="73152">
                     <a:lnL w="9525" cap="flat" cmpd="sng" algn="ctr">
                       <a:solidFill>
-                        <a:srgbClr val="D6E9EB"/>
+                        <a:srgbClr val="D1F7FA"/>
                       </a:solidFill>
                       <a:prstDash val="solid"/>
                     </a:lnL>
                     <a:lnR w="9525" cap="flat" cmpd="sng" algn="ctr">
                       <a:solidFill>
-                        <a:srgbClr val="D6E9EB"/>
+                        <a:srgbClr val="D1F7FA"/>
                       </a:solidFill>
                       <a:prstDash val="solid"/>
                     </a:lnR>
                     <a:lnT w="9525" cap="flat" cmpd="sng" algn="ctr">
                       <a:solidFill>
-                        <a:srgbClr val="D6E9EB"/>
+                        <a:srgbClr val="D1F7FA"/>
                       </a:solidFill>
                       <a:prstDash val="solid"/>
                     </a:lnT>
                     <a:lnB w="9525" cap="flat" cmpd="sng" algn="ctr">
                       <a:solidFill>
-                        <a:srgbClr val="D6E9EB"/>
+                        <a:srgbClr val="D1F7FA"/>
                       </a:solidFill>
                       <a:prstDash val="solid"/>
                     </a:lnB>
                     <a:solidFill>
-                      <a:srgbClr val="F2F7F8"/>
+                      <a:srgbClr val="EEFBFC"/>
                     </a:solidFill>
                   </a:tcPr>
                 </a:tc>
@@ -5482,30 +5482,30 @@
                   <a:tcPr anchor="ctr" marL="73152" marR="73152">
                     <a:lnL w="9525" cap="flat" cmpd="sng" algn="ctr">
                       <a:solidFill>
-                        <a:srgbClr val="D6E9EB"/>
+                        <a:srgbClr val="D1F7FA"/>
                       </a:solidFill>
                       <a:prstDash val="solid"/>
                     </a:lnL>
                     <a:lnR w="9525" cap="flat" cmpd="sng" algn="ctr">
                       <a:solidFill>
-                        <a:srgbClr val="D6E9EB"/>
+                        <a:srgbClr val="D1F7FA"/>
                       </a:solidFill>
                       <a:prstDash val="solid"/>
                     </a:lnR>
                     <a:lnT w="9525" cap="flat" cmpd="sng" algn="ctr">
                       <a:solidFill>
-                        <a:srgbClr val="D6E9EB"/>
+                        <a:srgbClr val="D1F7FA"/>
                       </a:solidFill>
                       <a:prstDash val="solid"/>
                     </a:lnT>
                     <a:lnB w="9525" cap="flat" cmpd="sng" algn="ctr">
                       <a:solidFill>
-                        <a:srgbClr val="D6E9EB"/>
+                        <a:srgbClr val="D1F7FA"/>
                       </a:solidFill>
                       <a:prstDash val="solid"/>
                     </a:lnB>
                     <a:solidFill>
-                      <a:srgbClr val="F2F7F8"/>
+                      <a:srgbClr val="EEFBFC"/>
                     </a:solidFill>
                   </a:tcPr>
                 </a:tc>
@@ -5528,30 +5528,30 @@
                   <a:tcPr anchor="ctr" marL="73152" marR="73152">
                     <a:lnL w="9525" cap="flat" cmpd="sng" algn="ctr">
                       <a:solidFill>
-                        <a:srgbClr val="D6E9EB"/>
+                        <a:srgbClr val="D1F7FA"/>
                       </a:solidFill>
                       <a:prstDash val="solid"/>
                     </a:lnL>
                     <a:lnR w="9525" cap="flat" cmpd="sng" algn="ctr">
                       <a:solidFill>
-                        <a:srgbClr val="D6E9EB"/>
+                        <a:srgbClr val="D1F7FA"/>
                       </a:solidFill>
                       <a:prstDash val="solid"/>
                     </a:lnR>
                     <a:lnT w="9525" cap="flat" cmpd="sng" algn="ctr">
                       <a:solidFill>
-                        <a:srgbClr val="D6E9EB"/>
+                        <a:srgbClr val="D1F7FA"/>
                       </a:solidFill>
                       <a:prstDash val="solid"/>
                     </a:lnT>
                     <a:lnB w="9525" cap="flat" cmpd="sng" algn="ctr">
                       <a:solidFill>
-                        <a:srgbClr val="D6E9EB"/>
+                        <a:srgbClr val="D1F7FA"/>
                       </a:solidFill>
                       <a:prstDash val="solid"/>
                     </a:lnB>
                     <a:solidFill>
-                      <a:srgbClr val="F2F7F8"/>
+                      <a:srgbClr val="EEFBFC"/>
                     </a:solidFill>
                   </a:tcPr>
                 </a:tc>
@@ -5574,30 +5574,30 @@
                   <a:tcPr anchor="ctr" marL="73152" marR="73152">
                     <a:lnL w="9525" cap="flat" cmpd="sng" algn="ctr">
                       <a:solidFill>
-                        <a:srgbClr val="D6E9EB"/>
+                        <a:srgbClr val="D1F7FA"/>
                       </a:solidFill>
                       <a:prstDash val="solid"/>
                     </a:lnL>
                     <a:lnR w="9525" cap="flat" cmpd="sng" algn="ctr">
                       <a:solidFill>
-                        <a:srgbClr val="D6E9EB"/>
+                        <a:srgbClr val="D1F7FA"/>
                       </a:solidFill>
                       <a:prstDash val="solid"/>
                     </a:lnR>
                     <a:lnT w="9525" cap="flat" cmpd="sng" algn="ctr">
                       <a:solidFill>
-                        <a:srgbClr val="D6E9EB"/>
+                        <a:srgbClr val="D1F7FA"/>
                       </a:solidFill>
                       <a:prstDash val="solid"/>
                     </a:lnT>
                     <a:lnB w="9525" cap="flat" cmpd="sng" algn="ctr">
                       <a:solidFill>
-                        <a:srgbClr val="D6E9EB"/>
+                        <a:srgbClr val="D1F7FA"/>
                       </a:solidFill>
                       <a:prstDash val="solid"/>
                     </a:lnB>
                     <a:solidFill>
-                      <a:srgbClr val="F2F7F8"/>
+                      <a:srgbClr val="EEFBFC"/>
                     </a:solidFill>
                   </a:tcPr>
                 </a:tc>
@@ -5622,25 +5622,25 @@
                   <a:tcPr anchor="ctr" marL="73152" marR="73152">
                     <a:lnL w="9525" cap="flat" cmpd="sng" algn="ctr">
                       <a:solidFill>
-                        <a:srgbClr val="D6E9EB"/>
+                        <a:srgbClr val="D1F7FA"/>
                       </a:solidFill>
                       <a:prstDash val="solid"/>
                     </a:lnL>
                     <a:lnR w="9525" cap="flat" cmpd="sng" algn="ctr">
                       <a:solidFill>
-                        <a:srgbClr val="D6E9EB"/>
+                        <a:srgbClr val="D1F7FA"/>
                       </a:solidFill>
                       <a:prstDash val="solid"/>
                     </a:lnR>
                     <a:lnT w="9525" cap="flat" cmpd="sng" algn="ctr">
                       <a:solidFill>
-                        <a:srgbClr val="D6E9EB"/>
+                        <a:srgbClr val="D1F7FA"/>
                       </a:solidFill>
                       <a:prstDash val="solid"/>
                     </a:lnT>
                     <a:lnB w="9525" cap="flat" cmpd="sng" algn="ctr">
                       <a:solidFill>
-                        <a:srgbClr val="D6E9EB"/>
+                        <a:srgbClr val="D1F7FA"/>
                       </a:solidFill>
                       <a:prstDash val="solid"/>
                     </a:lnB>
@@ -5668,25 +5668,25 @@
                   <a:tcPr anchor="ctr" marL="73152" marR="73152">
                     <a:lnL w="9525" cap="flat" cmpd="sng" algn="ctr">
                       <a:solidFill>
-                        <a:srgbClr val="D6E9EB"/>
+                        <a:srgbClr val="D1F7FA"/>
                       </a:solidFill>
                       <a:prstDash val="solid"/>
                     </a:lnL>
                     <a:lnR w="9525" cap="flat" cmpd="sng" algn="ctr">
                       <a:solidFill>
-                        <a:srgbClr val="D6E9EB"/>
+                        <a:srgbClr val="D1F7FA"/>
                       </a:solidFill>
                       <a:prstDash val="solid"/>
                     </a:lnR>
                     <a:lnT w="9525" cap="flat" cmpd="sng" algn="ctr">
                       <a:solidFill>
-                        <a:srgbClr val="D6E9EB"/>
+                        <a:srgbClr val="D1F7FA"/>
                       </a:solidFill>
                       <a:prstDash val="solid"/>
                     </a:lnT>
                     <a:lnB w="9525" cap="flat" cmpd="sng" algn="ctr">
                       <a:solidFill>
-                        <a:srgbClr val="D6E9EB"/>
+                        <a:srgbClr val="D1F7FA"/>
                       </a:solidFill>
                       <a:prstDash val="solid"/>
                     </a:lnB>
@@ -5714,25 +5714,25 @@
                   <a:tcPr anchor="ctr" marL="73152" marR="73152">
                     <a:lnL w="9525" cap="flat" cmpd="sng" algn="ctr">
                       <a:solidFill>
-                        <a:srgbClr val="D6E9EB"/>
+                        <a:srgbClr val="D1F7FA"/>
                       </a:solidFill>
                       <a:prstDash val="solid"/>
                     </a:lnL>
                     <a:lnR w="9525" cap="flat" cmpd="sng" algn="ctr">
                       <a:solidFill>
-                        <a:srgbClr val="D6E9EB"/>
+                        <a:srgbClr val="D1F7FA"/>
                       </a:solidFill>
                       <a:prstDash val="solid"/>
                     </a:lnR>
                     <a:lnT w="9525" cap="flat" cmpd="sng" algn="ctr">
                       <a:solidFill>
-                        <a:srgbClr val="D6E9EB"/>
+                        <a:srgbClr val="D1F7FA"/>
                       </a:solidFill>
                       <a:prstDash val="solid"/>
                     </a:lnT>
                     <a:lnB w="9525" cap="flat" cmpd="sng" algn="ctr">
                       <a:solidFill>
-                        <a:srgbClr val="D6E9EB"/>
+                        <a:srgbClr val="D1F7FA"/>
                       </a:solidFill>
                       <a:prstDash val="solid"/>
                     </a:lnB>
@@ -5760,25 +5760,25 @@
                   <a:tcPr anchor="ctr" marL="73152" marR="73152">
                     <a:lnL w="9525" cap="flat" cmpd="sng" algn="ctr">
                       <a:solidFill>
-                        <a:srgbClr val="D6E9EB"/>
+                        <a:srgbClr val="D1F7FA"/>
                       </a:solidFill>
                       <a:prstDash val="solid"/>
                     </a:lnL>
                     <a:lnR w="9525" cap="flat" cmpd="sng" algn="ctr">
                       <a:solidFill>
-                        <a:srgbClr val="D6E9EB"/>
+                        <a:srgbClr val="D1F7FA"/>
                       </a:solidFill>
                       <a:prstDash val="solid"/>
                     </a:lnR>
                     <a:lnT w="9525" cap="flat" cmpd="sng" algn="ctr">
                       <a:solidFill>
-                        <a:srgbClr val="D6E9EB"/>
+                        <a:srgbClr val="D1F7FA"/>
                       </a:solidFill>
                       <a:prstDash val="solid"/>
                     </a:lnT>
                     <a:lnB w="9525" cap="flat" cmpd="sng" algn="ctr">
                       <a:solidFill>
-                        <a:srgbClr val="D6E9EB"/>
+                        <a:srgbClr val="D1F7FA"/>
                       </a:solidFill>
                       <a:prstDash val="solid"/>
                     </a:lnB>
@@ -5806,25 +5806,25 @@
                   <a:tcPr anchor="ctr" marL="73152" marR="73152">
                     <a:lnL w="9525" cap="flat" cmpd="sng" algn="ctr">
                       <a:solidFill>
-                        <a:srgbClr val="D6E9EB"/>
+                        <a:srgbClr val="D1F7FA"/>
                       </a:solidFill>
                       <a:prstDash val="solid"/>
                     </a:lnL>
                     <a:lnR w="9525" cap="flat" cmpd="sng" algn="ctr">
                       <a:solidFill>
-                        <a:srgbClr val="D6E9EB"/>
+                        <a:srgbClr val="D1F7FA"/>
                       </a:solidFill>
                       <a:prstDash val="solid"/>
                     </a:lnR>
                     <a:lnT w="9525" cap="flat" cmpd="sng" algn="ctr">
                       <a:solidFill>
-                        <a:srgbClr val="D6E9EB"/>
+                        <a:srgbClr val="D1F7FA"/>
                       </a:solidFill>
                       <a:prstDash val="solid"/>
                     </a:lnT>
                     <a:lnB w="9525" cap="flat" cmpd="sng" algn="ctr">
                       <a:solidFill>
-                        <a:srgbClr val="D6E9EB"/>
+                        <a:srgbClr val="D1F7FA"/>
                       </a:solidFill>
                       <a:prstDash val="solid"/>
                     </a:lnB>
@@ -5854,30 +5854,30 @@
                   <a:tcPr anchor="ctr" marL="73152" marR="73152">
                     <a:lnL w="9525" cap="flat" cmpd="sng" algn="ctr">
                       <a:solidFill>
-                        <a:srgbClr val="D6E9EB"/>
+                        <a:srgbClr val="D1F7FA"/>
                       </a:solidFill>
                       <a:prstDash val="solid"/>
                     </a:lnL>
                     <a:lnR w="9525" cap="flat" cmpd="sng" algn="ctr">
                       <a:solidFill>
-                        <a:srgbClr val="D6E9EB"/>
+                        <a:srgbClr val="D1F7FA"/>
                       </a:solidFill>
                       <a:prstDash val="solid"/>
                     </a:lnR>
                     <a:lnT w="9525" cap="flat" cmpd="sng" algn="ctr">
                       <a:solidFill>
-                        <a:srgbClr val="D6E9EB"/>
+                        <a:srgbClr val="D1F7FA"/>
                       </a:solidFill>
                       <a:prstDash val="solid"/>
                     </a:lnT>
                     <a:lnB w="9525" cap="flat" cmpd="sng" algn="ctr">
                       <a:solidFill>
-                        <a:srgbClr val="D6E9EB"/>
+                        <a:srgbClr val="D1F7FA"/>
                       </a:solidFill>
                       <a:prstDash val="solid"/>
                     </a:lnB>
                     <a:solidFill>
-                      <a:srgbClr val="F2F7F8"/>
+                      <a:srgbClr val="EEFBFC"/>
                     </a:solidFill>
                   </a:tcPr>
                 </a:tc>
@@ -5900,30 +5900,30 @@
                   <a:tcPr anchor="ctr" marL="73152" marR="73152">
                     <a:lnL w="9525" cap="flat" cmpd="sng" algn="ctr">
                       <a:solidFill>
-                        <a:srgbClr val="D6E9EB"/>
+                        <a:srgbClr val="D1F7FA"/>
                       </a:solidFill>
                       <a:prstDash val="solid"/>
                     </a:lnL>
                     <a:lnR w="9525" cap="flat" cmpd="sng" algn="ctr">
                       <a:solidFill>
-                        <a:srgbClr val="D6E9EB"/>
+                        <a:srgbClr val="D1F7FA"/>
                       </a:solidFill>
                       <a:prstDash val="solid"/>
                     </a:lnR>
                     <a:lnT w="9525" cap="flat" cmpd="sng" algn="ctr">
                       <a:solidFill>
-                        <a:srgbClr val="D6E9EB"/>
+                        <a:srgbClr val="D1F7FA"/>
                       </a:solidFill>
                       <a:prstDash val="solid"/>
                     </a:lnT>
                     <a:lnB w="9525" cap="flat" cmpd="sng" algn="ctr">
                       <a:solidFill>
-                        <a:srgbClr val="D6E9EB"/>
+                        <a:srgbClr val="D1F7FA"/>
                       </a:solidFill>
                       <a:prstDash val="solid"/>
                     </a:lnB>
                     <a:solidFill>
-                      <a:srgbClr val="F2F7F8"/>
+                      <a:srgbClr val="EEFBFC"/>
                     </a:solidFill>
                   </a:tcPr>
                 </a:tc>
@@ -5946,30 +5946,30 @@
                   <a:tcPr anchor="ctr" marL="73152" marR="73152">
                     <a:lnL w="9525" cap="flat" cmpd="sng" algn="ctr">
                       <a:solidFill>
-                        <a:srgbClr val="D6E9EB"/>
+                        <a:srgbClr val="D1F7FA"/>
                       </a:solidFill>
                       <a:prstDash val="solid"/>
                     </a:lnL>
                     <a:lnR w="9525" cap="flat" cmpd="sng" algn="ctr">
                       <a:solidFill>
-                        <a:srgbClr val="D6E9EB"/>
+                        <a:srgbClr val="D1F7FA"/>
                       </a:solidFill>
                       <a:prstDash val="solid"/>
                     </a:lnR>
                     <a:lnT w="9525" cap="flat" cmpd="sng" algn="ctr">
                       <a:solidFill>
-                        <a:srgbClr val="D6E9EB"/>
+                        <a:srgbClr val="D1F7FA"/>
                       </a:solidFill>
                       <a:prstDash val="solid"/>
                     </a:lnT>
                     <a:lnB w="9525" cap="flat" cmpd="sng" algn="ctr">
                       <a:solidFill>
-                        <a:srgbClr val="D6E9EB"/>
+                        <a:srgbClr val="D1F7FA"/>
                       </a:solidFill>
                       <a:prstDash val="solid"/>
                     </a:lnB>
                     <a:solidFill>
-                      <a:srgbClr val="F2F7F8"/>
+                      <a:srgbClr val="EEFBFC"/>
                     </a:solidFill>
                   </a:tcPr>
                 </a:tc>
@@ -5992,30 +5992,30 @@
                   <a:tcPr anchor="ctr" marL="73152" marR="73152">
                     <a:lnL w="9525" cap="flat" cmpd="sng" algn="ctr">
                       <a:solidFill>
-                        <a:srgbClr val="D6E9EB"/>
+                        <a:srgbClr val="D1F7FA"/>
                       </a:solidFill>
                       <a:prstDash val="solid"/>
                     </a:lnL>
                     <a:lnR w="9525" cap="flat" cmpd="sng" algn="ctr">
                       <a:solidFill>
-                        <a:srgbClr val="D6E9EB"/>
+                        <a:srgbClr val="D1F7FA"/>
                       </a:solidFill>
                       <a:prstDash val="solid"/>
                     </a:lnR>
                     <a:lnT w="9525" cap="flat" cmpd="sng" algn="ctr">
                       <a:solidFill>
-                        <a:srgbClr val="D6E9EB"/>
+                        <a:srgbClr val="D1F7FA"/>
                       </a:solidFill>
                       <a:prstDash val="solid"/>
                     </a:lnT>
                     <a:lnB w="9525" cap="flat" cmpd="sng" algn="ctr">
                       <a:solidFill>
-                        <a:srgbClr val="D6E9EB"/>
+                        <a:srgbClr val="D1F7FA"/>
                       </a:solidFill>
                       <a:prstDash val="solid"/>
                     </a:lnB>
                     <a:solidFill>
-                      <a:srgbClr val="F2F7F8"/>
+                      <a:srgbClr val="EEFBFC"/>
                     </a:solidFill>
                   </a:tcPr>
                 </a:tc>
@@ -6038,30 +6038,30 @@
                   <a:tcPr anchor="ctr" marL="73152" marR="73152">
                     <a:lnL w="9525" cap="flat" cmpd="sng" algn="ctr">
                       <a:solidFill>
-                        <a:srgbClr val="D6E9EB"/>
+                        <a:srgbClr val="D1F7FA"/>
                       </a:solidFill>
                       <a:prstDash val="solid"/>
                     </a:lnL>
                     <a:lnR w="9525" cap="flat" cmpd="sng" algn="ctr">
                       <a:solidFill>
-                        <a:srgbClr val="D6E9EB"/>
+                        <a:srgbClr val="D1F7FA"/>
                       </a:solidFill>
                       <a:prstDash val="solid"/>
                     </a:lnR>
                     <a:lnT w="9525" cap="flat" cmpd="sng" algn="ctr">
                       <a:solidFill>
-                        <a:srgbClr val="D6E9EB"/>
+                        <a:srgbClr val="D1F7FA"/>
                       </a:solidFill>
                       <a:prstDash val="solid"/>
                     </a:lnT>
                     <a:lnB w="9525" cap="flat" cmpd="sng" algn="ctr">
                       <a:solidFill>
-                        <a:srgbClr val="D6E9EB"/>
+                        <a:srgbClr val="D1F7FA"/>
                       </a:solidFill>
                       <a:prstDash val="solid"/>
                     </a:lnB>
                     <a:solidFill>
-                      <a:srgbClr val="F2F7F8"/>
+                      <a:srgbClr val="EEFBFC"/>
                     </a:solidFill>
                   </a:tcPr>
                 </a:tc>
@@ -6084,7 +6084,7 @@
     <p:bg>
       <p:bgPr>
         <a:solidFill>
-          <a:srgbClr val="F2F7F8"/>
+          <a:srgbClr val="EEFBFC"/>
         </a:solidFill>
         <a:effectLst/>
       </p:bgPr>
@@ -6113,7 +6113,7 @@
           <a:noFill/>
           <a:ln w="28575">
             <a:solidFill>
-              <a:srgbClr val="4B868B"/>
+              <a:srgbClr val="26B8C5"/>
             </a:solidFill>
           </a:ln>
         </p:spPr>
@@ -6142,7 +6142,7 @@
           <a:noFill/>
           <a:ln w="9525">
             <a:solidFill>
-              <a:srgbClr val="D6E9EB"/>
+              <a:srgbClr val="D1F7FA"/>
             </a:solidFill>
           </a:ln>
         </p:spPr>
@@ -6184,7 +6184,7 @@
             <a:r>
               <a:rPr sz="3000" b="1" i="0">
                 <a:solidFill>
-                  <a:srgbClr val="274649"/>
+                  <a:srgbClr val="11595F"/>
                 </a:solidFill>
               </a:rPr>
               <a:t>보장 항목 체크</a:t>
@@ -6236,30 +6236,30 @@
                   <a:tcPr anchor="ctr" marL="73152" marR="73152">
                     <a:lnL w="9525" cap="flat" cmpd="sng" algn="ctr">
                       <a:solidFill>
-                        <a:srgbClr val="4B868B"/>
+                        <a:srgbClr val="26B8C5"/>
                       </a:solidFill>
                       <a:prstDash val="solid"/>
                     </a:lnL>
                     <a:lnR w="9525" cap="flat" cmpd="sng" algn="ctr">
                       <a:solidFill>
-                        <a:srgbClr val="4B868B"/>
+                        <a:srgbClr val="26B8C5"/>
                       </a:solidFill>
                       <a:prstDash val="solid"/>
                     </a:lnR>
                     <a:lnT w="9525" cap="flat" cmpd="sng" algn="ctr">
                       <a:solidFill>
-                        <a:srgbClr val="4B868B"/>
+                        <a:srgbClr val="26B8C5"/>
                       </a:solidFill>
                       <a:prstDash val="solid"/>
                     </a:lnT>
                     <a:lnB w="9525" cap="flat" cmpd="sng" algn="ctr">
                       <a:solidFill>
-                        <a:srgbClr val="4B868B"/>
+                        <a:srgbClr val="26B8C5"/>
                       </a:solidFill>
                       <a:prstDash val="solid"/>
                     </a:lnB>
                     <a:solidFill>
-                      <a:srgbClr val="4B868B"/>
+                      <a:srgbClr val="26B8C5"/>
                     </a:solidFill>
                   </a:tcPr>
                 </a:tc>
@@ -6282,30 +6282,30 @@
                   <a:tcPr anchor="ctr" marL="73152" marR="73152">
                     <a:lnL w="9525" cap="flat" cmpd="sng" algn="ctr">
                       <a:solidFill>
-                        <a:srgbClr val="4B868B"/>
+                        <a:srgbClr val="26B8C5"/>
                       </a:solidFill>
                       <a:prstDash val="solid"/>
                     </a:lnL>
                     <a:lnR w="9525" cap="flat" cmpd="sng" algn="ctr">
                       <a:solidFill>
-                        <a:srgbClr val="4B868B"/>
+                        <a:srgbClr val="26B8C5"/>
                       </a:solidFill>
                       <a:prstDash val="solid"/>
                     </a:lnR>
                     <a:lnT w="9525" cap="flat" cmpd="sng" algn="ctr">
                       <a:solidFill>
-                        <a:srgbClr val="4B868B"/>
+                        <a:srgbClr val="26B8C5"/>
                       </a:solidFill>
                       <a:prstDash val="solid"/>
                     </a:lnT>
                     <a:lnB w="9525" cap="flat" cmpd="sng" algn="ctr">
                       <a:solidFill>
-                        <a:srgbClr val="4B868B"/>
+                        <a:srgbClr val="26B8C5"/>
                       </a:solidFill>
                       <a:prstDash val="solid"/>
                     </a:lnB>
                     <a:solidFill>
-                      <a:srgbClr val="4B868B"/>
+                      <a:srgbClr val="26B8C5"/>
                     </a:solidFill>
                   </a:tcPr>
                 </a:tc>
@@ -6328,30 +6328,30 @@
                   <a:tcPr anchor="ctr" marL="73152" marR="73152">
                     <a:lnL w="9525" cap="flat" cmpd="sng" algn="ctr">
                       <a:solidFill>
-                        <a:srgbClr val="4B868B"/>
+                        <a:srgbClr val="26B8C5"/>
                       </a:solidFill>
                       <a:prstDash val="solid"/>
                     </a:lnL>
                     <a:lnR w="9525" cap="flat" cmpd="sng" algn="ctr">
                       <a:solidFill>
-                        <a:srgbClr val="4B868B"/>
+                        <a:srgbClr val="26B8C5"/>
                       </a:solidFill>
                       <a:prstDash val="solid"/>
                     </a:lnR>
                     <a:lnT w="9525" cap="flat" cmpd="sng" algn="ctr">
                       <a:solidFill>
-                        <a:srgbClr val="4B868B"/>
+                        <a:srgbClr val="26B8C5"/>
                       </a:solidFill>
                       <a:prstDash val="solid"/>
                     </a:lnT>
                     <a:lnB w="9525" cap="flat" cmpd="sng" algn="ctr">
                       <a:solidFill>
-                        <a:srgbClr val="4B868B"/>
+                        <a:srgbClr val="26B8C5"/>
                       </a:solidFill>
                       <a:prstDash val="solid"/>
                     </a:lnB>
                     <a:solidFill>
-                      <a:srgbClr val="4B868B"/>
+                      <a:srgbClr val="26B8C5"/>
                     </a:solidFill>
                   </a:tcPr>
                 </a:tc>
@@ -6374,30 +6374,30 @@
                   <a:tcPr anchor="ctr" marL="73152" marR="73152">
                     <a:lnL w="9525" cap="flat" cmpd="sng" algn="ctr">
                       <a:solidFill>
-                        <a:srgbClr val="4B868B"/>
+                        <a:srgbClr val="26B8C5"/>
                       </a:solidFill>
                       <a:prstDash val="solid"/>
                     </a:lnL>
                     <a:lnR w="9525" cap="flat" cmpd="sng" algn="ctr">
                       <a:solidFill>
-                        <a:srgbClr val="4B868B"/>
+                        <a:srgbClr val="26B8C5"/>
                       </a:solidFill>
                       <a:prstDash val="solid"/>
                     </a:lnR>
                     <a:lnT w="9525" cap="flat" cmpd="sng" algn="ctr">
                       <a:solidFill>
-                        <a:srgbClr val="4B868B"/>
+                        <a:srgbClr val="26B8C5"/>
                       </a:solidFill>
                       <a:prstDash val="solid"/>
                     </a:lnT>
                     <a:lnB w="9525" cap="flat" cmpd="sng" algn="ctr">
                       <a:solidFill>
-                        <a:srgbClr val="4B868B"/>
+                        <a:srgbClr val="26B8C5"/>
                       </a:solidFill>
                       <a:prstDash val="solid"/>
                     </a:lnB>
                     <a:solidFill>
-                      <a:srgbClr val="4B868B"/>
+                      <a:srgbClr val="26B8C5"/>
                     </a:solidFill>
                   </a:tcPr>
                 </a:tc>
@@ -6412,7 +6412,7 @@
                       <a:r>
                         <a:rPr sz="1400" b="1">
                           <a:solidFill>
-                            <a:srgbClr val="274649"/>
+                            <a:srgbClr val="11595F"/>
                           </a:solidFill>
                         </a:rPr>
                         <a:t>사망·재해</a:t>
@@ -6422,30 +6422,30 @@
                   <a:tcPr anchor="ctr" marL="73152" marR="73152">
                     <a:lnL w="9525" cap="flat" cmpd="sng" algn="ctr">
                       <a:solidFill>
-                        <a:srgbClr val="D6E9EB"/>
+                        <a:srgbClr val="D1F7FA"/>
                       </a:solidFill>
                       <a:prstDash val="solid"/>
                     </a:lnL>
                     <a:lnR w="9525" cap="flat" cmpd="sng" algn="ctr">
                       <a:solidFill>
-                        <a:srgbClr val="D6E9EB"/>
+                        <a:srgbClr val="D1F7FA"/>
                       </a:solidFill>
                       <a:prstDash val="solid"/>
                     </a:lnR>
                     <a:lnT w="9525" cap="flat" cmpd="sng" algn="ctr">
                       <a:solidFill>
-                        <a:srgbClr val="D6E9EB"/>
+                        <a:srgbClr val="D1F7FA"/>
                       </a:solidFill>
                       <a:prstDash val="solid"/>
                     </a:lnT>
                     <a:lnB w="9525" cap="flat" cmpd="sng" algn="ctr">
                       <a:solidFill>
-                        <a:srgbClr val="D6E9EB"/>
+                        <a:srgbClr val="D1F7FA"/>
                       </a:solidFill>
                       <a:prstDash val="solid"/>
                     </a:lnB>
                     <a:solidFill>
-                      <a:srgbClr val="D6E9EB"/>
+                      <a:srgbClr val="D1F7FA"/>
                     </a:solidFill>
                   </a:tcPr>
                 </a:tc>
@@ -6468,25 +6468,25 @@
                   <a:tcPr anchor="ctr" marL="73152" marR="73152">
                     <a:lnL w="9525" cap="flat" cmpd="sng" algn="ctr">
                       <a:solidFill>
-                        <a:srgbClr val="D6E9EB"/>
+                        <a:srgbClr val="D1F7FA"/>
                       </a:solidFill>
                       <a:prstDash val="solid"/>
                     </a:lnL>
                     <a:lnR w="9525" cap="flat" cmpd="sng" algn="ctr">
                       <a:solidFill>
-                        <a:srgbClr val="D6E9EB"/>
+                        <a:srgbClr val="D1F7FA"/>
                       </a:solidFill>
                       <a:prstDash val="solid"/>
                     </a:lnR>
                     <a:lnT w="9525" cap="flat" cmpd="sng" algn="ctr">
                       <a:solidFill>
-                        <a:srgbClr val="D6E9EB"/>
+                        <a:srgbClr val="D1F7FA"/>
                       </a:solidFill>
                       <a:prstDash val="solid"/>
                     </a:lnT>
                     <a:lnB w="9525" cap="flat" cmpd="sng" algn="ctr">
                       <a:solidFill>
-                        <a:srgbClr val="D6E9EB"/>
+                        <a:srgbClr val="D1F7FA"/>
                       </a:solidFill>
                       <a:prstDash val="solid"/>
                     </a:lnB>
@@ -6514,25 +6514,25 @@
                   <a:tcPr anchor="ctr" marL="73152" marR="73152">
                     <a:lnL w="9525" cap="flat" cmpd="sng" algn="ctr">
                       <a:solidFill>
-                        <a:srgbClr val="D6E9EB"/>
+                        <a:srgbClr val="D1F7FA"/>
                       </a:solidFill>
                       <a:prstDash val="solid"/>
                     </a:lnL>
                     <a:lnR w="9525" cap="flat" cmpd="sng" algn="ctr">
                       <a:solidFill>
-                        <a:srgbClr val="D6E9EB"/>
+                        <a:srgbClr val="D1F7FA"/>
                       </a:solidFill>
                       <a:prstDash val="solid"/>
                     </a:lnR>
                     <a:lnT w="9525" cap="flat" cmpd="sng" algn="ctr">
                       <a:solidFill>
-                        <a:srgbClr val="D6E9EB"/>
+                        <a:srgbClr val="D1F7FA"/>
                       </a:solidFill>
                       <a:prstDash val="solid"/>
                     </a:lnT>
                     <a:lnB w="9525" cap="flat" cmpd="sng" algn="ctr">
                       <a:solidFill>
-                        <a:srgbClr val="D6E9EB"/>
+                        <a:srgbClr val="D1F7FA"/>
                       </a:solidFill>
                       <a:prstDash val="solid"/>
                     </a:lnB>
@@ -6560,25 +6560,25 @@
                   <a:tcPr anchor="ctr" marL="73152" marR="73152">
                     <a:lnL w="9525" cap="flat" cmpd="sng" algn="ctr">
                       <a:solidFill>
-                        <a:srgbClr val="D6E9EB"/>
+                        <a:srgbClr val="D1F7FA"/>
                       </a:solidFill>
                       <a:prstDash val="solid"/>
                     </a:lnL>
                     <a:lnR w="9525" cap="flat" cmpd="sng" algn="ctr">
                       <a:solidFill>
-                        <a:srgbClr val="D6E9EB"/>
+                        <a:srgbClr val="D1F7FA"/>
                       </a:solidFill>
                       <a:prstDash val="solid"/>
                     </a:lnR>
                     <a:lnT w="9525" cap="flat" cmpd="sng" algn="ctr">
                       <a:solidFill>
-                        <a:srgbClr val="D6E9EB"/>
+                        <a:srgbClr val="D1F7FA"/>
                       </a:solidFill>
                       <a:prstDash val="solid"/>
                     </a:lnT>
                     <a:lnB w="9525" cap="flat" cmpd="sng" algn="ctr">
                       <a:solidFill>
-                        <a:srgbClr val="D6E9EB"/>
+                        <a:srgbClr val="D1F7FA"/>
                       </a:solidFill>
                       <a:prstDash val="solid"/>
                     </a:lnB>
@@ -6598,7 +6598,7 @@
                       <a:r>
                         <a:rPr sz="1400" b="1">
                           <a:solidFill>
-                            <a:srgbClr val="274649"/>
+                            <a:srgbClr val="11595F"/>
                           </a:solidFill>
                         </a:rPr>
                         <a:t>질병 진단</a:t>
@@ -6608,30 +6608,30 @@
                   <a:tcPr anchor="ctr" marL="73152" marR="73152">
                     <a:lnL w="9525" cap="flat" cmpd="sng" algn="ctr">
                       <a:solidFill>
-                        <a:srgbClr val="D6E9EB"/>
+                        <a:srgbClr val="D1F7FA"/>
                       </a:solidFill>
                       <a:prstDash val="solid"/>
                     </a:lnL>
                     <a:lnR w="9525" cap="flat" cmpd="sng" algn="ctr">
                       <a:solidFill>
-                        <a:srgbClr val="D6E9EB"/>
+                        <a:srgbClr val="D1F7FA"/>
                       </a:solidFill>
                       <a:prstDash val="solid"/>
                     </a:lnR>
                     <a:lnT w="9525" cap="flat" cmpd="sng" algn="ctr">
                       <a:solidFill>
-                        <a:srgbClr val="D6E9EB"/>
+                        <a:srgbClr val="D1F7FA"/>
                       </a:solidFill>
                       <a:prstDash val="solid"/>
                     </a:lnT>
                     <a:lnB w="9525" cap="flat" cmpd="sng" algn="ctr">
                       <a:solidFill>
-                        <a:srgbClr val="D6E9EB"/>
+                        <a:srgbClr val="D1F7FA"/>
                       </a:solidFill>
                       <a:prstDash val="solid"/>
                     </a:lnB>
                     <a:solidFill>
-                      <a:srgbClr val="D6E9EB"/>
+                      <a:srgbClr val="D1F7FA"/>
                     </a:solidFill>
                   </a:tcPr>
                 </a:tc>
@@ -6654,30 +6654,30 @@
                   <a:tcPr anchor="ctr" marL="73152" marR="73152">
                     <a:lnL w="9525" cap="flat" cmpd="sng" algn="ctr">
                       <a:solidFill>
-                        <a:srgbClr val="D6E9EB"/>
+                        <a:srgbClr val="D1F7FA"/>
                       </a:solidFill>
                       <a:prstDash val="solid"/>
                     </a:lnL>
                     <a:lnR w="9525" cap="flat" cmpd="sng" algn="ctr">
                       <a:solidFill>
-                        <a:srgbClr val="D6E9EB"/>
+                        <a:srgbClr val="D1F7FA"/>
                       </a:solidFill>
                       <a:prstDash val="solid"/>
                     </a:lnR>
                     <a:lnT w="9525" cap="flat" cmpd="sng" algn="ctr">
                       <a:solidFill>
-                        <a:srgbClr val="D6E9EB"/>
+                        <a:srgbClr val="D1F7FA"/>
                       </a:solidFill>
                       <a:prstDash val="solid"/>
                     </a:lnT>
                     <a:lnB w="9525" cap="flat" cmpd="sng" algn="ctr">
                       <a:solidFill>
-                        <a:srgbClr val="D6E9EB"/>
+                        <a:srgbClr val="D1F7FA"/>
                       </a:solidFill>
                       <a:prstDash val="solid"/>
                     </a:lnB>
                     <a:solidFill>
-                      <a:srgbClr val="F2F7F8"/>
+                      <a:srgbClr val="EEFBFC"/>
                     </a:solidFill>
                   </a:tcPr>
                 </a:tc>
@@ -6700,30 +6700,30 @@
                   <a:tcPr anchor="ctr" marL="73152" marR="73152">
                     <a:lnL w="9525" cap="flat" cmpd="sng" algn="ctr">
                       <a:solidFill>
-                        <a:srgbClr val="D6E9EB"/>
+                        <a:srgbClr val="D1F7FA"/>
                       </a:solidFill>
                       <a:prstDash val="solid"/>
                     </a:lnL>
                     <a:lnR w="9525" cap="flat" cmpd="sng" algn="ctr">
                       <a:solidFill>
-                        <a:srgbClr val="D6E9EB"/>
+                        <a:srgbClr val="D1F7FA"/>
                       </a:solidFill>
                       <a:prstDash val="solid"/>
                     </a:lnR>
                     <a:lnT w="9525" cap="flat" cmpd="sng" algn="ctr">
                       <a:solidFill>
-                        <a:srgbClr val="D6E9EB"/>
+                        <a:srgbClr val="D1F7FA"/>
                       </a:solidFill>
                       <a:prstDash val="solid"/>
                     </a:lnT>
                     <a:lnB w="9525" cap="flat" cmpd="sng" algn="ctr">
                       <a:solidFill>
-                        <a:srgbClr val="D6E9EB"/>
+                        <a:srgbClr val="D1F7FA"/>
                       </a:solidFill>
                       <a:prstDash val="solid"/>
                     </a:lnB>
                     <a:solidFill>
-                      <a:srgbClr val="F2F7F8"/>
+                      <a:srgbClr val="EEFBFC"/>
                     </a:solidFill>
                   </a:tcPr>
                 </a:tc>
@@ -6746,30 +6746,30 @@
                   <a:tcPr anchor="ctr" marL="73152" marR="73152">
                     <a:lnL w="9525" cap="flat" cmpd="sng" algn="ctr">
                       <a:solidFill>
-                        <a:srgbClr val="D6E9EB"/>
+                        <a:srgbClr val="D1F7FA"/>
                       </a:solidFill>
                       <a:prstDash val="solid"/>
                     </a:lnL>
                     <a:lnR w="9525" cap="flat" cmpd="sng" algn="ctr">
                       <a:solidFill>
-                        <a:srgbClr val="D6E9EB"/>
+                        <a:srgbClr val="D1F7FA"/>
                       </a:solidFill>
                       <a:prstDash val="solid"/>
                     </a:lnR>
                     <a:lnT w="9525" cap="flat" cmpd="sng" algn="ctr">
                       <a:solidFill>
-                        <a:srgbClr val="D6E9EB"/>
+                        <a:srgbClr val="D1F7FA"/>
                       </a:solidFill>
                       <a:prstDash val="solid"/>
                     </a:lnT>
                     <a:lnB w="9525" cap="flat" cmpd="sng" algn="ctr">
                       <a:solidFill>
-                        <a:srgbClr val="D6E9EB"/>
+                        <a:srgbClr val="D1F7FA"/>
                       </a:solidFill>
                       <a:prstDash val="solid"/>
                     </a:lnB>
                     <a:solidFill>
-                      <a:srgbClr val="F2F7F8"/>
+                      <a:srgbClr val="EEFBFC"/>
                     </a:solidFill>
                   </a:tcPr>
                 </a:tc>
@@ -6784,7 +6784,7 @@
                       <a:r>
                         <a:rPr sz="1400" b="1">
                           <a:solidFill>
-                            <a:srgbClr val="274649"/>
+                            <a:srgbClr val="11595F"/>
                           </a:solidFill>
                         </a:rPr>
                         <a:t>암</a:t>
@@ -6794,30 +6794,30 @@
                   <a:tcPr anchor="ctr" marL="73152" marR="73152">
                     <a:lnL w="9525" cap="flat" cmpd="sng" algn="ctr">
                       <a:solidFill>
-                        <a:srgbClr val="D6E9EB"/>
+                        <a:srgbClr val="D1F7FA"/>
                       </a:solidFill>
                       <a:prstDash val="solid"/>
                     </a:lnL>
                     <a:lnR w="9525" cap="flat" cmpd="sng" algn="ctr">
                       <a:solidFill>
-                        <a:srgbClr val="D6E9EB"/>
+                        <a:srgbClr val="D1F7FA"/>
                       </a:solidFill>
                       <a:prstDash val="solid"/>
                     </a:lnR>
                     <a:lnT w="9525" cap="flat" cmpd="sng" algn="ctr">
                       <a:solidFill>
-                        <a:srgbClr val="D6E9EB"/>
+                        <a:srgbClr val="D1F7FA"/>
                       </a:solidFill>
                       <a:prstDash val="solid"/>
                     </a:lnT>
                     <a:lnB w="9525" cap="flat" cmpd="sng" algn="ctr">
                       <a:solidFill>
-                        <a:srgbClr val="D6E9EB"/>
+                        <a:srgbClr val="D1F7FA"/>
                       </a:solidFill>
                       <a:prstDash val="solid"/>
                     </a:lnB>
                     <a:solidFill>
-                      <a:srgbClr val="D6E9EB"/>
+                      <a:srgbClr val="D1F7FA"/>
                     </a:solidFill>
                   </a:tcPr>
                 </a:tc>
@@ -6840,25 +6840,25 @@
                   <a:tcPr anchor="ctr" marL="73152" marR="73152">
                     <a:lnL w="9525" cap="flat" cmpd="sng" algn="ctr">
                       <a:solidFill>
-                        <a:srgbClr val="D6E9EB"/>
+                        <a:srgbClr val="D1F7FA"/>
                       </a:solidFill>
                       <a:prstDash val="solid"/>
                     </a:lnL>
                     <a:lnR w="9525" cap="flat" cmpd="sng" algn="ctr">
                       <a:solidFill>
-                        <a:srgbClr val="D6E9EB"/>
+                        <a:srgbClr val="D1F7FA"/>
                       </a:solidFill>
                       <a:prstDash val="solid"/>
                     </a:lnR>
                     <a:lnT w="9525" cap="flat" cmpd="sng" algn="ctr">
                       <a:solidFill>
-                        <a:srgbClr val="D6E9EB"/>
+                        <a:srgbClr val="D1F7FA"/>
                       </a:solidFill>
                       <a:prstDash val="solid"/>
                     </a:lnT>
                     <a:lnB w="9525" cap="flat" cmpd="sng" algn="ctr">
                       <a:solidFill>
-                        <a:srgbClr val="D6E9EB"/>
+                        <a:srgbClr val="D1F7FA"/>
                       </a:solidFill>
                       <a:prstDash val="solid"/>
                     </a:lnB>
@@ -6886,25 +6886,25 @@
                   <a:tcPr anchor="ctr" marL="73152" marR="73152">
                     <a:lnL w="9525" cap="flat" cmpd="sng" algn="ctr">
                       <a:solidFill>
-                        <a:srgbClr val="D6E9EB"/>
+                        <a:srgbClr val="D1F7FA"/>
                       </a:solidFill>
                       <a:prstDash val="solid"/>
                     </a:lnL>
                     <a:lnR w="9525" cap="flat" cmpd="sng" algn="ctr">
                       <a:solidFill>
-                        <a:srgbClr val="D6E9EB"/>
+                        <a:srgbClr val="D1F7FA"/>
                       </a:solidFill>
                       <a:prstDash val="solid"/>
                     </a:lnR>
                     <a:lnT w="9525" cap="flat" cmpd="sng" algn="ctr">
                       <a:solidFill>
-                        <a:srgbClr val="D6E9EB"/>
+                        <a:srgbClr val="D1F7FA"/>
                       </a:solidFill>
                       <a:prstDash val="solid"/>
                     </a:lnT>
                     <a:lnB w="9525" cap="flat" cmpd="sng" algn="ctr">
                       <a:solidFill>
-                        <a:srgbClr val="D6E9EB"/>
+                        <a:srgbClr val="D1F7FA"/>
                       </a:solidFill>
                       <a:prstDash val="solid"/>
                     </a:lnB>
@@ -6932,25 +6932,25 @@
                   <a:tcPr anchor="ctr" marL="73152" marR="73152">
                     <a:lnL w="9525" cap="flat" cmpd="sng" algn="ctr">
                       <a:solidFill>
-                        <a:srgbClr val="D6E9EB"/>
+                        <a:srgbClr val="D1F7FA"/>
                       </a:solidFill>
                       <a:prstDash val="solid"/>
                     </a:lnL>
                     <a:lnR w="9525" cap="flat" cmpd="sng" algn="ctr">
                       <a:solidFill>
-                        <a:srgbClr val="D6E9EB"/>
+                        <a:srgbClr val="D1F7FA"/>
                       </a:solidFill>
                       <a:prstDash val="solid"/>
                     </a:lnR>
                     <a:lnT w="9525" cap="flat" cmpd="sng" algn="ctr">
                       <a:solidFill>
-                        <a:srgbClr val="D6E9EB"/>
+                        <a:srgbClr val="D1F7FA"/>
                       </a:solidFill>
                       <a:prstDash val="solid"/>
                     </a:lnT>
                     <a:lnB w="9525" cap="flat" cmpd="sng" algn="ctr">
                       <a:solidFill>
-                        <a:srgbClr val="D6E9EB"/>
+                        <a:srgbClr val="D1F7FA"/>
                       </a:solidFill>
                       <a:prstDash val="solid"/>
                     </a:lnB>
@@ -6970,7 +6970,7 @@
                       <a:r>
                         <a:rPr sz="1400" b="1">
                           <a:solidFill>
-                            <a:srgbClr val="274649"/>
+                            <a:srgbClr val="11595F"/>
                           </a:solidFill>
                         </a:rPr>
                         <a:t>뇌·심장</a:t>
@@ -6980,30 +6980,30 @@
                   <a:tcPr anchor="ctr" marL="73152" marR="73152">
                     <a:lnL w="9525" cap="flat" cmpd="sng" algn="ctr">
                       <a:solidFill>
-                        <a:srgbClr val="D6E9EB"/>
+                        <a:srgbClr val="D1F7FA"/>
                       </a:solidFill>
                       <a:prstDash val="solid"/>
                     </a:lnL>
                     <a:lnR w="9525" cap="flat" cmpd="sng" algn="ctr">
                       <a:solidFill>
-                        <a:srgbClr val="D6E9EB"/>
+                        <a:srgbClr val="D1F7FA"/>
                       </a:solidFill>
                       <a:prstDash val="solid"/>
                     </a:lnR>
                     <a:lnT w="9525" cap="flat" cmpd="sng" algn="ctr">
                       <a:solidFill>
-                        <a:srgbClr val="D6E9EB"/>
+                        <a:srgbClr val="D1F7FA"/>
                       </a:solidFill>
                       <a:prstDash val="solid"/>
                     </a:lnT>
                     <a:lnB w="9525" cap="flat" cmpd="sng" algn="ctr">
                       <a:solidFill>
-                        <a:srgbClr val="D6E9EB"/>
+                        <a:srgbClr val="D1F7FA"/>
                       </a:solidFill>
                       <a:prstDash val="solid"/>
                     </a:lnB>
                     <a:solidFill>
-                      <a:srgbClr val="D6E9EB"/>
+                      <a:srgbClr val="D1F7FA"/>
                     </a:solidFill>
                   </a:tcPr>
                 </a:tc>
@@ -7026,30 +7026,30 @@
                   <a:tcPr anchor="ctr" marL="73152" marR="73152">
                     <a:lnL w="9525" cap="flat" cmpd="sng" algn="ctr">
                       <a:solidFill>
-                        <a:srgbClr val="D6E9EB"/>
+                        <a:srgbClr val="D1F7FA"/>
                       </a:solidFill>
                       <a:prstDash val="solid"/>
                     </a:lnL>
                     <a:lnR w="9525" cap="flat" cmpd="sng" algn="ctr">
                       <a:solidFill>
-                        <a:srgbClr val="D6E9EB"/>
+                        <a:srgbClr val="D1F7FA"/>
                       </a:solidFill>
                       <a:prstDash val="solid"/>
                     </a:lnR>
                     <a:lnT w="9525" cap="flat" cmpd="sng" algn="ctr">
                       <a:solidFill>
-                        <a:srgbClr val="D6E9EB"/>
+                        <a:srgbClr val="D1F7FA"/>
                       </a:solidFill>
                       <a:prstDash val="solid"/>
                     </a:lnT>
                     <a:lnB w="9525" cap="flat" cmpd="sng" algn="ctr">
                       <a:solidFill>
-                        <a:srgbClr val="D6E9EB"/>
+                        <a:srgbClr val="D1F7FA"/>
                       </a:solidFill>
                       <a:prstDash val="solid"/>
                     </a:lnB>
                     <a:solidFill>
-                      <a:srgbClr val="F2F7F8"/>
+                      <a:srgbClr val="EEFBFC"/>
                     </a:solidFill>
                   </a:tcPr>
                 </a:tc>
@@ -7072,30 +7072,30 @@
                   <a:tcPr anchor="ctr" marL="73152" marR="73152">
                     <a:lnL w="9525" cap="flat" cmpd="sng" algn="ctr">
                       <a:solidFill>
-                        <a:srgbClr val="D6E9EB"/>
+                        <a:srgbClr val="D1F7FA"/>
                       </a:solidFill>
                       <a:prstDash val="solid"/>
                     </a:lnL>
                     <a:lnR w="9525" cap="flat" cmpd="sng" algn="ctr">
                       <a:solidFill>
-                        <a:srgbClr val="D6E9EB"/>
+                        <a:srgbClr val="D1F7FA"/>
                       </a:solidFill>
                       <a:prstDash val="solid"/>
                     </a:lnR>
                     <a:lnT w="9525" cap="flat" cmpd="sng" algn="ctr">
                       <a:solidFill>
-                        <a:srgbClr val="D6E9EB"/>
+                        <a:srgbClr val="D1F7FA"/>
                       </a:solidFill>
                       <a:prstDash val="solid"/>
                     </a:lnT>
                     <a:lnB w="9525" cap="flat" cmpd="sng" algn="ctr">
                       <a:solidFill>
-                        <a:srgbClr val="D6E9EB"/>
+                        <a:srgbClr val="D1F7FA"/>
                       </a:solidFill>
                       <a:prstDash val="solid"/>
                     </a:lnB>
                     <a:solidFill>
-                      <a:srgbClr val="F2F7F8"/>
+                      <a:srgbClr val="EEFBFC"/>
                     </a:solidFill>
                   </a:tcPr>
                 </a:tc>
@@ -7118,30 +7118,30 @@
                   <a:tcPr anchor="ctr" marL="73152" marR="73152">
                     <a:lnL w="9525" cap="flat" cmpd="sng" algn="ctr">
                       <a:solidFill>
-                        <a:srgbClr val="D6E9EB"/>
+                        <a:srgbClr val="D1F7FA"/>
                       </a:solidFill>
                       <a:prstDash val="solid"/>
                     </a:lnL>
                     <a:lnR w="9525" cap="flat" cmpd="sng" algn="ctr">
                       <a:solidFill>
-                        <a:srgbClr val="D6E9EB"/>
+                        <a:srgbClr val="D1F7FA"/>
                       </a:solidFill>
                       <a:prstDash val="solid"/>
                     </a:lnR>
                     <a:lnT w="9525" cap="flat" cmpd="sng" algn="ctr">
                       <a:solidFill>
-                        <a:srgbClr val="D6E9EB"/>
+                        <a:srgbClr val="D1F7FA"/>
                       </a:solidFill>
                       <a:prstDash val="solid"/>
                     </a:lnT>
                     <a:lnB w="9525" cap="flat" cmpd="sng" algn="ctr">
                       <a:solidFill>
-                        <a:srgbClr val="D6E9EB"/>
+                        <a:srgbClr val="D1F7FA"/>
                       </a:solidFill>
                       <a:prstDash val="solid"/>
                     </a:lnB>
                     <a:solidFill>
-                      <a:srgbClr val="F2F7F8"/>
+                      <a:srgbClr val="EEFBFC"/>
                     </a:solidFill>
                   </a:tcPr>
                 </a:tc>
@@ -7156,7 +7156,7 @@
                       <a:r>
                         <a:rPr sz="1400" b="1">
                           <a:solidFill>
-                            <a:srgbClr val="274649"/>
+                            <a:srgbClr val="11595F"/>
                           </a:solidFill>
                         </a:rPr>
                         <a:t>입원·수술</a:t>
@@ -7166,30 +7166,30 @@
                   <a:tcPr anchor="ctr" marL="73152" marR="73152">
                     <a:lnL w="9525" cap="flat" cmpd="sng" algn="ctr">
                       <a:solidFill>
-                        <a:srgbClr val="D6E9EB"/>
+                        <a:srgbClr val="D1F7FA"/>
                       </a:solidFill>
                       <a:prstDash val="solid"/>
                     </a:lnL>
                     <a:lnR w="9525" cap="flat" cmpd="sng" algn="ctr">
                       <a:solidFill>
-                        <a:srgbClr val="D6E9EB"/>
+                        <a:srgbClr val="D1F7FA"/>
                       </a:solidFill>
                       <a:prstDash val="solid"/>
                     </a:lnR>
                     <a:lnT w="9525" cap="flat" cmpd="sng" algn="ctr">
                       <a:solidFill>
-                        <a:srgbClr val="D6E9EB"/>
+                        <a:srgbClr val="D1F7FA"/>
                       </a:solidFill>
                       <a:prstDash val="solid"/>
                     </a:lnT>
                     <a:lnB w="9525" cap="flat" cmpd="sng" algn="ctr">
                       <a:solidFill>
-                        <a:srgbClr val="D6E9EB"/>
+                        <a:srgbClr val="D1F7FA"/>
                       </a:solidFill>
                       <a:prstDash val="solid"/>
                     </a:lnB>
                     <a:solidFill>
-                      <a:srgbClr val="D6E9EB"/>
+                      <a:srgbClr val="D1F7FA"/>
                     </a:solidFill>
                   </a:tcPr>
                 </a:tc>
@@ -7212,25 +7212,25 @@
                   <a:tcPr anchor="ctr" marL="73152" marR="73152">
                     <a:lnL w="9525" cap="flat" cmpd="sng" algn="ctr">
                       <a:solidFill>
-                        <a:srgbClr val="D6E9EB"/>
+                        <a:srgbClr val="D1F7FA"/>
                       </a:solidFill>
                       <a:prstDash val="solid"/>
                     </a:lnL>
                     <a:lnR w="9525" cap="flat" cmpd="sng" algn="ctr">
                       <a:solidFill>
-                        <a:srgbClr val="D6E9EB"/>
+                        <a:srgbClr val="D1F7FA"/>
                       </a:solidFill>
                       <a:prstDash val="solid"/>
                     </a:lnR>
                     <a:lnT w="9525" cap="flat" cmpd="sng" algn="ctr">
                       <a:solidFill>
-                        <a:srgbClr val="D6E9EB"/>
+                        <a:srgbClr val="D1F7FA"/>
                       </a:solidFill>
                       <a:prstDash val="solid"/>
                     </a:lnT>
                     <a:lnB w="9525" cap="flat" cmpd="sng" algn="ctr">
                       <a:solidFill>
-                        <a:srgbClr val="D6E9EB"/>
+                        <a:srgbClr val="D1F7FA"/>
                       </a:solidFill>
                       <a:prstDash val="solid"/>
                     </a:lnB>
@@ -7258,25 +7258,25 @@
                   <a:tcPr anchor="ctr" marL="73152" marR="73152">
                     <a:lnL w="9525" cap="flat" cmpd="sng" algn="ctr">
                       <a:solidFill>
-                        <a:srgbClr val="D6E9EB"/>
+                        <a:srgbClr val="D1F7FA"/>
                       </a:solidFill>
                       <a:prstDash val="solid"/>
                     </a:lnL>
                     <a:lnR w="9525" cap="flat" cmpd="sng" algn="ctr">
                       <a:solidFill>
-                        <a:srgbClr val="D6E9EB"/>
+                        <a:srgbClr val="D1F7FA"/>
                       </a:solidFill>
                       <a:prstDash val="solid"/>
                     </a:lnR>
                     <a:lnT w="9525" cap="flat" cmpd="sng" algn="ctr">
                       <a:solidFill>
-                        <a:srgbClr val="D6E9EB"/>
+                        <a:srgbClr val="D1F7FA"/>
                       </a:solidFill>
                       <a:prstDash val="solid"/>
                     </a:lnT>
                     <a:lnB w="9525" cap="flat" cmpd="sng" algn="ctr">
                       <a:solidFill>
-                        <a:srgbClr val="D6E9EB"/>
+                        <a:srgbClr val="D1F7FA"/>
                       </a:solidFill>
                       <a:prstDash val="solid"/>
                     </a:lnB>
@@ -7304,25 +7304,25 @@
                   <a:tcPr anchor="ctr" marL="73152" marR="73152">
                     <a:lnL w="9525" cap="flat" cmpd="sng" algn="ctr">
                       <a:solidFill>
-                        <a:srgbClr val="D6E9EB"/>
+                        <a:srgbClr val="D1F7FA"/>
                       </a:solidFill>
                       <a:prstDash val="solid"/>
                     </a:lnL>
                     <a:lnR w="9525" cap="flat" cmpd="sng" algn="ctr">
                       <a:solidFill>
-                        <a:srgbClr val="D6E9EB"/>
+                        <a:srgbClr val="D1F7FA"/>
                       </a:solidFill>
                       <a:prstDash val="solid"/>
                     </a:lnR>
                     <a:lnT w="9525" cap="flat" cmpd="sng" algn="ctr">
                       <a:solidFill>
-                        <a:srgbClr val="D6E9EB"/>
+                        <a:srgbClr val="D1F7FA"/>
                       </a:solidFill>
                       <a:prstDash val="solid"/>
                     </a:lnT>
                     <a:lnB w="9525" cap="flat" cmpd="sng" algn="ctr">
                       <a:solidFill>
-                        <a:srgbClr val="D6E9EB"/>
+                        <a:srgbClr val="D1F7FA"/>
                       </a:solidFill>
                       <a:prstDash val="solid"/>
                     </a:lnB>
@@ -7342,7 +7342,7 @@
                       <a:r>
                         <a:rPr sz="1400" b="1">
                           <a:solidFill>
-                            <a:srgbClr val="274649"/>
+                            <a:srgbClr val="11595F"/>
                           </a:solidFill>
                         </a:rPr>
                         <a:t>상해</a:t>
@@ -7352,30 +7352,30 @@
                   <a:tcPr anchor="ctr" marL="73152" marR="73152">
                     <a:lnL w="9525" cap="flat" cmpd="sng" algn="ctr">
                       <a:solidFill>
-                        <a:srgbClr val="D6E9EB"/>
+                        <a:srgbClr val="D1F7FA"/>
                       </a:solidFill>
                       <a:prstDash val="solid"/>
                     </a:lnL>
                     <a:lnR w="9525" cap="flat" cmpd="sng" algn="ctr">
                       <a:solidFill>
-                        <a:srgbClr val="D6E9EB"/>
+                        <a:srgbClr val="D1F7FA"/>
                       </a:solidFill>
                       <a:prstDash val="solid"/>
                     </a:lnR>
                     <a:lnT w="9525" cap="flat" cmpd="sng" algn="ctr">
                       <a:solidFill>
-                        <a:srgbClr val="D6E9EB"/>
+                        <a:srgbClr val="D1F7FA"/>
                       </a:solidFill>
                       <a:prstDash val="solid"/>
                     </a:lnT>
                     <a:lnB w="9525" cap="flat" cmpd="sng" algn="ctr">
                       <a:solidFill>
-                        <a:srgbClr val="D6E9EB"/>
+                        <a:srgbClr val="D1F7FA"/>
                       </a:solidFill>
                       <a:prstDash val="solid"/>
                     </a:lnB>
                     <a:solidFill>
-                      <a:srgbClr val="D6E9EB"/>
+                      <a:srgbClr val="D1F7FA"/>
                     </a:solidFill>
                   </a:tcPr>
                 </a:tc>
@@ -7398,30 +7398,30 @@
                   <a:tcPr anchor="ctr" marL="73152" marR="73152">
                     <a:lnL w="9525" cap="flat" cmpd="sng" algn="ctr">
                       <a:solidFill>
-                        <a:srgbClr val="D6E9EB"/>
+                        <a:srgbClr val="D1F7FA"/>
                       </a:solidFill>
                       <a:prstDash val="solid"/>
                     </a:lnL>
                     <a:lnR w="9525" cap="flat" cmpd="sng" algn="ctr">
                       <a:solidFill>
-                        <a:srgbClr val="D6E9EB"/>
+                        <a:srgbClr val="D1F7FA"/>
                       </a:solidFill>
                       <a:prstDash val="solid"/>
                     </a:lnR>
                     <a:lnT w="9525" cap="flat" cmpd="sng" algn="ctr">
                       <a:solidFill>
-                        <a:srgbClr val="D6E9EB"/>
+                        <a:srgbClr val="D1F7FA"/>
                       </a:solidFill>
                       <a:prstDash val="solid"/>
                     </a:lnT>
                     <a:lnB w="9525" cap="flat" cmpd="sng" algn="ctr">
                       <a:solidFill>
-                        <a:srgbClr val="D6E9EB"/>
+                        <a:srgbClr val="D1F7FA"/>
                       </a:solidFill>
                       <a:prstDash val="solid"/>
                     </a:lnB>
                     <a:solidFill>
-                      <a:srgbClr val="F2F7F8"/>
+                      <a:srgbClr val="EEFBFC"/>
                     </a:solidFill>
                   </a:tcPr>
                 </a:tc>
@@ -7444,30 +7444,30 @@
                   <a:tcPr anchor="ctr" marL="73152" marR="73152">
                     <a:lnL w="9525" cap="flat" cmpd="sng" algn="ctr">
                       <a:solidFill>
-                        <a:srgbClr val="D6E9EB"/>
+                        <a:srgbClr val="D1F7FA"/>
                       </a:solidFill>
                       <a:prstDash val="solid"/>
                     </a:lnL>
                     <a:lnR w="9525" cap="flat" cmpd="sng" algn="ctr">
                       <a:solidFill>
-                        <a:srgbClr val="D6E9EB"/>
+                        <a:srgbClr val="D1F7FA"/>
                       </a:solidFill>
                       <a:prstDash val="solid"/>
                     </a:lnR>
                     <a:lnT w="9525" cap="flat" cmpd="sng" algn="ctr">
                       <a:solidFill>
-                        <a:srgbClr val="D6E9EB"/>
+                        <a:srgbClr val="D1F7FA"/>
                       </a:solidFill>
                       <a:prstDash val="solid"/>
                     </a:lnT>
                     <a:lnB w="9525" cap="flat" cmpd="sng" algn="ctr">
                       <a:solidFill>
-                        <a:srgbClr val="D6E9EB"/>
+                        <a:srgbClr val="D1F7FA"/>
                       </a:solidFill>
                       <a:prstDash val="solid"/>
                     </a:lnB>
                     <a:solidFill>
-                      <a:srgbClr val="F2F7F8"/>
+                      <a:srgbClr val="EEFBFC"/>
                     </a:solidFill>
                   </a:tcPr>
                 </a:tc>
@@ -7490,30 +7490,30 @@
                   <a:tcPr anchor="ctr" marL="73152" marR="73152">
                     <a:lnL w="9525" cap="flat" cmpd="sng" algn="ctr">
                       <a:solidFill>
-                        <a:srgbClr val="D6E9EB"/>
+                        <a:srgbClr val="D1F7FA"/>
                       </a:solidFill>
                       <a:prstDash val="solid"/>
                     </a:lnL>
                     <a:lnR w="9525" cap="flat" cmpd="sng" algn="ctr">
                       <a:solidFill>
-                        <a:srgbClr val="D6E9EB"/>
+                        <a:srgbClr val="D1F7FA"/>
                       </a:solidFill>
                       <a:prstDash val="solid"/>
                     </a:lnR>
                     <a:lnT w="9525" cap="flat" cmpd="sng" algn="ctr">
                       <a:solidFill>
-                        <a:srgbClr val="D6E9EB"/>
+                        <a:srgbClr val="D1F7FA"/>
                       </a:solidFill>
                       <a:prstDash val="solid"/>
                     </a:lnT>
                     <a:lnB w="9525" cap="flat" cmpd="sng" algn="ctr">
                       <a:solidFill>
-                        <a:srgbClr val="D6E9EB"/>
+                        <a:srgbClr val="D1F7FA"/>
                       </a:solidFill>
                       <a:prstDash val="solid"/>
                     </a:lnB>
                     <a:solidFill>
-                      <a:srgbClr val="F2F7F8"/>
+                      <a:srgbClr val="EEFBFC"/>
                     </a:solidFill>
                   </a:tcPr>
                 </a:tc>
@@ -7528,7 +7528,7 @@
                       <a:r>
                         <a:rPr sz="1400" b="1">
                           <a:solidFill>
-                            <a:srgbClr val="274649"/>
+                            <a:srgbClr val="11595F"/>
                           </a:solidFill>
                         </a:rPr>
                         <a:t>실손의료</a:t>
@@ -7538,30 +7538,30 @@
                   <a:tcPr anchor="ctr" marL="73152" marR="73152">
                     <a:lnL w="9525" cap="flat" cmpd="sng" algn="ctr">
                       <a:solidFill>
-                        <a:srgbClr val="D6E9EB"/>
+                        <a:srgbClr val="D1F7FA"/>
                       </a:solidFill>
                       <a:prstDash val="solid"/>
                     </a:lnL>
                     <a:lnR w="9525" cap="flat" cmpd="sng" algn="ctr">
                       <a:solidFill>
-                        <a:srgbClr val="D6E9EB"/>
+                        <a:srgbClr val="D1F7FA"/>
                       </a:solidFill>
                       <a:prstDash val="solid"/>
                     </a:lnR>
                     <a:lnT w="9525" cap="flat" cmpd="sng" algn="ctr">
                       <a:solidFill>
-                        <a:srgbClr val="D6E9EB"/>
+                        <a:srgbClr val="D1F7FA"/>
                       </a:solidFill>
                       <a:prstDash val="solid"/>
                     </a:lnT>
                     <a:lnB w="9525" cap="flat" cmpd="sng" algn="ctr">
                       <a:solidFill>
-                        <a:srgbClr val="D6E9EB"/>
+                        <a:srgbClr val="D1F7FA"/>
                       </a:solidFill>
                       <a:prstDash val="solid"/>
                     </a:lnB>
                     <a:solidFill>
-                      <a:srgbClr val="D6E9EB"/>
+                      <a:srgbClr val="D1F7FA"/>
                     </a:solidFill>
                   </a:tcPr>
                 </a:tc>
@@ -7584,25 +7584,25 @@
                   <a:tcPr anchor="ctr" marL="73152" marR="73152">
                     <a:lnL w="9525" cap="flat" cmpd="sng" algn="ctr">
                       <a:solidFill>
-                        <a:srgbClr val="D6E9EB"/>
+                        <a:srgbClr val="D1F7FA"/>
                       </a:solidFill>
                       <a:prstDash val="solid"/>
                     </a:lnL>
                     <a:lnR w="9525" cap="flat" cmpd="sng" algn="ctr">
                       <a:solidFill>
-                        <a:srgbClr val="D6E9EB"/>
+                        <a:srgbClr val="D1F7FA"/>
                       </a:solidFill>
                       <a:prstDash val="solid"/>
                     </a:lnR>
                     <a:lnT w="9525" cap="flat" cmpd="sng" algn="ctr">
                       <a:solidFill>
-                        <a:srgbClr val="D6E9EB"/>
+                        <a:srgbClr val="D1F7FA"/>
                       </a:solidFill>
                       <a:prstDash val="solid"/>
                     </a:lnT>
                     <a:lnB w="9525" cap="flat" cmpd="sng" algn="ctr">
                       <a:solidFill>
-                        <a:srgbClr val="D6E9EB"/>
+                        <a:srgbClr val="D1F7FA"/>
                       </a:solidFill>
                       <a:prstDash val="solid"/>
                     </a:lnB>
@@ -7630,25 +7630,25 @@
                   <a:tcPr anchor="ctr" marL="73152" marR="73152">
                     <a:lnL w="9525" cap="flat" cmpd="sng" algn="ctr">
                       <a:solidFill>
-                        <a:srgbClr val="D6E9EB"/>
+                        <a:srgbClr val="D1F7FA"/>
                       </a:solidFill>
                       <a:prstDash val="solid"/>
                     </a:lnL>
                     <a:lnR w="9525" cap="flat" cmpd="sng" algn="ctr">
                       <a:solidFill>
-                        <a:srgbClr val="D6E9EB"/>
+                        <a:srgbClr val="D1F7FA"/>
                       </a:solidFill>
                       <a:prstDash val="solid"/>
                     </a:lnR>
                     <a:lnT w="9525" cap="flat" cmpd="sng" algn="ctr">
                       <a:solidFill>
-                        <a:srgbClr val="D6E9EB"/>
+                        <a:srgbClr val="D1F7FA"/>
                       </a:solidFill>
                       <a:prstDash val="solid"/>
                     </a:lnT>
                     <a:lnB w="9525" cap="flat" cmpd="sng" algn="ctr">
                       <a:solidFill>
-                        <a:srgbClr val="D6E9EB"/>
+                        <a:srgbClr val="D1F7FA"/>
                       </a:solidFill>
                       <a:prstDash val="solid"/>
                     </a:lnB>
@@ -7676,25 +7676,25 @@
                   <a:tcPr anchor="ctr" marL="73152" marR="73152">
                     <a:lnL w="9525" cap="flat" cmpd="sng" algn="ctr">
                       <a:solidFill>
-                        <a:srgbClr val="D6E9EB"/>
+                        <a:srgbClr val="D1F7FA"/>
                       </a:solidFill>
                       <a:prstDash val="solid"/>
                     </a:lnL>
                     <a:lnR w="9525" cap="flat" cmpd="sng" algn="ctr">
                       <a:solidFill>
-                        <a:srgbClr val="D6E9EB"/>
+                        <a:srgbClr val="D1F7FA"/>
                       </a:solidFill>
                       <a:prstDash val="solid"/>
                     </a:lnR>
                     <a:lnT w="9525" cap="flat" cmpd="sng" algn="ctr">
                       <a:solidFill>
-                        <a:srgbClr val="D6E9EB"/>
+                        <a:srgbClr val="D1F7FA"/>
                       </a:solidFill>
                       <a:prstDash val="solid"/>
                     </a:lnT>
                     <a:lnB w="9525" cap="flat" cmpd="sng" algn="ctr">
                       <a:solidFill>
-                        <a:srgbClr val="D6E9EB"/>
+                        <a:srgbClr val="D1F7FA"/>
                       </a:solidFill>
                       <a:prstDash val="solid"/>
                     </a:lnB>
@@ -7714,7 +7714,7 @@
                       <a:r>
                         <a:rPr sz="1400" b="1">
                           <a:solidFill>
-                            <a:srgbClr val="274649"/>
+                            <a:srgbClr val="11595F"/>
                           </a:solidFill>
                         </a:rPr>
                         <a:t>연금·노후자금</a:t>
@@ -7724,30 +7724,30 @@
                   <a:tcPr anchor="ctr" marL="73152" marR="73152">
                     <a:lnL w="9525" cap="flat" cmpd="sng" algn="ctr">
                       <a:solidFill>
-                        <a:srgbClr val="D6E9EB"/>
+                        <a:srgbClr val="D1F7FA"/>
                       </a:solidFill>
                       <a:prstDash val="solid"/>
                     </a:lnL>
                     <a:lnR w="9525" cap="flat" cmpd="sng" algn="ctr">
                       <a:solidFill>
-                        <a:srgbClr val="D6E9EB"/>
+                        <a:srgbClr val="D1F7FA"/>
                       </a:solidFill>
                       <a:prstDash val="solid"/>
                     </a:lnR>
                     <a:lnT w="9525" cap="flat" cmpd="sng" algn="ctr">
                       <a:solidFill>
-                        <a:srgbClr val="D6E9EB"/>
+                        <a:srgbClr val="D1F7FA"/>
                       </a:solidFill>
                       <a:prstDash val="solid"/>
                     </a:lnT>
                     <a:lnB w="9525" cap="flat" cmpd="sng" algn="ctr">
                       <a:solidFill>
-                        <a:srgbClr val="D6E9EB"/>
+                        <a:srgbClr val="D1F7FA"/>
                       </a:solidFill>
                       <a:prstDash val="solid"/>
                     </a:lnB>
                     <a:solidFill>
-                      <a:srgbClr val="D6E9EB"/>
+                      <a:srgbClr val="D1F7FA"/>
                     </a:solidFill>
                   </a:tcPr>
                 </a:tc>
@@ -7770,30 +7770,30 @@
                   <a:tcPr anchor="ctr" marL="73152" marR="73152">
                     <a:lnL w="9525" cap="flat" cmpd="sng" algn="ctr">
                       <a:solidFill>
-                        <a:srgbClr val="D6E9EB"/>
+                        <a:srgbClr val="D1F7FA"/>
                       </a:solidFill>
                       <a:prstDash val="solid"/>
                     </a:lnL>
                     <a:lnR w="9525" cap="flat" cmpd="sng" algn="ctr">
                       <a:solidFill>
-                        <a:srgbClr val="D6E9EB"/>
+                        <a:srgbClr val="D1F7FA"/>
                       </a:solidFill>
                       <a:prstDash val="solid"/>
                     </a:lnR>
                     <a:lnT w="9525" cap="flat" cmpd="sng" algn="ctr">
                       <a:solidFill>
-                        <a:srgbClr val="D6E9EB"/>
+                        <a:srgbClr val="D1F7FA"/>
                       </a:solidFill>
                       <a:prstDash val="solid"/>
                     </a:lnT>
                     <a:lnB w="9525" cap="flat" cmpd="sng" algn="ctr">
                       <a:solidFill>
-                        <a:srgbClr val="D6E9EB"/>
+                        <a:srgbClr val="D1F7FA"/>
                       </a:solidFill>
                       <a:prstDash val="solid"/>
                     </a:lnB>
                     <a:solidFill>
-                      <a:srgbClr val="F2F7F8"/>
+                      <a:srgbClr val="EEFBFC"/>
                     </a:solidFill>
                   </a:tcPr>
                 </a:tc>
@@ -7816,30 +7816,30 @@
                   <a:tcPr anchor="ctr" marL="73152" marR="73152">
                     <a:lnL w="9525" cap="flat" cmpd="sng" algn="ctr">
                       <a:solidFill>
-                        <a:srgbClr val="D6E9EB"/>
+                        <a:srgbClr val="D1F7FA"/>
                       </a:solidFill>
                       <a:prstDash val="solid"/>
                     </a:lnL>
                     <a:lnR w="9525" cap="flat" cmpd="sng" algn="ctr">
                       <a:solidFill>
-                        <a:srgbClr val="D6E9EB"/>
+                        <a:srgbClr val="D1F7FA"/>
                       </a:solidFill>
                       <a:prstDash val="solid"/>
                     </a:lnR>
                     <a:lnT w="9525" cap="flat" cmpd="sng" algn="ctr">
                       <a:solidFill>
-                        <a:srgbClr val="D6E9EB"/>
+                        <a:srgbClr val="D1F7FA"/>
                       </a:solidFill>
                       <a:prstDash val="solid"/>
                     </a:lnT>
                     <a:lnB w="9525" cap="flat" cmpd="sng" algn="ctr">
                       <a:solidFill>
-                        <a:srgbClr val="D6E9EB"/>
+                        <a:srgbClr val="D1F7FA"/>
                       </a:solidFill>
                       <a:prstDash val="solid"/>
                     </a:lnB>
                     <a:solidFill>
-                      <a:srgbClr val="F2F7F8"/>
+                      <a:srgbClr val="EEFBFC"/>
                     </a:solidFill>
                   </a:tcPr>
                 </a:tc>
@@ -7862,30 +7862,30 @@
                   <a:tcPr anchor="ctr" marL="73152" marR="73152">
                     <a:lnL w="9525" cap="flat" cmpd="sng" algn="ctr">
                       <a:solidFill>
-                        <a:srgbClr val="D6E9EB"/>
+                        <a:srgbClr val="D1F7FA"/>
                       </a:solidFill>
                       <a:prstDash val="solid"/>
                     </a:lnL>
                     <a:lnR w="9525" cap="flat" cmpd="sng" algn="ctr">
                       <a:solidFill>
-                        <a:srgbClr val="D6E9EB"/>
+                        <a:srgbClr val="D1F7FA"/>
                       </a:solidFill>
                       <a:prstDash val="solid"/>
                     </a:lnR>
                     <a:lnT w="9525" cap="flat" cmpd="sng" algn="ctr">
                       <a:solidFill>
-                        <a:srgbClr val="D6E9EB"/>
+                        <a:srgbClr val="D1F7FA"/>
                       </a:solidFill>
                       <a:prstDash val="solid"/>
                     </a:lnT>
                     <a:lnB w="9525" cap="flat" cmpd="sng" algn="ctr">
                       <a:solidFill>
-                        <a:srgbClr val="D6E9EB"/>
+                        <a:srgbClr val="D1F7FA"/>
                       </a:solidFill>
                       <a:prstDash val="solid"/>
                     </a:lnB>
                     <a:solidFill>
-                      <a:srgbClr val="F2F7F8"/>
+                      <a:srgbClr val="EEFBFC"/>
                     </a:solidFill>
                   </a:tcPr>
                 </a:tc>
@@ -7908,7 +7908,7 @@
     <p:bg>
       <p:bgPr>
         <a:solidFill>
-          <a:srgbClr val="F2F7F8"/>
+          <a:srgbClr val="EEFBFC"/>
         </a:solidFill>
         <a:effectLst/>
       </p:bgPr>
@@ -7937,7 +7937,7 @@
           <a:noFill/>
           <a:ln w="28575">
             <a:solidFill>
-              <a:srgbClr val="4B868B"/>
+              <a:srgbClr val="26B8C5"/>
             </a:solidFill>
           </a:ln>
         </p:spPr>
@@ -7966,7 +7966,7 @@
           <a:noFill/>
           <a:ln w="9525">
             <a:solidFill>
-              <a:srgbClr val="D6E9EB"/>
+              <a:srgbClr val="D1F7FA"/>
             </a:solidFill>
           </a:ln>
         </p:spPr>
@@ -8008,7 +8008,7 @@
             <a:r>
               <a:rPr sz="3000" b="1" i="0">
                 <a:solidFill>
-                  <a:srgbClr val="274649"/>
+                  <a:srgbClr val="11595F"/>
                 </a:solidFill>
               </a:rPr>
               <a:t>월 보험료 한눈에</a:t>
@@ -8033,11 +8033,11 @@
             </a:avLst>
           </a:prstGeom>
           <a:solidFill>
-            <a:srgbClr val="F2F7F8"/>
+            <a:srgbClr val="EEFBFC"/>
           </a:solidFill>
           <a:ln w="15875">
             <a:solidFill>
-              <a:srgbClr val="D6E9EB"/>
+              <a:srgbClr val="D1F7FA"/>
             </a:solidFill>
           </a:ln>
         </p:spPr>
@@ -8064,7 +8064,7 @@
             <a:avLst/>
           </a:prstGeom>
           <a:solidFill>
-            <a:srgbClr val="4B868B"/>
+            <a:srgbClr val="26B8C5"/>
           </a:solidFill>
           <a:ln>
             <a:noFill/>
@@ -8122,7 +8122,7 @@
             <a:r>
               <a:rPr sz="1700" b="1" i="0">
                 <a:solidFill>
-                  <a:srgbClr val="274649"/>
+                  <a:srgbClr val="11595F"/>
                 </a:solidFill>
               </a:rPr>
               <a:t>월 보험료 합계</a:t>
@@ -8185,11 +8185,11 @@
             </a:avLst>
           </a:prstGeom>
           <a:solidFill>
-            <a:srgbClr val="F2F7F8"/>
+            <a:srgbClr val="EEFBFC"/>
           </a:solidFill>
           <a:ln w="15875">
             <a:solidFill>
-              <a:srgbClr val="D6E9EB"/>
+              <a:srgbClr val="D1F7FA"/>
             </a:solidFill>
           </a:ln>
         </p:spPr>
@@ -8216,7 +8216,7 @@
             <a:avLst/>
           </a:prstGeom>
           <a:solidFill>
-            <a:srgbClr val="4B868B"/>
+            <a:srgbClr val="26B8C5"/>
           </a:solidFill>
           <a:ln>
             <a:noFill/>
@@ -8274,7 +8274,7 @@
             <a:r>
               <a:rPr sz="1700" b="1" i="0">
                 <a:solidFill>
-                  <a:srgbClr val="274649"/>
+                  <a:srgbClr val="11595F"/>
                 </a:solidFill>
               </a:rPr>
               <a:t>연 보험료 합계</a:t>
@@ -8337,11 +8337,11 @@
             </a:avLst>
           </a:prstGeom>
           <a:solidFill>
-            <a:srgbClr val="F2F7F8"/>
+            <a:srgbClr val="EEFBFC"/>
           </a:solidFill>
           <a:ln w="15875">
             <a:solidFill>
-              <a:srgbClr val="D6E9EB"/>
+              <a:srgbClr val="D1F7FA"/>
             </a:solidFill>
           </a:ln>
         </p:spPr>
@@ -8368,7 +8368,7 @@
             <a:avLst/>
           </a:prstGeom>
           <a:solidFill>
-            <a:srgbClr val="4B868B"/>
+            <a:srgbClr val="26B8C5"/>
           </a:solidFill>
           <a:ln>
             <a:noFill/>
@@ -8426,7 +8426,7 @@
             <a:r>
               <a:rPr sz="1700" b="1" i="0">
                 <a:solidFill>
-                  <a:srgbClr val="274649"/>
+                  <a:srgbClr val="11595F"/>
                 </a:solidFill>
               </a:rPr>
               <a:t>월 소득 대비</a:t>
@@ -8524,7 +8524,7 @@
     <p:bg>
       <p:bgPr>
         <a:solidFill>
-          <a:srgbClr val="F2F7F8"/>
+          <a:srgbClr val="EEFBFC"/>
         </a:solidFill>
         <a:effectLst/>
       </p:bgPr>
@@ -8553,7 +8553,7 @@
           <a:noFill/>
           <a:ln w="28575">
             <a:solidFill>
-              <a:srgbClr val="4B868B"/>
+              <a:srgbClr val="26B8C5"/>
             </a:solidFill>
           </a:ln>
         </p:spPr>
@@ -8582,7 +8582,7 @@
           <a:noFill/>
           <a:ln w="9525">
             <a:solidFill>
-              <a:srgbClr val="D6E9EB"/>
+              <a:srgbClr val="D1F7FA"/>
             </a:solidFill>
           </a:ln>
         </p:spPr>
@@ -8624,7 +8624,7 @@
             <a:r>
               <a:rPr sz="3000" b="1" i="0">
                 <a:solidFill>
-                  <a:srgbClr val="274649"/>
+                  <a:srgbClr val="11595F"/>
                 </a:solidFill>
               </a:rPr>
               <a:t>점검 메모와 다음 할 일</a:t>
@@ -8649,11 +8649,11 @@
             </a:avLst>
           </a:prstGeom>
           <a:solidFill>
-            <a:srgbClr val="F2F7F8"/>
+            <a:srgbClr val="EEFBFC"/>
           </a:solidFill>
           <a:ln w="15875">
             <a:solidFill>
-              <a:srgbClr val="D6E9EB"/>
+              <a:srgbClr val="D1F7FA"/>
             </a:solidFill>
           </a:ln>
         </p:spPr>
@@ -8680,7 +8680,7 @@
             <a:avLst/>
           </a:prstGeom>
           <a:solidFill>
-            <a:srgbClr val="4B868B"/>
+            <a:srgbClr val="26B8C5"/>
           </a:solidFill>
           <a:ln>
             <a:noFill/>
@@ -8738,7 +8738,7 @@
             <a:r>
               <a:rPr sz="1800" b="1" i="0">
                 <a:solidFill>
-                  <a:srgbClr val="274649"/>
+                  <a:srgbClr val="11595F"/>
                 </a:solidFill>
               </a:rPr>
               <a:t>확인할 것</a:t>
@@ -8801,11 +8801,11 @@
             </a:avLst>
           </a:prstGeom>
           <a:solidFill>
-            <a:srgbClr val="F2F7F8"/>
+            <a:srgbClr val="EEFBFC"/>
           </a:solidFill>
           <a:ln w="15875">
             <a:solidFill>
-              <a:srgbClr val="D6E9EB"/>
+              <a:srgbClr val="D1F7FA"/>
             </a:solidFill>
           </a:ln>
         </p:spPr>
@@ -8832,7 +8832,7 @@
             <a:avLst/>
           </a:prstGeom>
           <a:solidFill>
-            <a:srgbClr val="4B868B"/>
+            <a:srgbClr val="26B8C5"/>
           </a:solidFill>
           <a:ln>
             <a:noFill/>
@@ -8890,7 +8890,7 @@
             <a:r>
               <a:rPr sz="1800" b="1" i="0">
                 <a:solidFill>
-                  <a:srgbClr val="274649"/>
+                  <a:srgbClr val="11595F"/>
                 </a:solidFill>
               </a:rPr>
               <a:t>문의할 것</a:t>
@@ -8953,11 +8953,11 @@
             </a:avLst>
           </a:prstGeom>
           <a:solidFill>
-            <a:srgbClr val="F2F7F8"/>
+            <a:srgbClr val="EEFBFC"/>
           </a:solidFill>
           <a:ln w="15875">
             <a:solidFill>
-              <a:srgbClr val="D6E9EB"/>
+              <a:srgbClr val="D1F7FA"/>
             </a:solidFill>
           </a:ln>
         </p:spPr>
@@ -8984,7 +8984,7 @@
             <a:avLst/>
           </a:prstGeom>
           <a:solidFill>
-            <a:srgbClr val="4B868B"/>
+            <a:srgbClr val="26B8C5"/>
           </a:solidFill>
           <a:ln>
             <a:noFill/>
@@ -9042,7 +9042,7 @@
             <a:r>
               <a:rPr sz="1800" b="1" i="0">
                 <a:solidFill>
-                  <a:srgbClr val="274649"/>
+                  <a:srgbClr val="11595F"/>
                 </a:solidFill>
               </a:rPr>
               <a:t>정리할 날짜</a:t>
@@ -9145,34 +9145,34 @@
         <a:sysClr val="window" lastClr="FFFFFF"/>
       </a:lt1>
       <a:dk2>
-        <a:srgbClr val="274649"/>
+        <a:srgbClr val="11595F"/>
       </a:dk2>
       <a:lt2>
-        <a:srgbClr val="F2F7F8"/>
+        <a:srgbClr val="EEFBFC"/>
       </a:lt2>
       <a:accent1>
-        <a:srgbClr val="4B868B"/>
+        <a:srgbClr val="26B8C5"/>
       </a:accent1>
       <a:accent2>
-        <a:srgbClr val="854761"/>
+        <a:srgbClr val="209DB6"/>
       </a:accent2>
       <a:accent3>
-        <a:srgbClr val="274649"/>
+        <a:srgbClr val="11595F"/>
       </a:accent3>
       <a:accent4>
-        <a:srgbClr val="D6E9EB"/>
+        <a:srgbClr val="D1F7FA"/>
       </a:accent4>
       <a:accent5>
-        <a:srgbClr val="686676"/>
+        <a:srgbClr val="23AABE"/>
       </a:accent5>
       <a:accent6>
-        <a:srgbClr val="7D9092"/>
+        <a:srgbClr val="709B9F"/>
       </a:accent6>
       <a:hlink>
-        <a:srgbClr val="4B868B"/>
+        <a:srgbClr val="26B8C5"/>
       </a:hlink>
       <a:folHlink>
-        <a:srgbClr val="274649"/>
+        <a:srgbClr val="11595F"/>
       </a:folHlink>
     </a:clrScheme>
     <a:fontScheme name="Office">

--- a/public/fun/pack/pptx/review/보장점검양식_24_부모님점검_절집풍경.pptx
+++ b/public/fun/pack/pptx/review/보장점검양식_24_부모님점검_절집풍경.pptx
@@ -3286,6 +3286,14 @@
 <file path=ppt/slides/slide1.xml><?xml version="1.0" encoding="utf-8"?>
 <p:sld xmlns:a="http://schemas.openxmlformats.org/drawingml/2006/main" xmlns:p="http://schemas.openxmlformats.org/presentationml/2006/main" xmlns:r="http://schemas.openxmlformats.org/officeDocument/2006/relationships">
   <p:cSld>
+    <p:bg>
+      <p:bgPr>
+        <a:solidFill>
+          <a:srgbClr val="274649"/>
+        </a:solidFill>
+        <a:effectLst/>
+      </p:bgPr>
+    </p:bg>
     <p:spTree>
       <p:nvGrpSpPr>
         <p:cNvPr id="1" name=""/>
@@ -3293,30 +3301,140 @@
         <p:nvPr/>
       </p:nvGrpSpPr>
       <p:grpSpPr/>
-      <p:pic>
-        <p:nvPicPr>
-          <p:cNvPr id="3" name="표지 그림" descr="review-24.jpg"/>
-          <p:cNvPicPr>
-            <a:picLocks noChangeAspect="1"/>
-          </p:cNvPicPr>
+      <p:sp>
+        <p:nvSpPr>
+          <p:cNvPr id="3" name="장식"/>
+          <p:cNvSpPr/>
           <p:nvPr/>
-        </p:nvPicPr>
-        <p:blipFill>
-          <a:blip r:embed="rId2"/>
-          <a:stretch>
-            <a:fillRect/>
-          </a:stretch>
-        </p:blipFill>
-        <p:spPr>
-          <a:xfrm>
-            <a:off x="0" y="0"/>
-            <a:ext cx="12191695" cy="6858000"/>
+        </p:nvSpPr>
+        <p:spPr>
+          <a:xfrm>
+            <a:off x="3901342" y="2057400"/>
+            <a:ext cx="1463003" cy="4800600"/>
+          </a:xfrm>
+          <a:prstGeom prst="round2SameRect">
+            <a:avLst>
+              <a:gd name="adj1" fmla="val 50000"/>
+              <a:gd name="adj2" fmla="val 0"/>
+            </a:avLst>
+          </a:prstGeom>
+          <a:solidFill>
+            <a:srgbClr val="5EAAB2"/>
+          </a:solidFill>
+          <a:ln>
+            <a:noFill/>
+          </a:ln>
+        </p:spPr>
+        <p:txBody>
+          <a:bodyPr rtlCol="0" anchor="ctr"/>
+          <a:lstStyle/>
+          <a:p>
+            <a:pPr algn="ctr"/>
+          </a:p>
+        </p:txBody>
+      </p:sp>
+      <p:sp>
+        <p:nvSpPr>
+          <p:cNvPr id="4" name="장식"/>
+          <p:cNvSpPr/>
+          <p:nvPr/>
+        </p:nvSpPr>
+        <p:spPr>
+          <a:xfrm>
+            <a:off x="2316422" y="1577339"/>
+            <a:ext cx="1463003" cy="5280660"/>
+          </a:xfrm>
+          <a:prstGeom prst="round2SameRect">
+            <a:avLst>
+              <a:gd name="adj1" fmla="val 50000"/>
+              <a:gd name="adj2" fmla="val 0"/>
+            </a:avLst>
+          </a:prstGeom>
+          <a:solidFill>
+            <a:srgbClr val="7BE0EA"/>
+          </a:solidFill>
+          <a:ln>
+            <a:noFill/>
+          </a:ln>
+        </p:spPr>
+        <p:txBody>
+          <a:bodyPr rtlCol="0" anchor="ctr"/>
+          <a:lstStyle/>
+          <a:p>
+            <a:pPr algn="ctr"/>
+          </a:p>
+        </p:txBody>
+      </p:sp>
+      <p:sp>
+        <p:nvSpPr>
+          <p:cNvPr id="5" name="장식"/>
+          <p:cNvSpPr/>
+          <p:nvPr/>
+        </p:nvSpPr>
+        <p:spPr>
+          <a:xfrm>
+            <a:off x="731501" y="1097279"/>
+            <a:ext cx="1463003" cy="5760720"/>
+          </a:xfrm>
+          <a:prstGeom prst="round2SameRect">
+            <a:avLst>
+              <a:gd name="adj1" fmla="val 50000"/>
+              <a:gd name="adj2" fmla="val 0"/>
+            </a:avLst>
+          </a:prstGeom>
+          <a:solidFill>
+            <a:srgbClr val="5EAAB2"/>
+          </a:solidFill>
+          <a:ln>
+            <a:noFill/>
+          </a:ln>
+        </p:spPr>
+        <p:txBody>
+          <a:bodyPr rtlCol="0" anchor="ctr"/>
+          <a:lstStyle/>
+          <a:p>
+            <a:pPr algn="ctr"/>
+          </a:p>
+        </p:txBody>
+      </p:sp>
+      <p:sp>
+        <p:nvSpPr>
+          <p:cNvPr id="6" name="라벨"/>
+          <p:cNvSpPr txBox="1"/>
+          <p:nvPr/>
+        </p:nvSpPr>
+        <p:spPr>
+          <a:xfrm>
+            <a:off x="6827349" y="2148840"/>
+            <a:ext cx="4632844" cy="274320"/>
           </a:xfrm>
           <a:prstGeom prst="rect">
             <a:avLst/>
           </a:prstGeom>
-        </p:spPr>
-      </p:pic>
+          <a:noFill/>
+        </p:spPr>
+        <p:txBody>
+          <a:bodyPr wrap="square" lIns="54864" rIns="54864" tIns="27432" bIns="27432" anchor="t">
+            <a:noAutofit/>
+          </a:bodyPr>
+          <a:lstStyle/>
+          <a:p>
+            <a:pPr algn="l">
+              <a:lnSpc>
+                <a:spcPct val="115000"/>
+              </a:lnSpc>
+            </a:pPr>
+            <a:r>
+              <a:rPr sz="1000" b="1" i="0" spc="250">
+                <a:solidFill>
+                  <a:srgbClr val="FFFFFF"/>
+                </a:solidFill>
+              </a:rPr>
+              <a:t>INSURANCE CHECK</a:t>
+            </a:r>
+          </a:p>
+        </p:txBody>
+      </p:sp>
       <p:sp>
         <p:nvSpPr>
           <p:cNvPr id="2" name="Title 1"/>
@@ -3329,8 +3447,8 @@
         </p:nvSpPr>
         <p:spPr>
           <a:xfrm>
-            <a:off x="853418" y="2057400"/>
-            <a:ext cx="6095847" cy="1554480"/>
+            <a:off x="6827349" y="2606040"/>
+            <a:ext cx="4632844" cy="1188720"/>
           </a:xfrm>
         </p:spPr>
         <p:txBody>
@@ -3347,7 +3465,7 @@
             <a:r>
               <a:rPr sz="3600" b="1" i="0">
                 <a:solidFill>
-                  <a:srgbClr val="11595F"/>
+                  <a:srgbClr val="FFFFFF"/>
                 </a:solidFill>
               </a:rPr>
               <a:t>우리 보험 점검 시간</a:t>
@@ -3357,14 +3475,14 @@
       </p:sp>
       <p:sp>
         <p:nvSpPr>
-          <p:cNvPr id="4" name="한 줄 문구"/>
+          <p:cNvPr id="7" name="한 줄 문구"/>
           <p:cNvSpPr txBox="1"/>
           <p:nvPr/>
         </p:nvSpPr>
         <p:spPr>
           <a:xfrm>
-            <a:off x="853418" y="3749039"/>
-            <a:ext cx="6095847" cy="822960"/>
+            <a:off x="6827349" y="3886200"/>
+            <a:ext cx="4632844" cy="822960"/>
           </a:xfrm>
           <a:prstGeom prst="rect">
             <a:avLst/>
@@ -3383,9 +3501,9 @@
               </a:lnSpc>
             </a:pPr>
             <a:r>
-              <a:rPr sz="1700" b="0" i="1">
+              <a:rPr sz="1700" b="0" i="0">
                 <a:solidFill>
-                  <a:srgbClr val="11595F"/>
+                  <a:srgbClr val="FFFFFF"/>
                 </a:solidFill>
               </a:rPr>
               <a:t>더운 날 건강 챙기는 김에 같이 봅니다</a:t>
@@ -3395,14 +3513,14 @@
       </p:sp>
       <p:sp>
         <p:nvSpPr>
-          <p:cNvPr id="5" name="안내 문구"/>
+          <p:cNvPr id="8" name="안내 문구"/>
           <p:cNvSpPr txBox="1"/>
           <p:nvPr/>
         </p:nvSpPr>
         <p:spPr>
           <a:xfrm>
-            <a:off x="853418" y="4617720"/>
-            <a:ext cx="6095847" cy="914400"/>
+            <a:off x="6827349" y="4754880"/>
+            <a:ext cx="4632844" cy="914400"/>
           </a:xfrm>
           <a:prstGeom prst="rect">
             <a:avLst/>
@@ -3423,10 +3541,10 @@
             <a:r>
               <a:rPr sz="1400" b="0" i="0">
                 <a:solidFill>
-                  <a:srgbClr val="666666"/>
+                  <a:srgbClr val="FFFFFF"/>
                 </a:solidFill>
               </a:rPr>
-              <a:t>부모님 점검 · 2027. 00. 00</a:t>
+              <a:t>부모님 점검 · 날짜 입력</a:t>
             </a:r>
           </a:p>
           <a:p>
@@ -3438,7 +3556,7 @@
             <a:r>
               <a:rPr sz="1400" b="0" i="0">
                 <a:solidFill>
-                  <a:srgbClr val="666666"/>
+                  <a:srgbClr val="FFFFFF"/>
                 </a:solidFill>
               </a:rPr>
               <a:t>가입 내용을 정리하고 함께 확인하는 양식</a:t>
@@ -3460,7 +3578,7 @@
     <p:bg>
       <p:bgPr>
         <a:solidFill>
-          <a:srgbClr val="EEFBFC"/>
+          <a:srgbClr val="D1F7FA"/>
         </a:solidFill>
         <a:effectLst/>
       </p:bgPr>
@@ -3480,46 +3598,84 @@
         </p:nvSpPr>
         <p:spPr>
           <a:xfrm>
-            <a:off x="256032" y="256032"/>
-            <a:ext cx="11679631" cy="6345936"/>
+            <a:off x="640080" y="566928"/>
+            <a:ext cx="10911535" cy="10972"/>
+          </a:xfrm>
+          <a:prstGeom prst="rect">
+            <a:avLst/>
+          </a:prstGeom>
+          <a:solidFill>
+            <a:srgbClr val="26231F"/>
+          </a:solidFill>
+          <a:ln>
+            <a:noFill/>
+          </a:ln>
+        </p:spPr>
+        <p:txBody>
+          <a:bodyPr rtlCol="0" anchor="ctr"/>
+          <a:lstStyle/>
+          <a:p>
+            <a:pPr algn="ctr"/>
+          </a:p>
+        </p:txBody>
+      </p:sp>
+      <p:sp>
+        <p:nvSpPr>
+          <p:cNvPr id="4" name="상단 라벨"/>
+          <p:cNvSpPr txBox="1"/>
+          <p:nvPr/>
+        </p:nvSpPr>
+        <p:spPr>
+          <a:xfrm>
+            <a:off x="640080" y="237744"/>
+            <a:ext cx="5486400" cy="274320"/>
           </a:xfrm>
           <a:prstGeom prst="rect">
             <a:avLst/>
           </a:prstGeom>
           <a:noFill/>
-          <a:ln w="28575">
-            <a:solidFill>
-              <a:srgbClr val="26B8C5"/>
-            </a:solidFill>
-          </a:ln>
-        </p:spPr>
-        <p:txBody>
-          <a:bodyPr rtlCol="0" anchor="ctr"/>
-          <a:lstStyle/>
-          <a:p>
-            <a:pPr algn="ctr"/>
-          </a:p>
-        </p:txBody>
-      </p:sp>
-      <p:sp>
-        <p:nvSpPr>
-          <p:cNvPr id="4" name="장식"/>
+        </p:spPr>
+        <p:txBody>
+          <a:bodyPr wrap="square" lIns="54864" rIns="54864" tIns="27432" bIns="27432" anchor="ctr">
+            <a:noAutofit/>
+          </a:bodyPr>
+          <a:lstStyle/>
+          <a:p>
+            <a:pPr algn="l">
+              <a:lnSpc>
+                <a:spcPct val="115000"/>
+              </a:lnSpc>
+            </a:pPr>
+            <a:r>
+              <a:rPr sz="900" b="1" i="0" spc="250">
+                <a:solidFill>
+                  <a:srgbClr val="26231F"/>
+                </a:solidFill>
+              </a:rPr>
+              <a:t>INSURANCE CHECK</a:t>
+            </a:r>
+          </a:p>
+        </p:txBody>
+      </p:sp>
+      <p:sp>
+        <p:nvSpPr>
+          <p:cNvPr id="5" name="포인트"/>
           <p:cNvSpPr/>
           <p:nvPr/>
         </p:nvSpPr>
         <p:spPr>
           <a:xfrm>
-            <a:off x="384048" y="384048"/>
-            <a:ext cx="11423599" cy="6089904"/>
-          </a:xfrm>
-          <a:prstGeom prst="rect">
+            <a:off x="11204143" y="246888"/>
+            <a:ext cx="237744" cy="237744"/>
+          </a:xfrm>
+          <a:prstGeom prst="star4">
             <a:avLst/>
           </a:prstGeom>
-          <a:noFill/>
-          <a:ln w="9525">
-            <a:solidFill>
-              <a:srgbClr val="D1F7FA"/>
-            </a:solidFill>
+          <a:solidFill>
+            <a:srgbClr val="7BE0EA"/>
+          </a:solidFill>
+          <a:ln>
+            <a:noFill/>
           </a:ln>
         </p:spPr>
         <p:txBody>
@@ -3542,8 +3698,8 @@
         </p:nvSpPr>
         <p:spPr>
           <a:xfrm>
-            <a:off x="822960" y="548640"/>
-            <a:ext cx="9265615" cy="822960"/>
+            <a:off x="640080" y="731520"/>
+            <a:ext cx="10911535" cy="822960"/>
           </a:xfrm>
         </p:spPr>
         <p:txBody>
@@ -3560,7 +3716,7 @@
             <a:r>
               <a:rPr sz="3000" b="1" i="0">
                 <a:solidFill>
-                  <a:srgbClr val="11595F"/>
+                  <a:srgbClr val="26231F"/>
                 </a:solidFill>
               </a:rPr>
               <a:t>점검 대상 현황</a:t>
@@ -3570,15 +3726,15 @@
       </p:sp>
       <p:graphicFrame>
         <p:nvGraphicFramePr>
-          <p:cNvPr id="5" name="표"/>
+          <p:cNvPr id="6" name="표"/>
           <p:cNvGraphicFramePr>
             <a:graphicFrameLocks noGrp="1"/>
           </p:cNvGraphicFramePr>
           <p:nvPr/>
         </p:nvGraphicFramePr>
         <p:xfrm>
-          <a:off x="822960" y="1554480"/>
-          <a:ext cx="10545774" cy="3657600"/>
+          <a:off x="640080" y="1783080"/>
+          <a:ext cx="10911534" cy="3657600"/>
         </p:xfrm>
         <a:graphic>
           <a:graphicData uri="http://schemas.openxmlformats.org/drawingml/2006/table">
@@ -3587,9 +3743,9 @@
                 <a:tableStyleId>{5C22544A-7EE6-4342-B048-85BDC9FD1C3A}</a:tableStyleId>
               </a:tblPr>
               <a:tblGrid>
-                <a:gridCol w="3515258"/>
-                <a:gridCol w="3515258"/>
-                <a:gridCol w="3515258"/>
+                <a:gridCol w="3637178"/>
+                <a:gridCol w="3637178"/>
+                <a:gridCol w="3637178"/>
               </a:tblGrid>
               <a:tr h="731520">
                 <a:tc>
@@ -3601,7 +3757,7 @@
                       <a:r>
                         <a:rPr sz="1600" b="1">
                           <a:solidFill>
-                            <a:srgbClr val="FFFFFF"/>
+                            <a:srgbClr val="26231F"/>
                           </a:solidFill>
                         </a:rPr>
                         <a:t>구분</a:t>
@@ -3611,30 +3767,30 @@
                   <a:tcPr anchor="ctr" marL="73152" marR="73152">
                     <a:lnL w="9525" cap="flat" cmpd="sng" algn="ctr">
                       <a:solidFill>
-                        <a:srgbClr val="26B8C5"/>
+                        <a:srgbClr val="7BE0EA"/>
                       </a:solidFill>
                       <a:prstDash val="solid"/>
                     </a:lnL>
                     <a:lnR w="9525" cap="flat" cmpd="sng" algn="ctr">
                       <a:solidFill>
-                        <a:srgbClr val="26B8C5"/>
+                        <a:srgbClr val="7BE0EA"/>
                       </a:solidFill>
                       <a:prstDash val="solid"/>
                     </a:lnR>
                     <a:lnT w="9525" cap="flat" cmpd="sng" algn="ctr">
                       <a:solidFill>
-                        <a:srgbClr val="26B8C5"/>
+                        <a:srgbClr val="7BE0EA"/>
                       </a:solidFill>
                       <a:prstDash val="solid"/>
                     </a:lnT>
                     <a:lnB w="9525" cap="flat" cmpd="sng" algn="ctr">
                       <a:solidFill>
-                        <a:srgbClr val="26B8C5"/>
+                        <a:srgbClr val="7BE0EA"/>
                       </a:solidFill>
                       <a:prstDash val="solid"/>
                     </a:lnB>
                     <a:solidFill>
-                      <a:srgbClr val="26B8C5"/>
+                      <a:srgbClr val="7BE0EA"/>
                     </a:solidFill>
                   </a:tcPr>
                 </a:tc>
@@ -3647,7 +3803,7 @@
                       <a:r>
                         <a:rPr sz="1600" b="1">
                           <a:solidFill>
-                            <a:srgbClr val="FFFFFF"/>
+                            <a:srgbClr val="26231F"/>
                           </a:solidFill>
                         </a:rPr>
                         <a:t>아버지</a:t>
@@ -3657,30 +3813,30 @@
                   <a:tcPr anchor="ctr" marL="73152" marR="73152">
                     <a:lnL w="9525" cap="flat" cmpd="sng" algn="ctr">
                       <a:solidFill>
-                        <a:srgbClr val="26B8C5"/>
+                        <a:srgbClr val="7BE0EA"/>
                       </a:solidFill>
                       <a:prstDash val="solid"/>
                     </a:lnL>
                     <a:lnR w="9525" cap="flat" cmpd="sng" algn="ctr">
                       <a:solidFill>
-                        <a:srgbClr val="26B8C5"/>
+                        <a:srgbClr val="7BE0EA"/>
                       </a:solidFill>
                       <a:prstDash val="solid"/>
                     </a:lnR>
                     <a:lnT w="9525" cap="flat" cmpd="sng" algn="ctr">
                       <a:solidFill>
-                        <a:srgbClr val="26B8C5"/>
+                        <a:srgbClr val="7BE0EA"/>
                       </a:solidFill>
                       <a:prstDash val="solid"/>
                     </a:lnT>
                     <a:lnB w="9525" cap="flat" cmpd="sng" algn="ctr">
                       <a:solidFill>
-                        <a:srgbClr val="26B8C5"/>
+                        <a:srgbClr val="7BE0EA"/>
                       </a:solidFill>
                       <a:prstDash val="solid"/>
                     </a:lnB>
                     <a:solidFill>
-                      <a:srgbClr val="26B8C5"/>
+                      <a:srgbClr val="7BE0EA"/>
                     </a:solidFill>
                   </a:tcPr>
                 </a:tc>
@@ -3693,7 +3849,7 @@
                       <a:r>
                         <a:rPr sz="1600" b="1">
                           <a:solidFill>
-                            <a:srgbClr val="FFFFFF"/>
+                            <a:srgbClr val="26231F"/>
                           </a:solidFill>
                         </a:rPr>
                         <a:t>어머니</a:t>
@@ -3703,30 +3859,30 @@
                   <a:tcPr anchor="ctr" marL="73152" marR="73152">
                     <a:lnL w="9525" cap="flat" cmpd="sng" algn="ctr">
                       <a:solidFill>
-                        <a:srgbClr val="26B8C5"/>
+                        <a:srgbClr val="7BE0EA"/>
                       </a:solidFill>
                       <a:prstDash val="solid"/>
                     </a:lnL>
                     <a:lnR w="9525" cap="flat" cmpd="sng" algn="ctr">
                       <a:solidFill>
-                        <a:srgbClr val="26B8C5"/>
+                        <a:srgbClr val="7BE0EA"/>
                       </a:solidFill>
                       <a:prstDash val="solid"/>
                     </a:lnR>
                     <a:lnT w="9525" cap="flat" cmpd="sng" algn="ctr">
                       <a:solidFill>
-                        <a:srgbClr val="26B8C5"/>
+                        <a:srgbClr val="7BE0EA"/>
                       </a:solidFill>
                       <a:prstDash val="solid"/>
                     </a:lnT>
                     <a:lnB w="9525" cap="flat" cmpd="sng" algn="ctr">
                       <a:solidFill>
-                        <a:srgbClr val="26B8C5"/>
+                        <a:srgbClr val="7BE0EA"/>
                       </a:solidFill>
                       <a:prstDash val="solid"/>
                     </a:lnB>
                     <a:solidFill>
-                      <a:srgbClr val="26B8C5"/>
+                      <a:srgbClr val="7BE0EA"/>
                     </a:solidFill>
                   </a:tcPr>
                 </a:tc>
@@ -3741,7 +3897,7 @@
                       <a:r>
                         <a:rPr sz="1600" b="1">
                           <a:solidFill>
-                            <a:srgbClr val="11595F"/>
+                            <a:srgbClr val="274649"/>
                           </a:solidFill>
                         </a:rPr>
                         <a:t>성함</a:t>
@@ -3787,7 +3943,7 @@
                       <a:r>
                         <a:rPr sz="1600" b="0">
                           <a:solidFill>
-                            <a:srgbClr val="2B2B2B"/>
+                            <a:srgbClr val="26231F"/>
                           </a:solidFill>
                         </a:rPr>
                         <a:t/>
@@ -3833,7 +3989,7 @@
                       <a:r>
                         <a:rPr sz="1600" b="0">
                           <a:solidFill>
-                            <a:srgbClr val="2B2B2B"/>
+                            <a:srgbClr val="26231F"/>
                           </a:solidFill>
                         </a:rPr>
                         <a:t/>
@@ -3881,7 +4037,7 @@
                       <a:r>
                         <a:rPr sz="1600" b="1">
                           <a:solidFill>
-                            <a:srgbClr val="11595F"/>
+                            <a:srgbClr val="274649"/>
                           </a:solidFill>
                         </a:rPr>
                         <a:t>연세</a:t>
@@ -3927,7 +4083,7 @@
                       <a:r>
                         <a:rPr sz="1600" b="0">
                           <a:solidFill>
-                            <a:srgbClr val="2B2B2B"/>
+                            <a:srgbClr val="26231F"/>
                           </a:solidFill>
                         </a:rPr>
                         <a:t/>
@@ -3960,7 +4116,7 @@
                       <a:prstDash val="solid"/>
                     </a:lnB>
                     <a:solidFill>
-                      <a:srgbClr val="EEFBFC"/>
+                      <a:srgbClr val="EAFBFD"/>
                     </a:solidFill>
                   </a:tcPr>
                 </a:tc>
@@ -3973,7 +4129,7 @@
                       <a:r>
                         <a:rPr sz="1600" b="0">
                           <a:solidFill>
-                            <a:srgbClr val="2B2B2B"/>
+                            <a:srgbClr val="26231F"/>
                           </a:solidFill>
                         </a:rPr>
                         <a:t/>
@@ -4006,7 +4162,7 @@
                       <a:prstDash val="solid"/>
                     </a:lnB>
                     <a:solidFill>
-                      <a:srgbClr val="EEFBFC"/>
+                      <a:srgbClr val="EAFBFD"/>
                     </a:solidFill>
                   </a:tcPr>
                 </a:tc>
@@ -4021,7 +4177,7 @@
                       <a:r>
                         <a:rPr sz="1600" b="1">
                           <a:solidFill>
-                            <a:srgbClr val="11595F"/>
+                            <a:srgbClr val="274649"/>
                           </a:solidFill>
                         </a:rPr>
                         <a:t>건강 상태 메모</a:t>
@@ -4067,7 +4223,7 @@
                       <a:r>
                         <a:rPr sz="1600" b="0">
                           <a:solidFill>
-                            <a:srgbClr val="2B2B2B"/>
+                            <a:srgbClr val="26231F"/>
                           </a:solidFill>
                         </a:rPr>
                         <a:t/>
@@ -4113,7 +4269,7 @@
                       <a:r>
                         <a:rPr sz="1600" b="0">
                           <a:solidFill>
-                            <a:srgbClr val="2B2B2B"/>
+                            <a:srgbClr val="26231F"/>
                           </a:solidFill>
                         </a:rPr>
                         <a:t/>
@@ -4161,7 +4317,7 @@
                       <a:r>
                         <a:rPr sz="1600" b="1">
                           <a:solidFill>
-                            <a:srgbClr val="11595F"/>
+                            <a:srgbClr val="274649"/>
                           </a:solidFill>
                         </a:rPr>
                         <a:t>함께 확인할 것</a:t>
@@ -4207,7 +4363,7 @@
                       <a:r>
                         <a:rPr sz="1600" b="0">
                           <a:solidFill>
-                            <a:srgbClr val="2B2B2B"/>
+                            <a:srgbClr val="26231F"/>
                           </a:solidFill>
                         </a:rPr>
                         <a:t/>
@@ -4240,7 +4396,7 @@
                       <a:prstDash val="solid"/>
                     </a:lnB>
                     <a:solidFill>
-                      <a:srgbClr val="EEFBFC"/>
+                      <a:srgbClr val="EAFBFD"/>
                     </a:solidFill>
                   </a:tcPr>
                 </a:tc>
@@ -4253,7 +4409,7 @@
                       <a:r>
                         <a:rPr sz="1600" b="0">
                           <a:solidFill>
-                            <a:srgbClr val="2B2B2B"/>
+                            <a:srgbClr val="26231F"/>
                           </a:solidFill>
                         </a:rPr>
                         <a:t/>
@@ -4286,7 +4442,7 @@
                       <a:prstDash val="solid"/>
                     </a:lnB>
                     <a:solidFill>
-                      <a:srgbClr val="EEFBFC"/>
+                      <a:srgbClr val="EAFBFD"/>
                     </a:solidFill>
                   </a:tcPr>
                 </a:tc>
@@ -4309,7 +4465,7 @@
     <p:bg>
       <p:bgPr>
         <a:solidFill>
-          <a:srgbClr val="EEFBFC"/>
+          <a:srgbClr val="D1F7FA"/>
         </a:solidFill>
         <a:effectLst/>
       </p:bgPr>
@@ -4329,46 +4485,84 @@
         </p:nvSpPr>
         <p:spPr>
           <a:xfrm>
-            <a:off x="256032" y="256032"/>
-            <a:ext cx="11679631" cy="6345936"/>
+            <a:off x="640080" y="566928"/>
+            <a:ext cx="10911535" cy="10972"/>
+          </a:xfrm>
+          <a:prstGeom prst="rect">
+            <a:avLst/>
+          </a:prstGeom>
+          <a:solidFill>
+            <a:srgbClr val="26231F"/>
+          </a:solidFill>
+          <a:ln>
+            <a:noFill/>
+          </a:ln>
+        </p:spPr>
+        <p:txBody>
+          <a:bodyPr rtlCol="0" anchor="ctr"/>
+          <a:lstStyle/>
+          <a:p>
+            <a:pPr algn="ctr"/>
+          </a:p>
+        </p:txBody>
+      </p:sp>
+      <p:sp>
+        <p:nvSpPr>
+          <p:cNvPr id="4" name="상단 라벨"/>
+          <p:cNvSpPr txBox="1"/>
+          <p:nvPr/>
+        </p:nvSpPr>
+        <p:spPr>
+          <a:xfrm>
+            <a:off x="640080" y="237744"/>
+            <a:ext cx="5486400" cy="274320"/>
           </a:xfrm>
           <a:prstGeom prst="rect">
             <a:avLst/>
           </a:prstGeom>
           <a:noFill/>
-          <a:ln w="28575">
-            <a:solidFill>
-              <a:srgbClr val="26B8C5"/>
-            </a:solidFill>
-          </a:ln>
-        </p:spPr>
-        <p:txBody>
-          <a:bodyPr rtlCol="0" anchor="ctr"/>
-          <a:lstStyle/>
-          <a:p>
-            <a:pPr algn="ctr"/>
-          </a:p>
-        </p:txBody>
-      </p:sp>
-      <p:sp>
-        <p:nvSpPr>
-          <p:cNvPr id="4" name="장식"/>
+        </p:spPr>
+        <p:txBody>
+          <a:bodyPr wrap="square" lIns="54864" rIns="54864" tIns="27432" bIns="27432" anchor="ctr">
+            <a:noAutofit/>
+          </a:bodyPr>
+          <a:lstStyle/>
+          <a:p>
+            <a:pPr algn="l">
+              <a:lnSpc>
+                <a:spcPct val="115000"/>
+              </a:lnSpc>
+            </a:pPr>
+            <a:r>
+              <a:rPr sz="900" b="1" i="0" spc="250">
+                <a:solidFill>
+                  <a:srgbClr val="26231F"/>
+                </a:solidFill>
+              </a:rPr>
+              <a:t>INSURANCE CHECK</a:t>
+            </a:r>
+          </a:p>
+        </p:txBody>
+      </p:sp>
+      <p:sp>
+        <p:nvSpPr>
+          <p:cNvPr id="5" name="포인트"/>
           <p:cNvSpPr/>
           <p:nvPr/>
         </p:nvSpPr>
         <p:spPr>
           <a:xfrm>
-            <a:off x="384048" y="384048"/>
-            <a:ext cx="11423599" cy="6089904"/>
-          </a:xfrm>
-          <a:prstGeom prst="rect">
+            <a:off x="11204143" y="246888"/>
+            <a:ext cx="237744" cy="237744"/>
+          </a:xfrm>
+          <a:prstGeom prst="star4">
             <a:avLst/>
           </a:prstGeom>
-          <a:noFill/>
-          <a:ln w="9525">
-            <a:solidFill>
-              <a:srgbClr val="D1F7FA"/>
-            </a:solidFill>
+          <a:solidFill>
+            <a:srgbClr val="7BE0EA"/>
+          </a:solidFill>
+          <a:ln>
+            <a:noFill/>
           </a:ln>
         </p:spPr>
         <p:txBody>
@@ -4391,8 +4585,8 @@
         </p:nvSpPr>
         <p:spPr>
           <a:xfrm>
-            <a:off x="822960" y="548640"/>
-            <a:ext cx="9265615" cy="822960"/>
+            <a:off x="640080" y="731520"/>
+            <a:ext cx="10911535" cy="822960"/>
           </a:xfrm>
         </p:spPr>
         <p:txBody>
@@ -4409,7 +4603,7 @@
             <a:r>
               <a:rPr sz="3000" b="1" i="0">
                 <a:solidFill>
-                  <a:srgbClr val="11595F"/>
+                  <a:srgbClr val="26231F"/>
                 </a:solidFill>
               </a:rPr>
               <a:t>가입한 보험 목록</a:t>
@@ -4419,15 +4613,15 @@
       </p:sp>
       <p:graphicFrame>
         <p:nvGraphicFramePr>
-          <p:cNvPr id="5" name="표"/>
+          <p:cNvPr id="6" name="표"/>
           <p:cNvGraphicFramePr>
             <a:graphicFrameLocks noGrp="1"/>
           </p:cNvGraphicFramePr>
           <p:nvPr/>
         </p:nvGraphicFramePr>
         <p:xfrm>
-          <a:off x="822960" y="1554480"/>
-          <a:ext cx="10545775" cy="4224528"/>
+          <a:off x="640080" y="1783080"/>
+          <a:ext cx="10911535" cy="4224528"/>
         </p:xfrm>
         <a:graphic>
           <a:graphicData uri="http://schemas.openxmlformats.org/drawingml/2006/table">
@@ -4440,7 +4634,7 @@
                 <a:gridCol w="3108960"/>
                 <a:gridCol w="1828800"/>
                 <a:gridCol w="1828800"/>
-                <a:gridCol w="1767535"/>
+                <a:gridCol w="2133295"/>
               </a:tblGrid>
               <a:tr h="603504">
                 <a:tc>
@@ -4452,7 +4646,7 @@
                       <a:r>
                         <a:rPr sz="1400" b="1">
                           <a:solidFill>
-                            <a:srgbClr val="FFFFFF"/>
+                            <a:srgbClr val="26231F"/>
                           </a:solidFill>
                         </a:rPr>
                         <a:t>보험회사</a:t>
@@ -4462,30 +4656,30 @@
                   <a:tcPr anchor="ctr" marL="73152" marR="73152">
                     <a:lnL w="9525" cap="flat" cmpd="sng" algn="ctr">
                       <a:solidFill>
-                        <a:srgbClr val="26B8C5"/>
+                        <a:srgbClr val="7BE0EA"/>
                       </a:solidFill>
                       <a:prstDash val="solid"/>
                     </a:lnL>
                     <a:lnR w="9525" cap="flat" cmpd="sng" algn="ctr">
                       <a:solidFill>
-                        <a:srgbClr val="26B8C5"/>
+                        <a:srgbClr val="7BE0EA"/>
                       </a:solidFill>
                       <a:prstDash val="solid"/>
                     </a:lnR>
                     <a:lnT w="9525" cap="flat" cmpd="sng" algn="ctr">
                       <a:solidFill>
-                        <a:srgbClr val="26B8C5"/>
+                        <a:srgbClr val="7BE0EA"/>
                       </a:solidFill>
                       <a:prstDash val="solid"/>
                     </a:lnT>
                     <a:lnB w="9525" cap="flat" cmpd="sng" algn="ctr">
                       <a:solidFill>
-                        <a:srgbClr val="26B8C5"/>
+                        <a:srgbClr val="7BE0EA"/>
                       </a:solidFill>
                       <a:prstDash val="solid"/>
                     </a:lnB>
                     <a:solidFill>
-                      <a:srgbClr val="26B8C5"/>
+                      <a:srgbClr val="7BE0EA"/>
                     </a:solidFill>
                   </a:tcPr>
                 </a:tc>
@@ -4498,7 +4692,7 @@
                       <a:r>
                         <a:rPr sz="1400" b="1">
                           <a:solidFill>
-                            <a:srgbClr val="FFFFFF"/>
+                            <a:srgbClr val="26231F"/>
                           </a:solidFill>
                         </a:rPr>
                         <a:t>상품명</a:t>
@@ -4508,30 +4702,30 @@
                   <a:tcPr anchor="ctr" marL="73152" marR="73152">
                     <a:lnL w="9525" cap="flat" cmpd="sng" algn="ctr">
                       <a:solidFill>
-                        <a:srgbClr val="26B8C5"/>
+                        <a:srgbClr val="7BE0EA"/>
                       </a:solidFill>
                       <a:prstDash val="solid"/>
                     </a:lnL>
                     <a:lnR w="9525" cap="flat" cmpd="sng" algn="ctr">
                       <a:solidFill>
-                        <a:srgbClr val="26B8C5"/>
+                        <a:srgbClr val="7BE0EA"/>
                       </a:solidFill>
                       <a:prstDash val="solid"/>
                     </a:lnR>
                     <a:lnT w="9525" cap="flat" cmpd="sng" algn="ctr">
                       <a:solidFill>
-                        <a:srgbClr val="26B8C5"/>
+                        <a:srgbClr val="7BE0EA"/>
                       </a:solidFill>
                       <a:prstDash val="solid"/>
                     </a:lnT>
                     <a:lnB w="9525" cap="flat" cmpd="sng" algn="ctr">
                       <a:solidFill>
-                        <a:srgbClr val="26B8C5"/>
+                        <a:srgbClr val="7BE0EA"/>
                       </a:solidFill>
                       <a:prstDash val="solid"/>
                     </a:lnB>
                     <a:solidFill>
-                      <a:srgbClr val="26B8C5"/>
+                      <a:srgbClr val="7BE0EA"/>
                     </a:solidFill>
                   </a:tcPr>
                 </a:tc>
@@ -4544,7 +4738,7 @@
                       <a:r>
                         <a:rPr sz="1400" b="1">
                           <a:solidFill>
-                            <a:srgbClr val="FFFFFF"/>
+                            <a:srgbClr val="26231F"/>
                           </a:solidFill>
                         </a:rPr>
                         <a:t>종류</a:t>
@@ -4554,30 +4748,30 @@
                   <a:tcPr anchor="ctr" marL="73152" marR="73152">
                     <a:lnL w="9525" cap="flat" cmpd="sng" algn="ctr">
                       <a:solidFill>
-                        <a:srgbClr val="26B8C5"/>
+                        <a:srgbClr val="7BE0EA"/>
                       </a:solidFill>
                       <a:prstDash val="solid"/>
                     </a:lnL>
                     <a:lnR w="9525" cap="flat" cmpd="sng" algn="ctr">
                       <a:solidFill>
-                        <a:srgbClr val="26B8C5"/>
+                        <a:srgbClr val="7BE0EA"/>
                       </a:solidFill>
                       <a:prstDash val="solid"/>
                     </a:lnR>
                     <a:lnT w="9525" cap="flat" cmpd="sng" algn="ctr">
                       <a:solidFill>
-                        <a:srgbClr val="26B8C5"/>
+                        <a:srgbClr val="7BE0EA"/>
                       </a:solidFill>
                       <a:prstDash val="solid"/>
                     </a:lnT>
                     <a:lnB w="9525" cap="flat" cmpd="sng" algn="ctr">
                       <a:solidFill>
-                        <a:srgbClr val="26B8C5"/>
+                        <a:srgbClr val="7BE0EA"/>
                       </a:solidFill>
                       <a:prstDash val="solid"/>
                     </a:lnB>
                     <a:solidFill>
-                      <a:srgbClr val="26B8C5"/>
+                      <a:srgbClr val="7BE0EA"/>
                     </a:solidFill>
                   </a:tcPr>
                 </a:tc>
@@ -4590,7 +4784,7 @@
                       <a:r>
                         <a:rPr sz="1400" b="1">
                           <a:solidFill>
-                            <a:srgbClr val="FFFFFF"/>
+                            <a:srgbClr val="26231F"/>
                           </a:solidFill>
                         </a:rPr>
                         <a:t>만기일</a:t>
@@ -4600,30 +4794,30 @@
                   <a:tcPr anchor="ctr" marL="73152" marR="73152">
                     <a:lnL w="9525" cap="flat" cmpd="sng" algn="ctr">
                       <a:solidFill>
-                        <a:srgbClr val="26B8C5"/>
+                        <a:srgbClr val="7BE0EA"/>
                       </a:solidFill>
                       <a:prstDash val="solid"/>
                     </a:lnL>
                     <a:lnR w="9525" cap="flat" cmpd="sng" algn="ctr">
                       <a:solidFill>
-                        <a:srgbClr val="26B8C5"/>
+                        <a:srgbClr val="7BE0EA"/>
                       </a:solidFill>
                       <a:prstDash val="solid"/>
                     </a:lnR>
                     <a:lnT w="9525" cap="flat" cmpd="sng" algn="ctr">
                       <a:solidFill>
-                        <a:srgbClr val="26B8C5"/>
+                        <a:srgbClr val="7BE0EA"/>
                       </a:solidFill>
                       <a:prstDash val="solid"/>
                     </a:lnT>
                     <a:lnB w="9525" cap="flat" cmpd="sng" algn="ctr">
                       <a:solidFill>
-                        <a:srgbClr val="26B8C5"/>
+                        <a:srgbClr val="7BE0EA"/>
                       </a:solidFill>
                       <a:prstDash val="solid"/>
                     </a:lnB>
                     <a:solidFill>
-                      <a:srgbClr val="26B8C5"/>
+                      <a:srgbClr val="7BE0EA"/>
                     </a:solidFill>
                   </a:tcPr>
                 </a:tc>
@@ -4636,7 +4830,7 @@
                       <a:r>
                         <a:rPr sz="1400" b="1">
                           <a:solidFill>
-                            <a:srgbClr val="FFFFFF"/>
+                            <a:srgbClr val="26231F"/>
                           </a:solidFill>
                         </a:rPr>
                         <a:t>월 보험료</a:t>
@@ -4646,30 +4840,30 @@
                   <a:tcPr anchor="ctr" marL="73152" marR="73152">
                     <a:lnL w="9525" cap="flat" cmpd="sng" algn="ctr">
                       <a:solidFill>
-                        <a:srgbClr val="26B8C5"/>
+                        <a:srgbClr val="7BE0EA"/>
                       </a:solidFill>
                       <a:prstDash val="solid"/>
                     </a:lnL>
                     <a:lnR w="9525" cap="flat" cmpd="sng" algn="ctr">
                       <a:solidFill>
-                        <a:srgbClr val="26B8C5"/>
+                        <a:srgbClr val="7BE0EA"/>
                       </a:solidFill>
                       <a:prstDash val="solid"/>
                     </a:lnR>
                     <a:lnT w="9525" cap="flat" cmpd="sng" algn="ctr">
                       <a:solidFill>
-                        <a:srgbClr val="26B8C5"/>
+                        <a:srgbClr val="7BE0EA"/>
                       </a:solidFill>
                       <a:prstDash val="solid"/>
                     </a:lnT>
                     <a:lnB w="9525" cap="flat" cmpd="sng" algn="ctr">
                       <a:solidFill>
-                        <a:srgbClr val="26B8C5"/>
+                        <a:srgbClr val="7BE0EA"/>
                       </a:solidFill>
                       <a:prstDash val="solid"/>
                     </a:lnB>
                     <a:solidFill>
-                      <a:srgbClr val="26B8C5"/>
+                      <a:srgbClr val="7BE0EA"/>
                     </a:solidFill>
                   </a:tcPr>
                 </a:tc>
@@ -4684,7 +4878,7 @@
                       <a:r>
                         <a:rPr sz="1400" b="0">
                           <a:solidFill>
-                            <a:srgbClr val="2B2B2B"/>
+                            <a:srgbClr val="26231F"/>
                           </a:solidFill>
                         </a:rPr>
                         <a:t/>
@@ -4730,7 +4924,7 @@
                       <a:r>
                         <a:rPr sz="1400" b="0">
                           <a:solidFill>
-                            <a:srgbClr val="2B2B2B"/>
+                            <a:srgbClr val="26231F"/>
                           </a:solidFill>
                         </a:rPr>
                         <a:t/>
@@ -4776,7 +4970,7 @@
                       <a:r>
                         <a:rPr sz="1400" b="0">
                           <a:solidFill>
-                            <a:srgbClr val="2B2B2B"/>
+                            <a:srgbClr val="26231F"/>
                           </a:solidFill>
                         </a:rPr>
                         <a:t/>
@@ -4822,7 +5016,7 @@
                       <a:r>
                         <a:rPr sz="1400" b="0">
                           <a:solidFill>
-                            <a:srgbClr val="2B2B2B"/>
+                            <a:srgbClr val="26231F"/>
                           </a:solidFill>
                         </a:rPr>
                         <a:t/>
@@ -4868,7 +5062,7 @@
                       <a:r>
                         <a:rPr sz="1400" b="0">
                           <a:solidFill>
-                            <a:srgbClr val="2B2B2B"/>
+                            <a:srgbClr val="26231F"/>
                           </a:solidFill>
                         </a:rPr>
                         <a:t/>
@@ -4916,7 +5110,7 @@
                       <a:r>
                         <a:rPr sz="1400" b="0">
                           <a:solidFill>
-                            <a:srgbClr val="2B2B2B"/>
+                            <a:srgbClr val="26231F"/>
                           </a:solidFill>
                         </a:rPr>
                         <a:t/>
@@ -4949,7 +5143,7 @@
                       <a:prstDash val="solid"/>
                     </a:lnB>
                     <a:solidFill>
-                      <a:srgbClr val="EEFBFC"/>
+                      <a:srgbClr val="EAFBFD"/>
                     </a:solidFill>
                   </a:tcPr>
                 </a:tc>
@@ -4962,7 +5156,7 @@
                       <a:r>
                         <a:rPr sz="1400" b="0">
                           <a:solidFill>
-                            <a:srgbClr val="2B2B2B"/>
+                            <a:srgbClr val="26231F"/>
                           </a:solidFill>
                         </a:rPr>
                         <a:t/>
@@ -4995,7 +5189,7 @@
                       <a:prstDash val="solid"/>
                     </a:lnB>
                     <a:solidFill>
-                      <a:srgbClr val="EEFBFC"/>
+                      <a:srgbClr val="EAFBFD"/>
                     </a:solidFill>
                   </a:tcPr>
                 </a:tc>
@@ -5008,7 +5202,7 @@
                       <a:r>
                         <a:rPr sz="1400" b="0">
                           <a:solidFill>
-                            <a:srgbClr val="2B2B2B"/>
+                            <a:srgbClr val="26231F"/>
                           </a:solidFill>
                         </a:rPr>
                         <a:t/>
@@ -5041,7 +5235,7 @@
                       <a:prstDash val="solid"/>
                     </a:lnB>
                     <a:solidFill>
-                      <a:srgbClr val="EEFBFC"/>
+                      <a:srgbClr val="EAFBFD"/>
                     </a:solidFill>
                   </a:tcPr>
                 </a:tc>
@@ -5054,7 +5248,7 @@
                       <a:r>
                         <a:rPr sz="1400" b="0">
                           <a:solidFill>
-                            <a:srgbClr val="2B2B2B"/>
+                            <a:srgbClr val="26231F"/>
                           </a:solidFill>
                         </a:rPr>
                         <a:t/>
@@ -5087,7 +5281,7 @@
                       <a:prstDash val="solid"/>
                     </a:lnB>
                     <a:solidFill>
-                      <a:srgbClr val="EEFBFC"/>
+                      <a:srgbClr val="EAFBFD"/>
                     </a:solidFill>
                   </a:tcPr>
                 </a:tc>
@@ -5100,7 +5294,7 @@
                       <a:r>
                         <a:rPr sz="1400" b="0">
                           <a:solidFill>
-                            <a:srgbClr val="2B2B2B"/>
+                            <a:srgbClr val="26231F"/>
                           </a:solidFill>
                         </a:rPr>
                         <a:t/>
@@ -5133,7 +5327,7 @@
                       <a:prstDash val="solid"/>
                     </a:lnB>
                     <a:solidFill>
-                      <a:srgbClr val="EEFBFC"/>
+                      <a:srgbClr val="EAFBFD"/>
                     </a:solidFill>
                   </a:tcPr>
                 </a:tc>
@@ -5148,7 +5342,7 @@
                       <a:r>
                         <a:rPr sz="1400" b="0">
                           <a:solidFill>
-                            <a:srgbClr val="2B2B2B"/>
+                            <a:srgbClr val="26231F"/>
                           </a:solidFill>
                         </a:rPr>
                         <a:t/>
@@ -5194,7 +5388,7 @@
                       <a:r>
                         <a:rPr sz="1400" b="0">
                           <a:solidFill>
-                            <a:srgbClr val="2B2B2B"/>
+                            <a:srgbClr val="26231F"/>
                           </a:solidFill>
                         </a:rPr>
                         <a:t/>
@@ -5240,7 +5434,7 @@
                       <a:r>
                         <a:rPr sz="1400" b="0">
                           <a:solidFill>
-                            <a:srgbClr val="2B2B2B"/>
+                            <a:srgbClr val="26231F"/>
                           </a:solidFill>
                         </a:rPr>
                         <a:t/>
@@ -5286,7 +5480,7 @@
                       <a:r>
                         <a:rPr sz="1400" b="0">
                           <a:solidFill>
-                            <a:srgbClr val="2B2B2B"/>
+                            <a:srgbClr val="26231F"/>
                           </a:solidFill>
                         </a:rPr>
                         <a:t/>
@@ -5332,7 +5526,7 @@
                       <a:r>
                         <a:rPr sz="1400" b="0">
                           <a:solidFill>
-                            <a:srgbClr val="2B2B2B"/>
+                            <a:srgbClr val="26231F"/>
                           </a:solidFill>
                         </a:rPr>
                         <a:t/>
@@ -5380,7 +5574,7 @@
                       <a:r>
                         <a:rPr sz="1400" b="0">
                           <a:solidFill>
-                            <a:srgbClr val="2B2B2B"/>
+                            <a:srgbClr val="26231F"/>
                           </a:solidFill>
                         </a:rPr>
                         <a:t/>
@@ -5413,7 +5607,7 @@
                       <a:prstDash val="solid"/>
                     </a:lnB>
                     <a:solidFill>
-                      <a:srgbClr val="EEFBFC"/>
+                      <a:srgbClr val="EAFBFD"/>
                     </a:solidFill>
                   </a:tcPr>
                 </a:tc>
@@ -5426,7 +5620,7 @@
                       <a:r>
                         <a:rPr sz="1400" b="0">
                           <a:solidFill>
-                            <a:srgbClr val="2B2B2B"/>
+                            <a:srgbClr val="26231F"/>
                           </a:solidFill>
                         </a:rPr>
                         <a:t/>
@@ -5459,7 +5653,7 @@
                       <a:prstDash val="solid"/>
                     </a:lnB>
                     <a:solidFill>
-                      <a:srgbClr val="EEFBFC"/>
+                      <a:srgbClr val="EAFBFD"/>
                     </a:solidFill>
                   </a:tcPr>
                 </a:tc>
@@ -5472,7 +5666,7 @@
                       <a:r>
                         <a:rPr sz="1400" b="0">
                           <a:solidFill>
-                            <a:srgbClr val="2B2B2B"/>
+                            <a:srgbClr val="26231F"/>
                           </a:solidFill>
                         </a:rPr>
                         <a:t/>
@@ -5505,7 +5699,7 @@
                       <a:prstDash val="solid"/>
                     </a:lnB>
                     <a:solidFill>
-                      <a:srgbClr val="EEFBFC"/>
+                      <a:srgbClr val="EAFBFD"/>
                     </a:solidFill>
                   </a:tcPr>
                 </a:tc>
@@ -5518,7 +5712,7 @@
                       <a:r>
                         <a:rPr sz="1400" b="0">
                           <a:solidFill>
-                            <a:srgbClr val="2B2B2B"/>
+                            <a:srgbClr val="26231F"/>
                           </a:solidFill>
                         </a:rPr>
                         <a:t/>
@@ -5551,7 +5745,7 @@
                       <a:prstDash val="solid"/>
                     </a:lnB>
                     <a:solidFill>
-                      <a:srgbClr val="EEFBFC"/>
+                      <a:srgbClr val="EAFBFD"/>
                     </a:solidFill>
                   </a:tcPr>
                 </a:tc>
@@ -5564,7 +5758,7 @@
                       <a:r>
                         <a:rPr sz="1400" b="0">
                           <a:solidFill>
-                            <a:srgbClr val="2B2B2B"/>
+                            <a:srgbClr val="26231F"/>
                           </a:solidFill>
                         </a:rPr>
                         <a:t/>
@@ -5597,7 +5791,7 @@
                       <a:prstDash val="solid"/>
                     </a:lnB>
                     <a:solidFill>
-                      <a:srgbClr val="EEFBFC"/>
+                      <a:srgbClr val="EAFBFD"/>
                     </a:solidFill>
                   </a:tcPr>
                 </a:tc>
@@ -5612,7 +5806,7 @@
                       <a:r>
                         <a:rPr sz="1400" b="0">
                           <a:solidFill>
-                            <a:srgbClr val="2B2B2B"/>
+                            <a:srgbClr val="26231F"/>
                           </a:solidFill>
                         </a:rPr>
                         <a:t/>
@@ -5658,7 +5852,7 @@
                       <a:r>
                         <a:rPr sz="1400" b="0">
                           <a:solidFill>
-                            <a:srgbClr val="2B2B2B"/>
+                            <a:srgbClr val="26231F"/>
                           </a:solidFill>
                         </a:rPr>
                         <a:t/>
@@ -5704,7 +5898,7 @@
                       <a:r>
                         <a:rPr sz="1400" b="0">
                           <a:solidFill>
-                            <a:srgbClr val="2B2B2B"/>
+                            <a:srgbClr val="26231F"/>
                           </a:solidFill>
                         </a:rPr>
                         <a:t/>
@@ -5750,7 +5944,7 @@
                       <a:r>
                         <a:rPr sz="1400" b="0">
                           <a:solidFill>
-                            <a:srgbClr val="2B2B2B"/>
+                            <a:srgbClr val="26231F"/>
                           </a:solidFill>
                         </a:rPr>
                         <a:t/>
@@ -5796,7 +5990,7 @@
                       <a:r>
                         <a:rPr sz="1400" b="0">
                           <a:solidFill>
-                            <a:srgbClr val="2B2B2B"/>
+                            <a:srgbClr val="26231F"/>
                           </a:solidFill>
                         </a:rPr>
                         <a:t/>
@@ -5844,7 +6038,7 @@
                       <a:r>
                         <a:rPr sz="1400" b="0">
                           <a:solidFill>
-                            <a:srgbClr val="2B2B2B"/>
+                            <a:srgbClr val="26231F"/>
                           </a:solidFill>
                         </a:rPr>
                         <a:t/>
@@ -5877,7 +6071,7 @@
                       <a:prstDash val="solid"/>
                     </a:lnB>
                     <a:solidFill>
-                      <a:srgbClr val="EEFBFC"/>
+                      <a:srgbClr val="EAFBFD"/>
                     </a:solidFill>
                   </a:tcPr>
                 </a:tc>
@@ -5890,7 +6084,7 @@
                       <a:r>
                         <a:rPr sz="1400" b="0">
                           <a:solidFill>
-                            <a:srgbClr val="2B2B2B"/>
+                            <a:srgbClr val="26231F"/>
                           </a:solidFill>
                         </a:rPr>
                         <a:t/>
@@ -5923,7 +6117,7 @@
                       <a:prstDash val="solid"/>
                     </a:lnB>
                     <a:solidFill>
-                      <a:srgbClr val="EEFBFC"/>
+                      <a:srgbClr val="EAFBFD"/>
                     </a:solidFill>
                   </a:tcPr>
                 </a:tc>
@@ -5936,7 +6130,7 @@
                       <a:r>
                         <a:rPr sz="1400" b="0">
                           <a:solidFill>
-                            <a:srgbClr val="2B2B2B"/>
+                            <a:srgbClr val="26231F"/>
                           </a:solidFill>
                         </a:rPr>
                         <a:t/>
@@ -5969,7 +6163,7 @@
                       <a:prstDash val="solid"/>
                     </a:lnB>
                     <a:solidFill>
-                      <a:srgbClr val="EEFBFC"/>
+                      <a:srgbClr val="EAFBFD"/>
                     </a:solidFill>
                   </a:tcPr>
                 </a:tc>
@@ -5982,7 +6176,7 @@
                       <a:r>
                         <a:rPr sz="1400" b="0">
                           <a:solidFill>
-                            <a:srgbClr val="2B2B2B"/>
+                            <a:srgbClr val="26231F"/>
                           </a:solidFill>
                         </a:rPr>
                         <a:t/>
@@ -6015,7 +6209,7 @@
                       <a:prstDash val="solid"/>
                     </a:lnB>
                     <a:solidFill>
-                      <a:srgbClr val="EEFBFC"/>
+                      <a:srgbClr val="EAFBFD"/>
                     </a:solidFill>
                   </a:tcPr>
                 </a:tc>
@@ -6028,7 +6222,7 @@
                       <a:r>
                         <a:rPr sz="1400" b="0">
                           <a:solidFill>
-                            <a:srgbClr val="2B2B2B"/>
+                            <a:srgbClr val="26231F"/>
                           </a:solidFill>
                         </a:rPr>
                         <a:t/>
@@ -6061,7 +6255,7 @@
                       <a:prstDash val="solid"/>
                     </a:lnB>
                     <a:solidFill>
-                      <a:srgbClr val="EEFBFC"/>
+                      <a:srgbClr val="EAFBFD"/>
                     </a:solidFill>
                   </a:tcPr>
                 </a:tc>
@@ -6084,7 +6278,7 @@
     <p:bg>
       <p:bgPr>
         <a:solidFill>
-          <a:srgbClr val="EEFBFC"/>
+          <a:srgbClr val="D1F7FA"/>
         </a:solidFill>
         <a:effectLst/>
       </p:bgPr>
@@ -6104,46 +6298,84 @@
         </p:nvSpPr>
         <p:spPr>
           <a:xfrm>
-            <a:off x="256032" y="256032"/>
-            <a:ext cx="11679631" cy="6345936"/>
+            <a:off x="640080" y="566928"/>
+            <a:ext cx="10911535" cy="10972"/>
+          </a:xfrm>
+          <a:prstGeom prst="rect">
+            <a:avLst/>
+          </a:prstGeom>
+          <a:solidFill>
+            <a:srgbClr val="26231F"/>
+          </a:solidFill>
+          <a:ln>
+            <a:noFill/>
+          </a:ln>
+        </p:spPr>
+        <p:txBody>
+          <a:bodyPr rtlCol="0" anchor="ctr"/>
+          <a:lstStyle/>
+          <a:p>
+            <a:pPr algn="ctr"/>
+          </a:p>
+        </p:txBody>
+      </p:sp>
+      <p:sp>
+        <p:nvSpPr>
+          <p:cNvPr id="4" name="상단 라벨"/>
+          <p:cNvSpPr txBox="1"/>
+          <p:nvPr/>
+        </p:nvSpPr>
+        <p:spPr>
+          <a:xfrm>
+            <a:off x="640080" y="237744"/>
+            <a:ext cx="5486400" cy="274320"/>
           </a:xfrm>
           <a:prstGeom prst="rect">
             <a:avLst/>
           </a:prstGeom>
           <a:noFill/>
-          <a:ln w="28575">
-            <a:solidFill>
-              <a:srgbClr val="26B8C5"/>
-            </a:solidFill>
-          </a:ln>
-        </p:spPr>
-        <p:txBody>
-          <a:bodyPr rtlCol="0" anchor="ctr"/>
-          <a:lstStyle/>
-          <a:p>
-            <a:pPr algn="ctr"/>
-          </a:p>
-        </p:txBody>
-      </p:sp>
-      <p:sp>
-        <p:nvSpPr>
-          <p:cNvPr id="4" name="장식"/>
+        </p:spPr>
+        <p:txBody>
+          <a:bodyPr wrap="square" lIns="54864" rIns="54864" tIns="27432" bIns="27432" anchor="ctr">
+            <a:noAutofit/>
+          </a:bodyPr>
+          <a:lstStyle/>
+          <a:p>
+            <a:pPr algn="l">
+              <a:lnSpc>
+                <a:spcPct val="115000"/>
+              </a:lnSpc>
+            </a:pPr>
+            <a:r>
+              <a:rPr sz="900" b="1" i="0" spc="250">
+                <a:solidFill>
+                  <a:srgbClr val="26231F"/>
+                </a:solidFill>
+              </a:rPr>
+              <a:t>INSURANCE CHECK</a:t>
+            </a:r>
+          </a:p>
+        </p:txBody>
+      </p:sp>
+      <p:sp>
+        <p:nvSpPr>
+          <p:cNvPr id="5" name="포인트"/>
           <p:cNvSpPr/>
           <p:nvPr/>
         </p:nvSpPr>
         <p:spPr>
           <a:xfrm>
-            <a:off x="384048" y="384048"/>
-            <a:ext cx="11423599" cy="6089904"/>
-          </a:xfrm>
-          <a:prstGeom prst="rect">
+            <a:off x="11204143" y="246888"/>
+            <a:ext cx="237744" cy="237744"/>
+          </a:xfrm>
+          <a:prstGeom prst="star4">
             <a:avLst/>
           </a:prstGeom>
-          <a:noFill/>
-          <a:ln w="9525">
-            <a:solidFill>
-              <a:srgbClr val="D1F7FA"/>
-            </a:solidFill>
+          <a:solidFill>
+            <a:srgbClr val="7BE0EA"/>
+          </a:solidFill>
+          <a:ln>
+            <a:noFill/>
           </a:ln>
         </p:spPr>
         <p:txBody>
@@ -6166,8 +6398,8 @@
         </p:nvSpPr>
         <p:spPr>
           <a:xfrm>
-            <a:off x="822960" y="548640"/>
-            <a:ext cx="9265615" cy="822960"/>
+            <a:off x="640080" y="731520"/>
+            <a:ext cx="10911535" cy="822960"/>
           </a:xfrm>
         </p:spPr>
         <p:txBody>
@@ -6184,7 +6416,7 @@
             <a:r>
               <a:rPr sz="3000" b="1" i="0">
                 <a:solidFill>
-                  <a:srgbClr val="11595F"/>
+                  <a:srgbClr val="26231F"/>
                 </a:solidFill>
               </a:rPr>
               <a:t>보장 항목 체크</a:t>
@@ -6194,15 +6426,15 @@
       </p:sp>
       <p:graphicFrame>
         <p:nvGraphicFramePr>
-          <p:cNvPr id="5" name="표"/>
+          <p:cNvPr id="6" name="표"/>
           <p:cNvGraphicFramePr>
             <a:graphicFrameLocks noGrp="1"/>
           </p:cNvGraphicFramePr>
           <p:nvPr/>
         </p:nvGraphicFramePr>
         <p:xfrm>
-          <a:off x="822960" y="1554480"/>
-          <a:ext cx="10545774" cy="4773168"/>
+          <a:off x="640080" y="1783080"/>
+          <a:ext cx="10911534" cy="4773168"/>
         </p:xfrm>
         <a:graphic>
           <a:graphicData uri="http://schemas.openxmlformats.org/drawingml/2006/table">
@@ -6212,9 +6444,9 @@
               </a:tblPr>
               <a:tblGrid>
                 <a:gridCol w="3657600"/>
-                <a:gridCol w="2296058"/>
-                <a:gridCol w="2296058"/>
-                <a:gridCol w="2296058"/>
+                <a:gridCol w="2417978"/>
+                <a:gridCol w="2417978"/>
+                <a:gridCol w="2417978"/>
               </a:tblGrid>
               <a:tr h="530352">
                 <a:tc>
@@ -6226,7 +6458,7 @@
                       <a:r>
                         <a:rPr sz="1400" b="1">
                           <a:solidFill>
-                            <a:srgbClr val="FFFFFF"/>
+                            <a:srgbClr val="26231F"/>
                           </a:solidFill>
                         </a:rPr>
                         <a:t>보장 항목</a:t>
@@ -6236,30 +6468,30 @@
                   <a:tcPr anchor="ctr" marL="73152" marR="73152">
                     <a:lnL w="9525" cap="flat" cmpd="sng" algn="ctr">
                       <a:solidFill>
-                        <a:srgbClr val="26B8C5"/>
+                        <a:srgbClr val="7BE0EA"/>
                       </a:solidFill>
                       <a:prstDash val="solid"/>
                     </a:lnL>
                     <a:lnR w="9525" cap="flat" cmpd="sng" algn="ctr">
                       <a:solidFill>
-                        <a:srgbClr val="26B8C5"/>
+                        <a:srgbClr val="7BE0EA"/>
                       </a:solidFill>
                       <a:prstDash val="solid"/>
                     </a:lnR>
                     <a:lnT w="9525" cap="flat" cmpd="sng" algn="ctr">
                       <a:solidFill>
-                        <a:srgbClr val="26B8C5"/>
+                        <a:srgbClr val="7BE0EA"/>
                       </a:solidFill>
                       <a:prstDash val="solid"/>
                     </a:lnT>
                     <a:lnB w="9525" cap="flat" cmpd="sng" algn="ctr">
                       <a:solidFill>
-                        <a:srgbClr val="26B8C5"/>
+                        <a:srgbClr val="7BE0EA"/>
                       </a:solidFill>
                       <a:prstDash val="solid"/>
                     </a:lnB>
                     <a:solidFill>
-                      <a:srgbClr val="26B8C5"/>
+                      <a:srgbClr val="7BE0EA"/>
                     </a:solidFill>
                   </a:tcPr>
                 </a:tc>
@@ -6272,7 +6504,7 @@
                       <a:r>
                         <a:rPr sz="1400" b="1">
                           <a:solidFill>
-                            <a:srgbClr val="FFFFFF"/>
+                            <a:srgbClr val="26231F"/>
                           </a:solidFill>
                         </a:rPr>
                         <a:t>가입 확인</a:t>
@@ -6282,30 +6514,30 @@
                   <a:tcPr anchor="ctr" marL="73152" marR="73152">
                     <a:lnL w="9525" cap="flat" cmpd="sng" algn="ctr">
                       <a:solidFill>
-                        <a:srgbClr val="26B8C5"/>
+                        <a:srgbClr val="7BE0EA"/>
                       </a:solidFill>
                       <a:prstDash val="solid"/>
                     </a:lnL>
                     <a:lnR w="9525" cap="flat" cmpd="sng" algn="ctr">
                       <a:solidFill>
-                        <a:srgbClr val="26B8C5"/>
+                        <a:srgbClr val="7BE0EA"/>
                       </a:solidFill>
                       <a:prstDash val="solid"/>
                     </a:lnR>
                     <a:lnT w="9525" cap="flat" cmpd="sng" algn="ctr">
                       <a:solidFill>
-                        <a:srgbClr val="26B8C5"/>
+                        <a:srgbClr val="7BE0EA"/>
                       </a:solidFill>
                       <a:prstDash val="solid"/>
                     </a:lnT>
                     <a:lnB w="9525" cap="flat" cmpd="sng" algn="ctr">
                       <a:solidFill>
-                        <a:srgbClr val="26B8C5"/>
+                        <a:srgbClr val="7BE0EA"/>
                       </a:solidFill>
                       <a:prstDash val="solid"/>
                     </a:lnB>
                     <a:solidFill>
-                      <a:srgbClr val="26B8C5"/>
+                      <a:srgbClr val="7BE0EA"/>
                     </a:solidFill>
                   </a:tcPr>
                 </a:tc>
@@ -6318,7 +6550,7 @@
                       <a:r>
                         <a:rPr sz="1400" b="1">
                           <a:solidFill>
-                            <a:srgbClr val="FFFFFF"/>
+                            <a:srgbClr val="26231F"/>
                           </a:solidFill>
                         </a:rPr>
                         <a:t>확인 필요</a:t>
@@ -6328,30 +6560,30 @@
                   <a:tcPr anchor="ctr" marL="73152" marR="73152">
                     <a:lnL w="9525" cap="flat" cmpd="sng" algn="ctr">
                       <a:solidFill>
-                        <a:srgbClr val="26B8C5"/>
+                        <a:srgbClr val="7BE0EA"/>
                       </a:solidFill>
                       <a:prstDash val="solid"/>
                     </a:lnL>
                     <a:lnR w="9525" cap="flat" cmpd="sng" algn="ctr">
                       <a:solidFill>
-                        <a:srgbClr val="26B8C5"/>
+                        <a:srgbClr val="7BE0EA"/>
                       </a:solidFill>
                       <a:prstDash val="solid"/>
                     </a:lnR>
                     <a:lnT w="9525" cap="flat" cmpd="sng" algn="ctr">
                       <a:solidFill>
-                        <a:srgbClr val="26B8C5"/>
+                        <a:srgbClr val="7BE0EA"/>
                       </a:solidFill>
                       <a:prstDash val="solid"/>
                     </a:lnT>
                     <a:lnB w="9525" cap="flat" cmpd="sng" algn="ctr">
                       <a:solidFill>
-                        <a:srgbClr val="26B8C5"/>
+                        <a:srgbClr val="7BE0EA"/>
                       </a:solidFill>
                       <a:prstDash val="solid"/>
                     </a:lnB>
                     <a:solidFill>
-                      <a:srgbClr val="26B8C5"/>
+                      <a:srgbClr val="7BE0EA"/>
                     </a:solidFill>
                   </a:tcPr>
                 </a:tc>
@@ -6364,7 +6596,7 @@
                       <a:r>
                         <a:rPr sz="1400" b="1">
                           <a:solidFill>
-                            <a:srgbClr val="FFFFFF"/>
+                            <a:srgbClr val="26231F"/>
                           </a:solidFill>
                         </a:rPr>
                         <a:t>해당 없음</a:t>
@@ -6374,30 +6606,30 @@
                   <a:tcPr anchor="ctr" marL="73152" marR="73152">
                     <a:lnL w="9525" cap="flat" cmpd="sng" algn="ctr">
                       <a:solidFill>
-                        <a:srgbClr val="26B8C5"/>
+                        <a:srgbClr val="7BE0EA"/>
                       </a:solidFill>
                       <a:prstDash val="solid"/>
                     </a:lnL>
                     <a:lnR w="9525" cap="flat" cmpd="sng" algn="ctr">
                       <a:solidFill>
-                        <a:srgbClr val="26B8C5"/>
+                        <a:srgbClr val="7BE0EA"/>
                       </a:solidFill>
                       <a:prstDash val="solid"/>
                     </a:lnR>
                     <a:lnT w="9525" cap="flat" cmpd="sng" algn="ctr">
                       <a:solidFill>
-                        <a:srgbClr val="26B8C5"/>
+                        <a:srgbClr val="7BE0EA"/>
                       </a:solidFill>
                       <a:prstDash val="solid"/>
                     </a:lnT>
                     <a:lnB w="9525" cap="flat" cmpd="sng" algn="ctr">
                       <a:solidFill>
-                        <a:srgbClr val="26B8C5"/>
+                        <a:srgbClr val="7BE0EA"/>
                       </a:solidFill>
                       <a:prstDash val="solid"/>
                     </a:lnB>
                     <a:solidFill>
-                      <a:srgbClr val="26B8C5"/>
+                      <a:srgbClr val="7BE0EA"/>
                     </a:solidFill>
                   </a:tcPr>
                 </a:tc>
@@ -6412,7 +6644,7 @@
                       <a:r>
                         <a:rPr sz="1400" b="1">
                           <a:solidFill>
-                            <a:srgbClr val="11595F"/>
+                            <a:srgbClr val="274649"/>
                           </a:solidFill>
                         </a:rPr>
                         <a:t>사망·재해</a:t>
@@ -6458,7 +6690,7 @@
                       <a:r>
                         <a:rPr sz="1400" b="0">
                           <a:solidFill>
-                            <a:srgbClr val="2B2B2B"/>
+                            <a:srgbClr val="26231F"/>
                           </a:solidFill>
                         </a:rPr>
                         <a:t>□</a:t>
@@ -6504,7 +6736,7 @@
                       <a:r>
                         <a:rPr sz="1400" b="0">
                           <a:solidFill>
-                            <a:srgbClr val="2B2B2B"/>
+                            <a:srgbClr val="26231F"/>
                           </a:solidFill>
                         </a:rPr>
                         <a:t>□</a:t>
@@ -6550,7 +6782,7 @@
                       <a:r>
                         <a:rPr sz="1400" b="0">
                           <a:solidFill>
-                            <a:srgbClr val="2B2B2B"/>
+                            <a:srgbClr val="26231F"/>
                           </a:solidFill>
                         </a:rPr>
                         <a:t>□</a:t>
@@ -6598,7 +6830,7 @@
                       <a:r>
                         <a:rPr sz="1400" b="1">
                           <a:solidFill>
-                            <a:srgbClr val="11595F"/>
+                            <a:srgbClr val="274649"/>
                           </a:solidFill>
                         </a:rPr>
                         <a:t>질병 진단</a:t>
@@ -6644,7 +6876,7 @@
                       <a:r>
                         <a:rPr sz="1400" b="0">
                           <a:solidFill>
-                            <a:srgbClr val="2B2B2B"/>
+                            <a:srgbClr val="26231F"/>
                           </a:solidFill>
                         </a:rPr>
                         <a:t>□</a:t>
@@ -6677,7 +6909,7 @@
                       <a:prstDash val="solid"/>
                     </a:lnB>
                     <a:solidFill>
-                      <a:srgbClr val="EEFBFC"/>
+                      <a:srgbClr val="EAFBFD"/>
                     </a:solidFill>
                   </a:tcPr>
                 </a:tc>
@@ -6690,7 +6922,7 @@
                       <a:r>
                         <a:rPr sz="1400" b="0">
                           <a:solidFill>
-                            <a:srgbClr val="2B2B2B"/>
+                            <a:srgbClr val="26231F"/>
                           </a:solidFill>
                         </a:rPr>
                         <a:t>□</a:t>
@@ -6723,7 +6955,7 @@
                       <a:prstDash val="solid"/>
                     </a:lnB>
                     <a:solidFill>
-                      <a:srgbClr val="EEFBFC"/>
+                      <a:srgbClr val="EAFBFD"/>
                     </a:solidFill>
                   </a:tcPr>
                 </a:tc>
@@ -6736,7 +6968,7 @@
                       <a:r>
                         <a:rPr sz="1400" b="0">
                           <a:solidFill>
-                            <a:srgbClr val="2B2B2B"/>
+                            <a:srgbClr val="26231F"/>
                           </a:solidFill>
                         </a:rPr>
                         <a:t>□</a:t>
@@ -6769,7 +7001,7 @@
                       <a:prstDash val="solid"/>
                     </a:lnB>
                     <a:solidFill>
-                      <a:srgbClr val="EEFBFC"/>
+                      <a:srgbClr val="EAFBFD"/>
                     </a:solidFill>
                   </a:tcPr>
                 </a:tc>
@@ -6784,7 +7016,7 @@
                       <a:r>
                         <a:rPr sz="1400" b="1">
                           <a:solidFill>
-                            <a:srgbClr val="11595F"/>
+                            <a:srgbClr val="274649"/>
                           </a:solidFill>
                         </a:rPr>
                         <a:t>암</a:t>
@@ -6830,7 +7062,7 @@
                       <a:r>
                         <a:rPr sz="1400" b="0">
                           <a:solidFill>
-                            <a:srgbClr val="2B2B2B"/>
+                            <a:srgbClr val="26231F"/>
                           </a:solidFill>
                         </a:rPr>
                         <a:t>□</a:t>
@@ -6876,7 +7108,7 @@
                       <a:r>
                         <a:rPr sz="1400" b="0">
                           <a:solidFill>
-                            <a:srgbClr val="2B2B2B"/>
+                            <a:srgbClr val="26231F"/>
                           </a:solidFill>
                         </a:rPr>
                         <a:t>□</a:t>
@@ -6922,7 +7154,7 @@
                       <a:r>
                         <a:rPr sz="1400" b="0">
                           <a:solidFill>
-                            <a:srgbClr val="2B2B2B"/>
+                            <a:srgbClr val="26231F"/>
                           </a:solidFill>
                         </a:rPr>
                         <a:t>□</a:t>
@@ -6970,7 +7202,7 @@
                       <a:r>
                         <a:rPr sz="1400" b="1">
                           <a:solidFill>
-                            <a:srgbClr val="11595F"/>
+                            <a:srgbClr val="274649"/>
                           </a:solidFill>
                         </a:rPr>
                         <a:t>뇌·심장</a:t>
@@ -7016,7 +7248,7 @@
                       <a:r>
                         <a:rPr sz="1400" b="0">
                           <a:solidFill>
-                            <a:srgbClr val="2B2B2B"/>
+                            <a:srgbClr val="26231F"/>
                           </a:solidFill>
                         </a:rPr>
                         <a:t>□</a:t>
@@ -7049,7 +7281,7 @@
                       <a:prstDash val="solid"/>
                     </a:lnB>
                     <a:solidFill>
-                      <a:srgbClr val="EEFBFC"/>
+                      <a:srgbClr val="EAFBFD"/>
                     </a:solidFill>
                   </a:tcPr>
                 </a:tc>
@@ -7062,7 +7294,7 @@
                       <a:r>
                         <a:rPr sz="1400" b="0">
                           <a:solidFill>
-                            <a:srgbClr val="2B2B2B"/>
+                            <a:srgbClr val="26231F"/>
                           </a:solidFill>
                         </a:rPr>
                         <a:t>□</a:t>
@@ -7095,7 +7327,7 @@
                       <a:prstDash val="solid"/>
                     </a:lnB>
                     <a:solidFill>
-                      <a:srgbClr val="EEFBFC"/>
+                      <a:srgbClr val="EAFBFD"/>
                     </a:solidFill>
                   </a:tcPr>
                 </a:tc>
@@ -7108,7 +7340,7 @@
                       <a:r>
                         <a:rPr sz="1400" b="0">
                           <a:solidFill>
-                            <a:srgbClr val="2B2B2B"/>
+                            <a:srgbClr val="26231F"/>
                           </a:solidFill>
                         </a:rPr>
                         <a:t>□</a:t>
@@ -7141,7 +7373,7 @@
                       <a:prstDash val="solid"/>
                     </a:lnB>
                     <a:solidFill>
-                      <a:srgbClr val="EEFBFC"/>
+                      <a:srgbClr val="EAFBFD"/>
                     </a:solidFill>
                   </a:tcPr>
                 </a:tc>
@@ -7156,7 +7388,7 @@
                       <a:r>
                         <a:rPr sz="1400" b="1">
                           <a:solidFill>
-                            <a:srgbClr val="11595F"/>
+                            <a:srgbClr val="274649"/>
                           </a:solidFill>
                         </a:rPr>
                         <a:t>입원·수술</a:t>
@@ -7202,7 +7434,7 @@
                       <a:r>
                         <a:rPr sz="1400" b="0">
                           <a:solidFill>
-                            <a:srgbClr val="2B2B2B"/>
+                            <a:srgbClr val="26231F"/>
                           </a:solidFill>
                         </a:rPr>
                         <a:t>□</a:t>
@@ -7248,7 +7480,7 @@
                       <a:r>
                         <a:rPr sz="1400" b="0">
                           <a:solidFill>
-                            <a:srgbClr val="2B2B2B"/>
+                            <a:srgbClr val="26231F"/>
                           </a:solidFill>
                         </a:rPr>
                         <a:t>□</a:t>
@@ -7294,7 +7526,7 @@
                       <a:r>
                         <a:rPr sz="1400" b="0">
                           <a:solidFill>
-                            <a:srgbClr val="2B2B2B"/>
+                            <a:srgbClr val="26231F"/>
                           </a:solidFill>
                         </a:rPr>
                         <a:t>□</a:t>
@@ -7342,7 +7574,7 @@
                       <a:r>
                         <a:rPr sz="1400" b="1">
                           <a:solidFill>
-                            <a:srgbClr val="11595F"/>
+                            <a:srgbClr val="274649"/>
                           </a:solidFill>
                         </a:rPr>
                         <a:t>상해</a:t>
@@ -7388,7 +7620,7 @@
                       <a:r>
                         <a:rPr sz="1400" b="0">
                           <a:solidFill>
-                            <a:srgbClr val="2B2B2B"/>
+                            <a:srgbClr val="26231F"/>
                           </a:solidFill>
                         </a:rPr>
                         <a:t>□</a:t>
@@ -7421,7 +7653,7 @@
                       <a:prstDash val="solid"/>
                     </a:lnB>
                     <a:solidFill>
-                      <a:srgbClr val="EEFBFC"/>
+                      <a:srgbClr val="EAFBFD"/>
                     </a:solidFill>
                   </a:tcPr>
                 </a:tc>
@@ -7434,7 +7666,7 @@
                       <a:r>
                         <a:rPr sz="1400" b="0">
                           <a:solidFill>
-                            <a:srgbClr val="2B2B2B"/>
+                            <a:srgbClr val="26231F"/>
                           </a:solidFill>
                         </a:rPr>
                         <a:t>□</a:t>
@@ -7467,7 +7699,7 @@
                       <a:prstDash val="solid"/>
                     </a:lnB>
                     <a:solidFill>
-                      <a:srgbClr val="EEFBFC"/>
+                      <a:srgbClr val="EAFBFD"/>
                     </a:solidFill>
                   </a:tcPr>
                 </a:tc>
@@ -7480,7 +7712,7 @@
                       <a:r>
                         <a:rPr sz="1400" b="0">
                           <a:solidFill>
-                            <a:srgbClr val="2B2B2B"/>
+                            <a:srgbClr val="26231F"/>
                           </a:solidFill>
                         </a:rPr>
                         <a:t>□</a:t>
@@ -7513,7 +7745,7 @@
                       <a:prstDash val="solid"/>
                     </a:lnB>
                     <a:solidFill>
-                      <a:srgbClr val="EEFBFC"/>
+                      <a:srgbClr val="EAFBFD"/>
                     </a:solidFill>
                   </a:tcPr>
                 </a:tc>
@@ -7528,7 +7760,7 @@
                       <a:r>
                         <a:rPr sz="1400" b="1">
                           <a:solidFill>
-                            <a:srgbClr val="11595F"/>
+                            <a:srgbClr val="274649"/>
                           </a:solidFill>
                         </a:rPr>
                         <a:t>실손의료</a:t>
@@ -7574,7 +7806,7 @@
                       <a:r>
                         <a:rPr sz="1400" b="0">
                           <a:solidFill>
-                            <a:srgbClr val="2B2B2B"/>
+                            <a:srgbClr val="26231F"/>
                           </a:solidFill>
                         </a:rPr>
                         <a:t>□</a:t>
@@ -7620,7 +7852,7 @@
                       <a:r>
                         <a:rPr sz="1400" b="0">
                           <a:solidFill>
-                            <a:srgbClr val="2B2B2B"/>
+                            <a:srgbClr val="26231F"/>
                           </a:solidFill>
                         </a:rPr>
                         <a:t>□</a:t>
@@ -7666,7 +7898,7 @@
                       <a:r>
                         <a:rPr sz="1400" b="0">
                           <a:solidFill>
-                            <a:srgbClr val="2B2B2B"/>
+                            <a:srgbClr val="26231F"/>
                           </a:solidFill>
                         </a:rPr>
                         <a:t>□</a:t>
@@ -7714,7 +7946,7 @@
                       <a:r>
                         <a:rPr sz="1400" b="1">
                           <a:solidFill>
-                            <a:srgbClr val="11595F"/>
+                            <a:srgbClr val="274649"/>
                           </a:solidFill>
                         </a:rPr>
                         <a:t>연금·노후자금</a:t>
@@ -7760,7 +7992,7 @@
                       <a:r>
                         <a:rPr sz="1400" b="0">
                           <a:solidFill>
-                            <a:srgbClr val="2B2B2B"/>
+                            <a:srgbClr val="26231F"/>
                           </a:solidFill>
                         </a:rPr>
                         <a:t>□</a:t>
@@ -7793,7 +8025,7 @@
                       <a:prstDash val="solid"/>
                     </a:lnB>
                     <a:solidFill>
-                      <a:srgbClr val="EEFBFC"/>
+                      <a:srgbClr val="EAFBFD"/>
                     </a:solidFill>
                   </a:tcPr>
                 </a:tc>
@@ -7806,7 +8038,7 @@
                       <a:r>
                         <a:rPr sz="1400" b="0">
                           <a:solidFill>
-                            <a:srgbClr val="2B2B2B"/>
+                            <a:srgbClr val="26231F"/>
                           </a:solidFill>
                         </a:rPr>
                         <a:t>□</a:t>
@@ -7839,7 +8071,7 @@
                       <a:prstDash val="solid"/>
                     </a:lnB>
                     <a:solidFill>
-                      <a:srgbClr val="EEFBFC"/>
+                      <a:srgbClr val="EAFBFD"/>
                     </a:solidFill>
                   </a:tcPr>
                 </a:tc>
@@ -7852,7 +8084,7 @@
                       <a:r>
                         <a:rPr sz="1400" b="0">
                           <a:solidFill>
-                            <a:srgbClr val="2B2B2B"/>
+                            <a:srgbClr val="26231F"/>
                           </a:solidFill>
                         </a:rPr>
                         <a:t>□</a:t>
@@ -7885,7 +8117,7 @@
                       <a:prstDash val="solid"/>
                     </a:lnB>
                     <a:solidFill>
-                      <a:srgbClr val="EEFBFC"/>
+                      <a:srgbClr val="EAFBFD"/>
                     </a:solidFill>
                   </a:tcPr>
                 </a:tc>
@@ -7908,7 +8140,7 @@
     <p:bg>
       <p:bgPr>
         <a:solidFill>
-          <a:srgbClr val="EEFBFC"/>
+          <a:srgbClr val="D1F7FA"/>
         </a:solidFill>
         <a:effectLst/>
       </p:bgPr>
@@ -7928,46 +8160,84 @@
         </p:nvSpPr>
         <p:spPr>
           <a:xfrm>
-            <a:off x="256032" y="256032"/>
-            <a:ext cx="11679631" cy="6345936"/>
+            <a:off x="640080" y="566928"/>
+            <a:ext cx="10911535" cy="10972"/>
+          </a:xfrm>
+          <a:prstGeom prst="rect">
+            <a:avLst/>
+          </a:prstGeom>
+          <a:solidFill>
+            <a:srgbClr val="26231F"/>
+          </a:solidFill>
+          <a:ln>
+            <a:noFill/>
+          </a:ln>
+        </p:spPr>
+        <p:txBody>
+          <a:bodyPr rtlCol="0" anchor="ctr"/>
+          <a:lstStyle/>
+          <a:p>
+            <a:pPr algn="ctr"/>
+          </a:p>
+        </p:txBody>
+      </p:sp>
+      <p:sp>
+        <p:nvSpPr>
+          <p:cNvPr id="4" name="상단 라벨"/>
+          <p:cNvSpPr txBox="1"/>
+          <p:nvPr/>
+        </p:nvSpPr>
+        <p:spPr>
+          <a:xfrm>
+            <a:off x="640080" y="237744"/>
+            <a:ext cx="5486400" cy="274320"/>
           </a:xfrm>
           <a:prstGeom prst="rect">
             <a:avLst/>
           </a:prstGeom>
           <a:noFill/>
-          <a:ln w="28575">
-            <a:solidFill>
-              <a:srgbClr val="26B8C5"/>
-            </a:solidFill>
-          </a:ln>
-        </p:spPr>
-        <p:txBody>
-          <a:bodyPr rtlCol="0" anchor="ctr"/>
-          <a:lstStyle/>
-          <a:p>
-            <a:pPr algn="ctr"/>
-          </a:p>
-        </p:txBody>
-      </p:sp>
-      <p:sp>
-        <p:nvSpPr>
-          <p:cNvPr id="4" name="장식"/>
+        </p:spPr>
+        <p:txBody>
+          <a:bodyPr wrap="square" lIns="54864" rIns="54864" tIns="27432" bIns="27432" anchor="ctr">
+            <a:noAutofit/>
+          </a:bodyPr>
+          <a:lstStyle/>
+          <a:p>
+            <a:pPr algn="l">
+              <a:lnSpc>
+                <a:spcPct val="115000"/>
+              </a:lnSpc>
+            </a:pPr>
+            <a:r>
+              <a:rPr sz="900" b="1" i="0" spc="250">
+                <a:solidFill>
+                  <a:srgbClr val="26231F"/>
+                </a:solidFill>
+              </a:rPr>
+              <a:t>INSURANCE CHECK</a:t>
+            </a:r>
+          </a:p>
+        </p:txBody>
+      </p:sp>
+      <p:sp>
+        <p:nvSpPr>
+          <p:cNvPr id="5" name="포인트"/>
           <p:cNvSpPr/>
           <p:nvPr/>
         </p:nvSpPr>
         <p:spPr>
           <a:xfrm>
-            <a:off x="384048" y="384048"/>
-            <a:ext cx="11423599" cy="6089904"/>
-          </a:xfrm>
-          <a:prstGeom prst="rect">
+            <a:off x="11204143" y="246888"/>
+            <a:ext cx="237744" cy="237744"/>
+          </a:xfrm>
+          <a:prstGeom prst="star4">
             <a:avLst/>
           </a:prstGeom>
-          <a:noFill/>
-          <a:ln w="9525">
-            <a:solidFill>
-              <a:srgbClr val="D1F7FA"/>
-            </a:solidFill>
+          <a:solidFill>
+            <a:srgbClr val="7BE0EA"/>
+          </a:solidFill>
+          <a:ln>
+            <a:noFill/>
           </a:ln>
         </p:spPr>
         <p:txBody>
@@ -7990,8 +8260,8 @@
         </p:nvSpPr>
         <p:spPr>
           <a:xfrm>
-            <a:off x="822960" y="548640"/>
-            <a:ext cx="9265615" cy="822960"/>
+            <a:off x="640080" y="731520"/>
+            <a:ext cx="10911535" cy="822960"/>
           </a:xfrm>
         </p:spPr>
         <p:txBody>
@@ -8008,7 +8278,7 @@
             <a:r>
               <a:rPr sz="3000" b="1" i="0">
                 <a:solidFill>
-                  <a:srgbClr val="11595F"/>
+                  <a:srgbClr val="26231F"/>
                 </a:solidFill>
               </a:rPr>
               <a:t>월 보험료 한눈에</a:t>
@@ -8018,27 +8288,25 @@
       </p:sp>
       <p:sp>
         <p:nvSpPr>
-          <p:cNvPr id="5" name="카드 1"/>
+          <p:cNvPr id="6" name="카드 1"/>
           <p:cNvSpPr/>
           <p:nvPr/>
         </p:nvSpPr>
         <p:spPr>
           <a:xfrm>
-            <a:off x="822960" y="1554480"/>
-            <a:ext cx="3362858" cy="2926080"/>
+            <a:off x="640080" y="1783080"/>
+            <a:ext cx="3484778" cy="2926080"/>
           </a:xfrm>
           <a:prstGeom prst="roundRect">
             <a:avLst>
-              <a:gd name="adj" fmla="val 8000"/>
+              <a:gd name="adj" fmla="val 4000"/>
             </a:avLst>
           </a:prstGeom>
           <a:solidFill>
-            <a:srgbClr val="EEFBFC"/>
+            <a:srgbClr val="EAFBFD"/>
           </a:solidFill>
-          <a:ln w="15875">
-            <a:solidFill>
-              <a:srgbClr val="D1F7FA"/>
-            </a:solidFill>
+          <a:ln>
+            <a:noFill/>
           </a:ln>
         </p:spPr>
         <p:txBody>
@@ -8051,20 +8319,49 @@
       </p:sp>
       <p:sp>
         <p:nvSpPr>
-          <p:cNvPr id="6" name="번호 1"/>
+          <p:cNvPr id="7" name="포인트 막대"/>
           <p:cNvSpPr/>
           <p:nvPr/>
         </p:nvSpPr>
         <p:spPr>
           <a:xfrm>
-            <a:off x="1005840" y="1737360"/>
+            <a:off x="640080" y="1892807"/>
+            <a:ext cx="54864" cy="2706624"/>
+          </a:xfrm>
+          <a:prstGeom prst="rect">
+            <a:avLst/>
+          </a:prstGeom>
+          <a:solidFill>
+            <a:srgbClr val="7BE0EA"/>
+          </a:solidFill>
+          <a:ln>
+            <a:noFill/>
+          </a:ln>
+        </p:spPr>
+        <p:txBody>
+          <a:bodyPr rtlCol="0" anchor="ctr"/>
+          <a:lstStyle/>
+          <a:p>
+            <a:pPr algn="ctr"/>
+          </a:p>
+        </p:txBody>
+      </p:sp>
+      <p:sp>
+        <p:nvSpPr>
+          <p:cNvPr id="8" name="번호 1"/>
+          <p:cNvSpPr/>
+          <p:nvPr/>
+        </p:nvSpPr>
+        <p:spPr>
+          <a:xfrm>
+            <a:off x="822959" y="1965960"/>
             <a:ext cx="457200" cy="457200"/>
           </a:xfrm>
           <a:prstGeom prst="ellipse">
             <a:avLst/>
           </a:prstGeom>
           <a:solidFill>
-            <a:srgbClr val="26B8C5"/>
+            <a:srgbClr val="7BE0EA"/>
           </a:solidFill>
           <a:ln>
             <a:noFill/>
@@ -8084,7 +8381,7 @@
             <a:r>
               <a:rPr sz="1600" b="1" i="0">
                 <a:solidFill>
-                  <a:srgbClr val="FFFFFF"/>
+                  <a:srgbClr val="26231F"/>
                 </a:solidFill>
               </a:rPr>
               <a:t>1</a:t>
@@ -8094,14 +8391,14 @@
       </p:sp>
       <p:sp>
         <p:nvSpPr>
-          <p:cNvPr id="7" name="TextBox 6"/>
+          <p:cNvPr id="9" name="TextBox 8"/>
           <p:cNvSpPr txBox="1"/>
           <p:nvPr/>
         </p:nvSpPr>
         <p:spPr>
           <a:xfrm>
-            <a:off x="960120" y="2331720"/>
-            <a:ext cx="3088538" cy="640080"/>
+            <a:off x="777240" y="2560320"/>
+            <a:ext cx="3210458" cy="640080"/>
           </a:xfrm>
           <a:prstGeom prst="rect">
             <a:avLst/>
@@ -8122,7 +8419,7 @@
             <a:r>
               <a:rPr sz="1700" b="1" i="0">
                 <a:solidFill>
-                  <a:srgbClr val="11595F"/>
+                  <a:srgbClr val="274649"/>
                 </a:solidFill>
               </a:rPr>
               <a:t>월 보험료 합계</a:t>
@@ -8132,14 +8429,14 @@
       </p:sp>
       <p:sp>
         <p:nvSpPr>
-          <p:cNvPr id="8" name="TextBox 7"/>
+          <p:cNvPr id="10" name="TextBox 9"/>
           <p:cNvSpPr txBox="1"/>
           <p:nvPr/>
         </p:nvSpPr>
         <p:spPr>
           <a:xfrm>
-            <a:off x="960120" y="3017520"/>
-            <a:ext cx="3088538" cy="1325880"/>
+            <a:off x="777240" y="3246120"/>
+            <a:ext cx="3210458" cy="1325880"/>
           </a:xfrm>
           <a:prstGeom prst="rect">
             <a:avLst/>
@@ -8160,7 +8457,7 @@
             <a:r>
               <a:rPr sz="3000" b="0" i="0">
                 <a:solidFill>
-                  <a:srgbClr val="2B2B2B"/>
+                  <a:srgbClr val="26231F"/>
                 </a:solidFill>
               </a:rPr>
               <a:t>0원</a:t>
@@ -8170,27 +8467,25 @@
       </p:sp>
       <p:sp>
         <p:nvSpPr>
-          <p:cNvPr id="9" name="카드 2"/>
+          <p:cNvPr id="11" name="카드 2"/>
           <p:cNvSpPr/>
           <p:nvPr/>
         </p:nvSpPr>
         <p:spPr>
           <a:xfrm>
-            <a:off x="4414418" y="1554480"/>
-            <a:ext cx="3362858" cy="2926080"/>
+            <a:off x="4353458" y="1783080"/>
+            <a:ext cx="3484778" cy="2926080"/>
           </a:xfrm>
           <a:prstGeom prst="roundRect">
             <a:avLst>
-              <a:gd name="adj" fmla="val 8000"/>
+              <a:gd name="adj" fmla="val 4000"/>
             </a:avLst>
           </a:prstGeom>
           <a:solidFill>
-            <a:srgbClr val="EEFBFC"/>
+            <a:srgbClr val="EAFBFD"/>
           </a:solidFill>
-          <a:ln w="15875">
-            <a:solidFill>
-              <a:srgbClr val="D1F7FA"/>
-            </a:solidFill>
+          <a:ln>
+            <a:noFill/>
           </a:ln>
         </p:spPr>
         <p:txBody>
@@ -8203,20 +8498,49 @@
       </p:sp>
       <p:sp>
         <p:nvSpPr>
-          <p:cNvPr id="10" name="번호 2"/>
+          <p:cNvPr id="12" name="포인트 막대"/>
           <p:cNvSpPr/>
           <p:nvPr/>
         </p:nvSpPr>
         <p:spPr>
           <a:xfrm>
-            <a:off x="4597298" y="1737360"/>
+            <a:off x="4353458" y="1892807"/>
+            <a:ext cx="54864" cy="2706624"/>
+          </a:xfrm>
+          <a:prstGeom prst="rect">
+            <a:avLst/>
+          </a:prstGeom>
+          <a:solidFill>
+            <a:srgbClr val="7BE0EA"/>
+          </a:solidFill>
+          <a:ln>
+            <a:noFill/>
+          </a:ln>
+        </p:spPr>
+        <p:txBody>
+          <a:bodyPr rtlCol="0" anchor="ctr"/>
+          <a:lstStyle/>
+          <a:p>
+            <a:pPr algn="ctr"/>
+          </a:p>
+        </p:txBody>
+      </p:sp>
+      <p:sp>
+        <p:nvSpPr>
+          <p:cNvPr id="13" name="번호 2"/>
+          <p:cNvSpPr/>
+          <p:nvPr/>
+        </p:nvSpPr>
+        <p:spPr>
+          <a:xfrm>
+            <a:off x="4536338" y="1965960"/>
             <a:ext cx="457200" cy="457200"/>
           </a:xfrm>
           <a:prstGeom prst="ellipse">
             <a:avLst/>
           </a:prstGeom>
           <a:solidFill>
-            <a:srgbClr val="26B8C5"/>
+            <a:srgbClr val="7BE0EA"/>
           </a:solidFill>
           <a:ln>
             <a:noFill/>
@@ -8236,7 +8560,7 @@
             <a:r>
               <a:rPr sz="1600" b="1" i="0">
                 <a:solidFill>
-                  <a:srgbClr val="FFFFFF"/>
+                  <a:srgbClr val="26231F"/>
                 </a:solidFill>
               </a:rPr>
               <a:t>2</a:t>
@@ -8246,14 +8570,14 @@
       </p:sp>
       <p:sp>
         <p:nvSpPr>
-          <p:cNvPr id="11" name="TextBox 10"/>
+          <p:cNvPr id="14" name="TextBox 13"/>
           <p:cNvSpPr txBox="1"/>
           <p:nvPr/>
         </p:nvSpPr>
         <p:spPr>
           <a:xfrm>
-            <a:off x="4551578" y="2331720"/>
-            <a:ext cx="3088538" cy="640080"/>
+            <a:off x="4490618" y="2560320"/>
+            <a:ext cx="3210458" cy="640080"/>
           </a:xfrm>
           <a:prstGeom prst="rect">
             <a:avLst/>
@@ -8274,7 +8598,7 @@
             <a:r>
               <a:rPr sz="1700" b="1" i="0">
                 <a:solidFill>
-                  <a:srgbClr val="11595F"/>
+                  <a:srgbClr val="274649"/>
                 </a:solidFill>
               </a:rPr>
               <a:t>연 보험료 합계</a:t>
@@ -8284,14 +8608,14 @@
       </p:sp>
       <p:sp>
         <p:nvSpPr>
-          <p:cNvPr id="12" name="TextBox 11"/>
+          <p:cNvPr id="15" name="TextBox 14"/>
           <p:cNvSpPr txBox="1"/>
           <p:nvPr/>
         </p:nvSpPr>
         <p:spPr>
           <a:xfrm>
-            <a:off x="4551578" y="3017520"/>
-            <a:ext cx="3088538" cy="1325880"/>
+            <a:off x="4490618" y="3246120"/>
+            <a:ext cx="3210458" cy="1325880"/>
           </a:xfrm>
           <a:prstGeom prst="rect">
             <a:avLst/>
@@ -8312,7 +8636,7 @@
             <a:r>
               <a:rPr sz="3000" b="0" i="0">
                 <a:solidFill>
-                  <a:srgbClr val="2B2B2B"/>
+                  <a:srgbClr val="26231F"/>
                 </a:solidFill>
               </a:rPr>
               <a:t>0원</a:t>
@@ -8322,27 +8646,25 @@
       </p:sp>
       <p:sp>
         <p:nvSpPr>
-          <p:cNvPr id="13" name="카드 3"/>
+          <p:cNvPr id="16" name="카드 3"/>
           <p:cNvSpPr/>
           <p:nvPr/>
         </p:nvSpPr>
         <p:spPr>
           <a:xfrm>
-            <a:off x="8005876" y="1554480"/>
-            <a:ext cx="3362858" cy="2926080"/>
+            <a:off x="8066836" y="1783080"/>
+            <a:ext cx="3484778" cy="2926080"/>
           </a:xfrm>
           <a:prstGeom prst="roundRect">
             <a:avLst>
-              <a:gd name="adj" fmla="val 8000"/>
+              <a:gd name="adj" fmla="val 4000"/>
             </a:avLst>
           </a:prstGeom>
           <a:solidFill>
-            <a:srgbClr val="EEFBFC"/>
+            <a:srgbClr val="EAFBFD"/>
           </a:solidFill>
-          <a:ln w="15875">
-            <a:solidFill>
-              <a:srgbClr val="D1F7FA"/>
-            </a:solidFill>
+          <a:ln>
+            <a:noFill/>
           </a:ln>
         </p:spPr>
         <p:txBody>
@@ -8355,20 +8677,49 @@
       </p:sp>
       <p:sp>
         <p:nvSpPr>
-          <p:cNvPr id="14" name="번호 3"/>
+          <p:cNvPr id="17" name="포인트 막대"/>
           <p:cNvSpPr/>
           <p:nvPr/>
         </p:nvSpPr>
         <p:spPr>
           <a:xfrm>
-            <a:off x="8188756" y="1737360"/>
+            <a:off x="8066836" y="1892807"/>
+            <a:ext cx="54864" cy="2706624"/>
+          </a:xfrm>
+          <a:prstGeom prst="rect">
+            <a:avLst/>
+          </a:prstGeom>
+          <a:solidFill>
+            <a:srgbClr val="7BE0EA"/>
+          </a:solidFill>
+          <a:ln>
+            <a:noFill/>
+          </a:ln>
+        </p:spPr>
+        <p:txBody>
+          <a:bodyPr rtlCol="0" anchor="ctr"/>
+          <a:lstStyle/>
+          <a:p>
+            <a:pPr algn="ctr"/>
+          </a:p>
+        </p:txBody>
+      </p:sp>
+      <p:sp>
+        <p:nvSpPr>
+          <p:cNvPr id="18" name="번호 3"/>
+          <p:cNvSpPr/>
+          <p:nvPr/>
+        </p:nvSpPr>
+        <p:spPr>
+          <a:xfrm>
+            <a:off x="8249716" y="1965960"/>
             <a:ext cx="457200" cy="457200"/>
           </a:xfrm>
           <a:prstGeom prst="ellipse">
             <a:avLst/>
           </a:prstGeom>
           <a:solidFill>
-            <a:srgbClr val="26B8C5"/>
+            <a:srgbClr val="7BE0EA"/>
           </a:solidFill>
           <a:ln>
             <a:noFill/>
@@ -8388,7 +8739,7 @@
             <a:r>
               <a:rPr sz="1600" b="1" i="0">
                 <a:solidFill>
-                  <a:srgbClr val="FFFFFF"/>
+                  <a:srgbClr val="26231F"/>
                 </a:solidFill>
               </a:rPr>
               <a:t>3</a:t>
@@ -8398,14 +8749,14 @@
       </p:sp>
       <p:sp>
         <p:nvSpPr>
-          <p:cNvPr id="15" name="TextBox 14"/>
+          <p:cNvPr id="19" name="TextBox 18"/>
           <p:cNvSpPr txBox="1"/>
           <p:nvPr/>
         </p:nvSpPr>
         <p:spPr>
           <a:xfrm>
-            <a:off x="8143036" y="2331720"/>
-            <a:ext cx="3088538" cy="640080"/>
+            <a:off x="8203996" y="2560320"/>
+            <a:ext cx="3210458" cy="640080"/>
           </a:xfrm>
           <a:prstGeom prst="rect">
             <a:avLst/>
@@ -8426,7 +8777,7 @@
             <a:r>
               <a:rPr sz="1700" b="1" i="0">
                 <a:solidFill>
-                  <a:srgbClr val="11595F"/>
+                  <a:srgbClr val="274649"/>
                 </a:solidFill>
               </a:rPr>
               <a:t>월 소득 대비</a:t>
@@ -8436,14 +8787,14 @@
       </p:sp>
       <p:sp>
         <p:nvSpPr>
-          <p:cNvPr id="16" name="TextBox 15"/>
+          <p:cNvPr id="20" name="TextBox 19"/>
           <p:cNvSpPr txBox="1"/>
           <p:nvPr/>
         </p:nvSpPr>
         <p:spPr>
           <a:xfrm>
-            <a:off x="8143036" y="3017520"/>
-            <a:ext cx="3088538" cy="1325880"/>
+            <a:off x="8203996" y="3246120"/>
+            <a:ext cx="3210458" cy="1325880"/>
           </a:xfrm>
           <a:prstGeom prst="rect">
             <a:avLst/>
@@ -8464,7 +8815,7 @@
             <a:r>
               <a:rPr sz="3000" b="0" i="0">
                 <a:solidFill>
-                  <a:srgbClr val="2B2B2B"/>
+                  <a:srgbClr val="26231F"/>
                 </a:solidFill>
               </a:rPr>
               <a:t>0 %</a:t>
@@ -8474,14 +8825,14 @@
       </p:sp>
       <p:sp>
         <p:nvSpPr>
-          <p:cNvPr id="17" name="안내"/>
+          <p:cNvPr id="21" name="안내"/>
           <p:cNvSpPr txBox="1"/>
           <p:nvPr/>
         </p:nvSpPr>
         <p:spPr>
           <a:xfrm>
-            <a:off x="822960" y="4663440"/>
-            <a:ext cx="10545775" cy="365760"/>
+            <a:off x="640080" y="4892040"/>
+            <a:ext cx="10911535" cy="365760"/>
           </a:xfrm>
           <a:prstGeom prst="rect">
             <a:avLst/>
@@ -8524,7 +8875,7 @@
     <p:bg>
       <p:bgPr>
         <a:solidFill>
-          <a:srgbClr val="EEFBFC"/>
+          <a:srgbClr val="D1F7FA"/>
         </a:solidFill>
         <a:effectLst/>
       </p:bgPr>
@@ -8544,46 +8895,84 @@
         </p:nvSpPr>
         <p:spPr>
           <a:xfrm>
-            <a:off x="256032" y="256032"/>
-            <a:ext cx="11679631" cy="6345936"/>
+            <a:off x="640080" y="566928"/>
+            <a:ext cx="10911535" cy="10972"/>
+          </a:xfrm>
+          <a:prstGeom prst="rect">
+            <a:avLst/>
+          </a:prstGeom>
+          <a:solidFill>
+            <a:srgbClr val="26231F"/>
+          </a:solidFill>
+          <a:ln>
+            <a:noFill/>
+          </a:ln>
+        </p:spPr>
+        <p:txBody>
+          <a:bodyPr rtlCol="0" anchor="ctr"/>
+          <a:lstStyle/>
+          <a:p>
+            <a:pPr algn="ctr"/>
+          </a:p>
+        </p:txBody>
+      </p:sp>
+      <p:sp>
+        <p:nvSpPr>
+          <p:cNvPr id="4" name="상단 라벨"/>
+          <p:cNvSpPr txBox="1"/>
+          <p:nvPr/>
+        </p:nvSpPr>
+        <p:spPr>
+          <a:xfrm>
+            <a:off x="640080" y="237744"/>
+            <a:ext cx="5486400" cy="274320"/>
           </a:xfrm>
           <a:prstGeom prst="rect">
             <a:avLst/>
           </a:prstGeom>
           <a:noFill/>
-          <a:ln w="28575">
-            <a:solidFill>
-              <a:srgbClr val="26B8C5"/>
-            </a:solidFill>
-          </a:ln>
-        </p:spPr>
-        <p:txBody>
-          <a:bodyPr rtlCol="0" anchor="ctr"/>
-          <a:lstStyle/>
-          <a:p>
-            <a:pPr algn="ctr"/>
-          </a:p>
-        </p:txBody>
-      </p:sp>
-      <p:sp>
-        <p:nvSpPr>
-          <p:cNvPr id="4" name="장식"/>
+        </p:spPr>
+        <p:txBody>
+          <a:bodyPr wrap="square" lIns="54864" rIns="54864" tIns="27432" bIns="27432" anchor="ctr">
+            <a:noAutofit/>
+          </a:bodyPr>
+          <a:lstStyle/>
+          <a:p>
+            <a:pPr algn="l">
+              <a:lnSpc>
+                <a:spcPct val="115000"/>
+              </a:lnSpc>
+            </a:pPr>
+            <a:r>
+              <a:rPr sz="900" b="1" i="0" spc="250">
+                <a:solidFill>
+                  <a:srgbClr val="26231F"/>
+                </a:solidFill>
+              </a:rPr>
+              <a:t>INSURANCE CHECK</a:t>
+            </a:r>
+          </a:p>
+        </p:txBody>
+      </p:sp>
+      <p:sp>
+        <p:nvSpPr>
+          <p:cNvPr id="5" name="포인트"/>
           <p:cNvSpPr/>
           <p:nvPr/>
         </p:nvSpPr>
         <p:spPr>
           <a:xfrm>
-            <a:off x="384048" y="384048"/>
-            <a:ext cx="11423599" cy="6089904"/>
-          </a:xfrm>
-          <a:prstGeom prst="rect">
+            <a:off x="11204143" y="246888"/>
+            <a:ext cx="237744" cy="237744"/>
+          </a:xfrm>
+          <a:prstGeom prst="star4">
             <a:avLst/>
           </a:prstGeom>
-          <a:noFill/>
-          <a:ln w="9525">
-            <a:solidFill>
-              <a:srgbClr val="D1F7FA"/>
-            </a:solidFill>
+          <a:solidFill>
+            <a:srgbClr val="7BE0EA"/>
+          </a:solidFill>
+          <a:ln>
+            <a:noFill/>
           </a:ln>
         </p:spPr>
         <p:txBody>
@@ -8606,8 +8995,8 @@
         </p:nvSpPr>
         <p:spPr>
           <a:xfrm>
-            <a:off x="822960" y="548640"/>
-            <a:ext cx="9265615" cy="822960"/>
+            <a:off x="640080" y="731520"/>
+            <a:ext cx="10911535" cy="822960"/>
           </a:xfrm>
         </p:spPr>
         <p:txBody>
@@ -8624,7 +9013,7 @@
             <a:r>
               <a:rPr sz="3000" b="1" i="0">
                 <a:solidFill>
-                  <a:srgbClr val="11595F"/>
+                  <a:srgbClr val="26231F"/>
                 </a:solidFill>
               </a:rPr>
               <a:t>점검 메모와 다음 할 일</a:t>
@@ -8634,27 +9023,25 @@
       </p:sp>
       <p:sp>
         <p:nvSpPr>
-          <p:cNvPr id="5" name="카드 1"/>
+          <p:cNvPr id="6" name="카드 1"/>
           <p:cNvSpPr/>
           <p:nvPr/>
         </p:nvSpPr>
         <p:spPr>
           <a:xfrm>
-            <a:off x="822960" y="1554480"/>
-            <a:ext cx="3362858" cy="3977639"/>
+            <a:off x="640080" y="1783080"/>
+            <a:ext cx="3484778" cy="3931920"/>
           </a:xfrm>
           <a:prstGeom prst="roundRect">
             <a:avLst>
-              <a:gd name="adj" fmla="val 8000"/>
+              <a:gd name="adj" fmla="val 4000"/>
             </a:avLst>
           </a:prstGeom>
           <a:solidFill>
-            <a:srgbClr val="EEFBFC"/>
+            <a:srgbClr val="EAFBFD"/>
           </a:solidFill>
-          <a:ln w="15875">
-            <a:solidFill>
-              <a:srgbClr val="D1F7FA"/>
-            </a:solidFill>
+          <a:ln>
+            <a:noFill/>
           </a:ln>
         </p:spPr>
         <p:txBody>
@@ -8667,20 +9054,49 @@
       </p:sp>
       <p:sp>
         <p:nvSpPr>
-          <p:cNvPr id="6" name="번호 1"/>
+          <p:cNvPr id="7" name="포인트 막대"/>
           <p:cNvSpPr/>
           <p:nvPr/>
         </p:nvSpPr>
         <p:spPr>
           <a:xfrm>
-            <a:off x="1005840" y="1737360"/>
+            <a:off x="640080" y="1892807"/>
+            <a:ext cx="54864" cy="3712463"/>
+          </a:xfrm>
+          <a:prstGeom prst="rect">
+            <a:avLst/>
+          </a:prstGeom>
+          <a:solidFill>
+            <a:srgbClr val="7BE0EA"/>
+          </a:solidFill>
+          <a:ln>
+            <a:noFill/>
+          </a:ln>
+        </p:spPr>
+        <p:txBody>
+          <a:bodyPr rtlCol="0" anchor="ctr"/>
+          <a:lstStyle/>
+          <a:p>
+            <a:pPr algn="ctr"/>
+          </a:p>
+        </p:txBody>
+      </p:sp>
+      <p:sp>
+        <p:nvSpPr>
+          <p:cNvPr id="8" name="번호 1"/>
+          <p:cNvSpPr/>
+          <p:nvPr/>
+        </p:nvSpPr>
+        <p:spPr>
+          <a:xfrm>
+            <a:off x="822959" y="1965960"/>
             <a:ext cx="457200" cy="457200"/>
           </a:xfrm>
           <a:prstGeom prst="ellipse">
             <a:avLst/>
           </a:prstGeom>
           <a:solidFill>
-            <a:srgbClr val="26B8C5"/>
+            <a:srgbClr val="7BE0EA"/>
           </a:solidFill>
           <a:ln>
             <a:noFill/>
@@ -8700,7 +9116,7 @@
             <a:r>
               <a:rPr sz="1600" b="1" i="0">
                 <a:solidFill>
-                  <a:srgbClr val="FFFFFF"/>
+                  <a:srgbClr val="26231F"/>
                 </a:solidFill>
               </a:rPr>
               <a:t>1</a:t>
@@ -8710,14 +9126,14 @@
       </p:sp>
       <p:sp>
         <p:nvSpPr>
-          <p:cNvPr id="7" name="TextBox 6"/>
+          <p:cNvPr id="9" name="TextBox 8"/>
           <p:cNvSpPr txBox="1"/>
           <p:nvPr/>
         </p:nvSpPr>
         <p:spPr>
           <a:xfrm>
-            <a:off x="960120" y="2331720"/>
-            <a:ext cx="3088538" cy="640080"/>
+            <a:off x="777240" y="2560320"/>
+            <a:ext cx="3210458" cy="640080"/>
           </a:xfrm>
           <a:prstGeom prst="rect">
             <a:avLst/>
@@ -8738,7 +9154,7 @@
             <a:r>
               <a:rPr sz="1800" b="1" i="0">
                 <a:solidFill>
-                  <a:srgbClr val="11595F"/>
+                  <a:srgbClr val="274649"/>
                 </a:solidFill>
               </a:rPr>
               <a:t>확인할 것</a:t>
@@ -8748,14 +9164,14 @@
       </p:sp>
       <p:sp>
         <p:nvSpPr>
-          <p:cNvPr id="8" name="TextBox 7"/>
+          <p:cNvPr id="10" name="TextBox 9"/>
           <p:cNvSpPr txBox="1"/>
           <p:nvPr/>
         </p:nvSpPr>
         <p:spPr>
           <a:xfrm>
-            <a:off x="960120" y="3017520"/>
-            <a:ext cx="3088538" cy="2377439"/>
+            <a:off x="777240" y="3246120"/>
+            <a:ext cx="3210458" cy="2331720"/>
           </a:xfrm>
           <a:prstGeom prst="rect">
             <a:avLst/>
@@ -8776,7 +9192,7 @@
             <a:r>
               <a:rPr sz="1500" b="0" i="0">
                 <a:solidFill>
-                  <a:srgbClr val="2B2B2B"/>
+                  <a:srgbClr val="26231F"/>
                 </a:solidFill>
               </a:rPr>
               <a:t>내용을 입력하세요</a:t>
@@ -8786,27 +9202,25 @@
       </p:sp>
       <p:sp>
         <p:nvSpPr>
-          <p:cNvPr id="9" name="카드 2"/>
+          <p:cNvPr id="11" name="카드 2"/>
           <p:cNvSpPr/>
           <p:nvPr/>
         </p:nvSpPr>
         <p:spPr>
           <a:xfrm>
-            <a:off x="4414418" y="1554480"/>
-            <a:ext cx="3362858" cy="3977639"/>
+            <a:off x="4353458" y="1783080"/>
+            <a:ext cx="3484778" cy="3931920"/>
           </a:xfrm>
           <a:prstGeom prst="roundRect">
             <a:avLst>
-              <a:gd name="adj" fmla="val 8000"/>
+              <a:gd name="adj" fmla="val 4000"/>
             </a:avLst>
           </a:prstGeom>
           <a:solidFill>
-            <a:srgbClr val="EEFBFC"/>
+            <a:srgbClr val="EAFBFD"/>
           </a:solidFill>
-          <a:ln w="15875">
-            <a:solidFill>
-              <a:srgbClr val="D1F7FA"/>
-            </a:solidFill>
+          <a:ln>
+            <a:noFill/>
           </a:ln>
         </p:spPr>
         <p:txBody>
@@ -8819,20 +9233,49 @@
       </p:sp>
       <p:sp>
         <p:nvSpPr>
-          <p:cNvPr id="10" name="번호 2"/>
+          <p:cNvPr id="12" name="포인트 막대"/>
           <p:cNvSpPr/>
           <p:nvPr/>
         </p:nvSpPr>
         <p:spPr>
           <a:xfrm>
-            <a:off x="4597298" y="1737360"/>
+            <a:off x="4353458" y="1892807"/>
+            <a:ext cx="54864" cy="3712463"/>
+          </a:xfrm>
+          <a:prstGeom prst="rect">
+            <a:avLst/>
+          </a:prstGeom>
+          <a:solidFill>
+            <a:srgbClr val="7BE0EA"/>
+          </a:solidFill>
+          <a:ln>
+            <a:noFill/>
+          </a:ln>
+        </p:spPr>
+        <p:txBody>
+          <a:bodyPr rtlCol="0" anchor="ctr"/>
+          <a:lstStyle/>
+          <a:p>
+            <a:pPr algn="ctr"/>
+          </a:p>
+        </p:txBody>
+      </p:sp>
+      <p:sp>
+        <p:nvSpPr>
+          <p:cNvPr id="13" name="번호 2"/>
+          <p:cNvSpPr/>
+          <p:nvPr/>
+        </p:nvSpPr>
+        <p:spPr>
+          <a:xfrm>
+            <a:off x="4536338" y="1965960"/>
             <a:ext cx="457200" cy="457200"/>
           </a:xfrm>
           <a:prstGeom prst="ellipse">
             <a:avLst/>
           </a:prstGeom>
           <a:solidFill>
-            <a:srgbClr val="26B8C5"/>
+            <a:srgbClr val="7BE0EA"/>
           </a:solidFill>
           <a:ln>
             <a:noFill/>
@@ -8852,7 +9295,7 @@
             <a:r>
               <a:rPr sz="1600" b="1" i="0">
                 <a:solidFill>
-                  <a:srgbClr val="FFFFFF"/>
+                  <a:srgbClr val="26231F"/>
                 </a:solidFill>
               </a:rPr>
               <a:t>2</a:t>
@@ -8862,14 +9305,14 @@
       </p:sp>
       <p:sp>
         <p:nvSpPr>
-          <p:cNvPr id="11" name="TextBox 10"/>
+          <p:cNvPr id="14" name="TextBox 13"/>
           <p:cNvSpPr txBox="1"/>
           <p:nvPr/>
         </p:nvSpPr>
         <p:spPr>
           <a:xfrm>
-            <a:off x="4551578" y="2331720"/>
-            <a:ext cx="3088538" cy="640080"/>
+            <a:off x="4490618" y="2560320"/>
+            <a:ext cx="3210458" cy="640080"/>
           </a:xfrm>
           <a:prstGeom prst="rect">
             <a:avLst/>
@@ -8890,7 +9333,7 @@
             <a:r>
               <a:rPr sz="1800" b="1" i="0">
                 <a:solidFill>
-                  <a:srgbClr val="11595F"/>
+                  <a:srgbClr val="274649"/>
                 </a:solidFill>
               </a:rPr>
               <a:t>문의할 것</a:t>
@@ -8900,14 +9343,14 @@
       </p:sp>
       <p:sp>
         <p:nvSpPr>
-          <p:cNvPr id="12" name="TextBox 11"/>
+          <p:cNvPr id="15" name="TextBox 14"/>
           <p:cNvSpPr txBox="1"/>
           <p:nvPr/>
         </p:nvSpPr>
         <p:spPr>
           <a:xfrm>
-            <a:off x="4551578" y="3017520"/>
-            <a:ext cx="3088538" cy="2377439"/>
+            <a:off x="4490618" y="3246120"/>
+            <a:ext cx="3210458" cy="2331720"/>
           </a:xfrm>
           <a:prstGeom prst="rect">
             <a:avLst/>
@@ -8928,7 +9371,7 @@
             <a:r>
               <a:rPr sz="1500" b="0" i="0">
                 <a:solidFill>
-                  <a:srgbClr val="2B2B2B"/>
+                  <a:srgbClr val="26231F"/>
                 </a:solidFill>
               </a:rPr>
               <a:t>내용을 입력하세요</a:t>
@@ -8938,27 +9381,25 @@
       </p:sp>
       <p:sp>
         <p:nvSpPr>
-          <p:cNvPr id="13" name="카드 3"/>
+          <p:cNvPr id="16" name="카드 3"/>
           <p:cNvSpPr/>
           <p:nvPr/>
         </p:nvSpPr>
         <p:spPr>
           <a:xfrm>
-            <a:off x="8005876" y="1554480"/>
-            <a:ext cx="3362858" cy="3977639"/>
+            <a:off x="8066836" y="1783080"/>
+            <a:ext cx="3484778" cy="3931920"/>
           </a:xfrm>
           <a:prstGeom prst="roundRect">
             <a:avLst>
-              <a:gd name="adj" fmla="val 8000"/>
+              <a:gd name="adj" fmla="val 4000"/>
             </a:avLst>
           </a:prstGeom>
           <a:solidFill>
-            <a:srgbClr val="EEFBFC"/>
+            <a:srgbClr val="EAFBFD"/>
           </a:solidFill>
-          <a:ln w="15875">
-            <a:solidFill>
-              <a:srgbClr val="D1F7FA"/>
-            </a:solidFill>
+          <a:ln>
+            <a:noFill/>
           </a:ln>
         </p:spPr>
         <p:txBody>
@@ -8971,20 +9412,49 @@
       </p:sp>
       <p:sp>
         <p:nvSpPr>
-          <p:cNvPr id="14" name="번호 3"/>
+          <p:cNvPr id="17" name="포인트 막대"/>
           <p:cNvSpPr/>
           <p:nvPr/>
         </p:nvSpPr>
         <p:spPr>
           <a:xfrm>
-            <a:off x="8188756" y="1737360"/>
+            <a:off x="8066836" y="1892807"/>
+            <a:ext cx="54864" cy="3712463"/>
+          </a:xfrm>
+          <a:prstGeom prst="rect">
+            <a:avLst/>
+          </a:prstGeom>
+          <a:solidFill>
+            <a:srgbClr val="7BE0EA"/>
+          </a:solidFill>
+          <a:ln>
+            <a:noFill/>
+          </a:ln>
+        </p:spPr>
+        <p:txBody>
+          <a:bodyPr rtlCol="0" anchor="ctr"/>
+          <a:lstStyle/>
+          <a:p>
+            <a:pPr algn="ctr"/>
+          </a:p>
+        </p:txBody>
+      </p:sp>
+      <p:sp>
+        <p:nvSpPr>
+          <p:cNvPr id="18" name="번호 3"/>
+          <p:cNvSpPr/>
+          <p:nvPr/>
+        </p:nvSpPr>
+        <p:spPr>
+          <a:xfrm>
+            <a:off x="8249716" y="1965960"/>
             <a:ext cx="457200" cy="457200"/>
           </a:xfrm>
           <a:prstGeom prst="ellipse">
             <a:avLst/>
           </a:prstGeom>
           <a:solidFill>
-            <a:srgbClr val="26B8C5"/>
+            <a:srgbClr val="7BE0EA"/>
           </a:solidFill>
           <a:ln>
             <a:noFill/>
@@ -9004,7 +9474,7 @@
             <a:r>
               <a:rPr sz="1600" b="1" i="0">
                 <a:solidFill>
-                  <a:srgbClr val="FFFFFF"/>
+                  <a:srgbClr val="26231F"/>
                 </a:solidFill>
               </a:rPr>
               <a:t>3</a:t>
@@ -9014,14 +9484,14 @@
       </p:sp>
       <p:sp>
         <p:nvSpPr>
-          <p:cNvPr id="15" name="TextBox 14"/>
+          <p:cNvPr id="19" name="TextBox 18"/>
           <p:cNvSpPr txBox="1"/>
           <p:nvPr/>
         </p:nvSpPr>
         <p:spPr>
           <a:xfrm>
-            <a:off x="8143036" y="2331720"/>
-            <a:ext cx="3088538" cy="640080"/>
+            <a:off x="8203996" y="2560320"/>
+            <a:ext cx="3210458" cy="640080"/>
           </a:xfrm>
           <a:prstGeom prst="rect">
             <a:avLst/>
@@ -9042,7 +9512,7 @@
             <a:r>
               <a:rPr sz="1800" b="1" i="0">
                 <a:solidFill>
-                  <a:srgbClr val="11595F"/>
+                  <a:srgbClr val="274649"/>
                 </a:solidFill>
               </a:rPr>
               <a:t>정리할 날짜</a:t>
@@ -9052,14 +9522,14 @@
       </p:sp>
       <p:sp>
         <p:nvSpPr>
-          <p:cNvPr id="16" name="TextBox 15"/>
+          <p:cNvPr id="20" name="TextBox 19"/>
           <p:cNvSpPr txBox="1"/>
           <p:nvPr/>
         </p:nvSpPr>
         <p:spPr>
           <a:xfrm>
-            <a:off x="8143036" y="3017520"/>
-            <a:ext cx="3088538" cy="2377439"/>
+            <a:off x="8203996" y="3246120"/>
+            <a:ext cx="3210458" cy="2331720"/>
           </a:xfrm>
           <a:prstGeom prst="rect">
             <a:avLst/>
@@ -9080,7 +9550,7 @@
             <a:r>
               <a:rPr sz="1500" b="0" i="0">
                 <a:solidFill>
-                  <a:srgbClr val="2B2B2B"/>
+                  <a:srgbClr val="26231F"/>
                 </a:solidFill>
               </a:rPr>
               <a:t>내용을 입력하세요</a:t>
@@ -9090,14 +9560,14 @@
       </p:sp>
       <p:sp>
         <p:nvSpPr>
-          <p:cNvPr id="17" name="안내 문구"/>
+          <p:cNvPr id="21" name="안내 문구"/>
           <p:cNvSpPr txBox="1"/>
           <p:nvPr/>
         </p:nvSpPr>
         <p:spPr>
           <a:xfrm>
-            <a:off x="822960" y="5623560"/>
-            <a:ext cx="10545775" cy="548640"/>
+            <a:off x="640080" y="5806440"/>
+            <a:ext cx="10911535" cy="548640"/>
           </a:xfrm>
           <a:prstGeom prst="rect">
             <a:avLst/>
@@ -9145,34 +9615,34 @@
         <a:sysClr val="window" lastClr="FFFFFF"/>
       </a:lt1>
       <a:dk2>
-        <a:srgbClr val="11595F"/>
+        <a:srgbClr val="274649"/>
       </a:dk2>
       <a:lt2>
-        <a:srgbClr val="EEFBFC"/>
+        <a:srgbClr val="EAFBFD"/>
       </a:lt2>
       <a:accent1>
-        <a:srgbClr val="26B8C5"/>
+        <a:srgbClr val="7BE0EA"/>
       </a:accent1>
       <a:accent2>
-        <a:srgbClr val="209DB6"/>
+        <a:srgbClr val="9FC3EF"/>
       </a:accent2>
       <a:accent3>
-        <a:srgbClr val="11595F"/>
+        <a:srgbClr val="274649"/>
       </a:accent3>
       <a:accent4>
         <a:srgbClr val="D1F7FA"/>
       </a:accent4>
       <a:accent5>
-        <a:srgbClr val="23AABE"/>
+        <a:srgbClr val="8DD2EC"/>
       </a:accent5>
       <a:accent6>
-        <a:srgbClr val="709B9F"/>
+        <a:srgbClr val="7D9092"/>
       </a:accent6>
       <a:hlink>
-        <a:srgbClr val="26B8C5"/>
+        <a:srgbClr val="7BE0EA"/>
       </a:hlink>
       <a:folHlink>
-        <a:srgbClr val="11595F"/>
+        <a:srgbClr val="274649"/>
       </a:folHlink>
     </a:clrScheme>
     <a:fontScheme name="Office">
